--- a/docs/As-Is調査_削減設問リスク一覧.pptx
+++ b/docs/As-Is調査_削減設問リスク一覧.pptx
@@ -1899,7 +1899,7 @@
                 <a:ea typeface="Meiryo" pitchFamily="34" charset="-122"/>
                 <a:cs typeface="Meiryo" pitchFamily="34" charset="-120"/>
               </a:rPr>
-              <a:t>削除理由が妥当で、リスクが軽微または別の仕組みで担保されている51件は【削除に同意】とし、以後のリスク一覧からは外しています。</a:t>
+              <a:t>削除理由が妥当で、リスクが軽微または別の仕組みで担保されている48件は【削除に同意】とし、以後のリスク一覧からは外しています。</a:t>
             </a:r>
             <a:endParaRPr lang="en-US" sz="1200" dirty="0"/>
           </a:p>
@@ -1920,7 +1920,7 @@
                 <a:ea typeface="Meiryo" pitchFamily="34" charset="-122"/>
                 <a:cs typeface="Meiryo" pitchFamily="34" charset="-120"/>
               </a:rPr>
-              <a:t>削除理由に論理的な誤り・対応不足がある、または理由自体は妥当でもシステム導入・コンプライアンス上のリスクが残る30件を【要注意】として、拠点配布前の再確認を推奨します。</a:t>
+              <a:t>削除理由に論理的な誤り・対応不足がある、または理由自体は妥当でもシステム導入・コンプライアンス上のリスクが残る33件を【要注意】として、拠点配布前の再確認を推奨します（うち3件は、いったん削除に同意した後にユーザーからの指摘を受けて再分類した項目です）。</a:t>
             </a:r>
             <a:endParaRPr lang="en-US" sz="1200" dirty="0"/>
           </a:p>
@@ -2203,7 +2203,7 @@
                 <a:ea typeface="Meiryo" pitchFamily="34" charset="-122"/>
                 <a:cs typeface="Meiryo" pitchFamily="34" charset="-120"/>
               </a:rPr>
-              <a:t>南（デジ戦）が判断した81件の削除について、専門家の視点で再検証した結果、51件は削除に同意、30件を要注意としました。</a:t>
+              <a:t>南（デジ戦）が判断した81件の削除について、専門家の視点で再検証した結果、48件は削除に同意、33件を要注意としました。</a:t>
             </a:r>
             <a:endParaRPr lang="en-US" sz="1150" dirty="0"/>
           </a:p>
@@ -2227,7 +2227,7 @@
                 <a:ea typeface="Meiryo" pitchFamily="34" charset="-122"/>
                 <a:cs typeface="Meiryo" pitchFamily="34" charset="-120"/>
               </a:rPr>
-              <a:t>要注意30件のうち10件は削除理由に論理的な誤り・対応不足があり、設問を残すか別の形で確認することを推奨します。</a:t>
+              <a:t>要注意33件のうち12件は削除理由に論理的な誤り・対応不足があり、設問を残すか別の形で確認することを推奨します。</a:t>
             </a:r>
             <a:endParaRPr lang="en-US" sz="1150" dirty="0"/>
           </a:p>
@@ -2251,7 +2251,31 @@
                 <a:ea typeface="Meiryo" pitchFamily="34" charset="-122"/>
                 <a:cs typeface="Meiryo" pitchFamily="34" charset="-120"/>
               </a:rPr>
-              <a:t>残り20件は判断の方向性自体は妥当ですが、パイロット回答者（ESG企画室・海外BU）が本社・広域担当という立場であることに起因する一般化のリスクや、コンプライアンス上の懸念が残ります。</a:t>
+              <a:t>残り21件は判断の方向性自体は妥当ですが、パイロット回答者（ESG企画室・海外BU）が本社・広域担当という立場であることに起因する一般化のリスクや、コンプライアンス上の懸念が残ります。</a:t>
+            </a:r>
+            <a:endParaRPr lang="en-US" sz="1150" dirty="0"/>
+          </a:p>
+          <a:p>
+            <a:pPr marL="203200" indent="-203200">
+              <a:lnSpc>
+                <a:spcPct val="122000"/>
+              </a:lnSpc>
+              <a:spcAft>
+                <a:spcPts val="1400"/>
+              </a:spcAft>
+              <a:buSzPct val="100000"/>
+              <a:buChar char="■"/>
+            </a:pPr>
+            <a:r>
+              <a:rPr lang="en-US" sz="1150" dirty="0">
+                <a:solidFill>
+                  <a:srgbClr val="26303B"/>
+                </a:solidFill>
+                <a:latin typeface="Meiryo" pitchFamily="34" charset="0"/>
+                <a:ea typeface="Meiryo" pitchFamily="34" charset="-122"/>
+                <a:cs typeface="Meiryo" pitchFamily="34" charset="-120"/>
+              </a:rPr>
+              <a:t>特にH3-08（過年度比較）・H9-07（現地承認）は、拠点の意向によらず開示基準・現地法制度側の要求が優先される可能性があるため、要求定義確定前の再確認を強く推奨します。C-06・C-17（拠点側計算範囲・月間工数）は、投資判断（ROI試算）や算定アーキテクチャの根幹に関わるにもかかわらず実質未回答のまま本社推定に切り替わっており、最優先で対応すべき項目です。</a:t>
             </a:r>
             <a:endParaRPr lang="en-US" sz="1150" dirty="0"/>
           </a:p>
@@ -2272,7 +2296,7 @@
                 <a:ea typeface="Meiryo" pitchFamily="34" charset="-122"/>
                 <a:cs typeface="Meiryo" pitchFamily="34" charset="-120"/>
               </a:rPr>
-              <a:t>特にH3-08（過年度比較）・H9-07（現地承認）は、拠点の意向によらず開示基準・現地法制度側の要求が優先される可能性があるため、要求定義確定前の再確認を強く推奨します。C-06・C-17（拠点側計算範囲・月間工数）は、投資判断（ROI試算）や算定アーキテクチャの根幹に関わるにもかかわらず実質未回答のまま本社推定に切り替わっており、最優先で対応すべき項目です。</a:t>
+              <a:t>C-19・H9-01（多言語対応）は当初「RFPに含める前提で設計すれば安全」として削除に同意していましたが、『機能を厚めに実装すれば安全』という理由づけは、翻訳コスト・対応可能ベンダーの減少・価格上昇という当初の指摘そのものを無視するものであり、要求定義の目的（過不足のない要求水準の見極め）と矛盾するため要注意に再分類しました。10-09も、安全網としていたC-06自体の削除判断に問題があると判明したため合わせて再分類しています。</a:t>
             </a:r>
             <a:endParaRPr lang="en-US" sz="1150" dirty="0"/>
           </a:p>
@@ -2655,7 +2679,7 @@
                 <a:ea typeface="Meiryo" pitchFamily="34" charset="-122"/>
                 <a:cs typeface="Meiryo" pitchFamily="34" charset="-120"/>
               </a:rPr>
-              <a:t>51件</a:t>
+              <a:t>48件</a:t>
             </a:r>
             <a:endParaRPr lang="en-US" sz="2800" dirty="0"/>
           </a:p>
@@ -2762,7 +2786,7 @@
                 <a:ea typeface="Meiryo" pitchFamily="34" charset="-122"/>
                 <a:cs typeface="Meiryo" pitchFamily="34" charset="-120"/>
               </a:rPr>
-              <a:t>30件</a:t>
+              <a:t>33件</a:t>
             </a:r>
             <a:endParaRPr lang="en-US" sz="2800" dirty="0"/>
           </a:p>
@@ -2840,7 +2864,7 @@
                 <a:ea typeface="Meiryo" pitchFamily="34" charset="-122"/>
                 <a:cs typeface="Meiryo" pitchFamily="34" charset="-120"/>
               </a:rPr>
-              <a:t>要注意30件の内訳</a:t>
+              <a:t>要注意33件の内訳</a:t>
             </a:r>
             <a:endParaRPr lang="en-US" sz="1300" dirty="0"/>
           </a:p>
@@ -2901,7 +2925,7 @@
                 <a:ea typeface="Meiryo" pitchFamily="34" charset="-122"/>
                 <a:cs typeface="Meiryo" pitchFamily="34" charset="-120"/>
               </a:rPr>
-              <a:t>理由不十分・誤り（10件）</a:t>
+              <a:t>理由不十分・誤り（12件）</a:t>
             </a:r>
             <a:endParaRPr lang="en-US" sz="1100" dirty="0"/>
           </a:p>
@@ -3001,7 +3025,7 @@
                 <a:ea typeface="Meiryo" pitchFamily="34" charset="-122"/>
                 <a:cs typeface="Meiryo" pitchFamily="34" charset="-120"/>
               </a:rPr>
-              <a:t>理由は妥当だがリスク残存（20件）</a:t>
+              <a:t>理由は妥当だがリスク残存（21件）</a:t>
             </a:r>
             <a:endParaRPr lang="en-US" sz="1100" dirty="0"/>
           </a:p>
@@ -3101,7 +3125,7 @@
                 <a:ea typeface="Meiryo" pitchFamily="34" charset="-122"/>
                 <a:cs typeface="Meiryo" pitchFamily="34" charset="-120"/>
               </a:rPr>
-              <a:t>以降のページで、要注意30件を影響度とともに一覧します。削除に同意した51件は付録として末尾に一覧を掲載しています。</a:t>
+              <a:t>以降のページで、要注意33件を影響度とともに一覧します。削除に同意した48件は付録として末尾に一覧を掲載しています。</a:t>
             </a:r>
             <a:endParaRPr lang="en-US" sz="1000" dirty="0"/>
           </a:p>
@@ -11017,7 +11041,7 @@
                 <a:gridCol w="3730752"/>
                 <a:gridCol w="640080"/>
               </a:tblGrid>
-              <a:tr h="790303">
+              <a:tr h="614680">
                 <a:tc>
                   <a:txBody>
                     <a:bodyPr/>
@@ -11427,7 +11451,7 @@
                   </a:tcPr>
                 </a:tc>
               </a:tr>
-              <a:tr h="790303">
+              <a:tr h="614680">
                 <a:tc>
                   <a:txBody>
                     <a:bodyPr/>
@@ -11825,7 +11849,7 @@
                   </a:tcPr>
                 </a:tc>
               </a:tr>
-              <a:tr h="790303">
+              <a:tr h="614680">
                 <a:tc>
                   <a:txBody>
                     <a:bodyPr/>
@@ -12223,7 +12247,7 @@
                   </a:tcPr>
                 </a:tc>
               </a:tr>
-              <a:tr h="790303">
+              <a:tr h="614680">
                 <a:tc>
                   <a:txBody>
                     <a:bodyPr/>
@@ -12621,7 +12645,7 @@
                   </a:tcPr>
                 </a:tc>
               </a:tr>
-              <a:tr h="790303">
+              <a:tr h="614680">
                 <a:tc>
                   <a:txBody>
                     <a:bodyPr/>
@@ -13019,7 +13043,7 @@
                   </a:tcPr>
                 </a:tc>
               </a:tr>
-              <a:tr h="790303">
+              <a:tr h="614680">
                 <a:tc>
                   <a:txBody>
                     <a:bodyPr/>
@@ -13417,7 +13441,7 @@
                   </a:tcPr>
                 </a:tc>
               </a:tr>
-              <a:tr h="790303">
+              <a:tr h="614680">
                 <a:tc>
                   <a:txBody>
                     <a:bodyPr/>
@@ -13815,7 +13839,7 @@
                   </a:tcPr>
                 </a:tc>
               </a:tr>
-              <a:tr h="0">
+              <a:tr h="614680">
                 <a:tc>
                   <a:txBody>
                     <a:bodyPr/>
@@ -14209,6 +14233,802 @@
                     </a:lnB>
                     <a:solidFill>
                       <a:srgbClr val="FFE699"/>
+                    </a:solidFill>
+                  </a:tcPr>
+                </a:tc>
+              </a:tr>
+              <a:tr h="614680">
+                <a:tc>
+                  <a:txBody>
+                    <a:bodyPr/>
+                    <a:lstStyle/>
+                    <a:p>
+                      <a:pPr algn="ctr" indent="0" marL="0">
+                        <a:buNone/>
+                      </a:pPr>
+                      <a:r>
+                        <a:rPr lang="en-US" sz="800" b="1" dirty="0">
+                          <a:solidFill>
+                            <a:srgbClr val="000000"/>
+                          </a:solidFill>
+                          <a:latin typeface="Meiryo" pitchFamily="34" charset="0"/>
+                          <a:ea typeface="Meiryo" pitchFamily="34" charset="-122"/>
+                          <a:cs typeface="Meiryo" pitchFamily="34" charset="-120"/>
+                        </a:rPr>
+                        <a:t>C-06</a:t>
+                      </a:r>
+                      <a:endParaRPr lang="en-US" sz="800" dirty="0">
+                        <a:latin typeface="Meiryo" charset="0"/>
+                        <a:ea typeface="Meiryo" charset="0"/>
+                        <a:cs typeface="Meiryo" charset="0"/>
+                      </a:endParaRPr>
+                    </a:p>
+                  </a:txBody>
+                  <a:tcPr marL="91440" marR="91440" marT="45720" marB="45720" anchor="ctr">
+                    <a:lnL w="6350" cap="flat" cmpd="sng" algn="ctr">
+                      <a:solidFill>
+                        <a:srgbClr val="C9D5E6"/>
+                      </a:solidFill>
+                      <a:prstDash val="solid"/>
+                      <a:round/>
+                      <a:headEnd type="none" w="med" len="med"/>
+                      <a:tailEnd type="none" w="med" len="med"/>
+                    </a:lnL>
+                    <a:lnR w="6350" cap="flat" cmpd="sng" algn="ctr">
+                      <a:solidFill>
+                        <a:srgbClr val="C9D5E6"/>
+                      </a:solidFill>
+                      <a:prstDash val="solid"/>
+                      <a:round/>
+                      <a:headEnd type="none" w="med" len="med"/>
+                      <a:tailEnd type="none" w="med" len="med"/>
+                    </a:lnR>
+                    <a:lnT w="6350" cap="flat" cmpd="sng" algn="ctr">
+                      <a:solidFill>
+                        <a:srgbClr val="C9D5E6"/>
+                      </a:solidFill>
+                      <a:prstDash val="solid"/>
+                      <a:round/>
+                      <a:headEnd type="none" w="med" len="med"/>
+                      <a:tailEnd type="none" w="med" len="med"/>
+                    </a:lnT>
+                    <a:lnB w="6350" cap="flat" cmpd="sng" algn="ctr">
+                      <a:solidFill>
+                        <a:srgbClr val="C9D5E6"/>
+                      </a:solidFill>
+                      <a:prstDash val="solid"/>
+                      <a:round/>
+                      <a:headEnd type="none" w="med" len="med"/>
+                      <a:tailEnd type="none" w="med" len="med"/>
+                    </a:lnB>
+                  </a:tcPr>
+                </a:tc>
+                <a:tc>
+                  <a:txBody>
+                    <a:bodyPr/>
+                    <a:lstStyle/>
+                    <a:p>
+                      <a:pPr indent="0" marL="0">
+                        <a:buNone/>
+                      </a:pPr>
+                      <a:r>
+                        <a:rPr lang="en-US" sz="730" dirty="0">
+                          <a:solidFill>
+                            <a:srgbClr val="000000"/>
+                          </a:solidFill>
+                          <a:latin typeface="Meiryo" pitchFamily="34" charset="0"/>
+                          <a:ea typeface="Meiryo" pitchFamily="34" charset="-122"/>
+                          <a:cs typeface="Meiryo" pitchFamily="34" charset="-120"/>
+                        </a:rPr>
+                        <a:t>拠点側での計算実施範囲</a:t>
+                      </a:r>
+                      <a:endParaRPr lang="en-US" sz="730" dirty="0">
+                        <a:latin typeface="Meiryo" charset="0"/>
+                        <a:ea typeface="Meiryo" charset="0"/>
+                        <a:cs typeface="Meiryo" charset="0"/>
+                      </a:endParaRPr>
+                    </a:p>
+                  </a:txBody>
+                  <a:tcPr marL="91440" marR="91440" marT="45720" marB="45720" anchor="ctr">
+                    <a:lnL w="6350" cap="flat" cmpd="sng" algn="ctr">
+                      <a:solidFill>
+                        <a:srgbClr val="C9D5E6"/>
+                      </a:solidFill>
+                      <a:prstDash val="solid"/>
+                      <a:round/>
+                      <a:headEnd type="none" w="med" len="med"/>
+                      <a:tailEnd type="none" w="med" len="med"/>
+                    </a:lnL>
+                    <a:lnR w="6350" cap="flat" cmpd="sng" algn="ctr">
+                      <a:solidFill>
+                        <a:srgbClr val="C9D5E6"/>
+                      </a:solidFill>
+                      <a:prstDash val="solid"/>
+                      <a:round/>
+                      <a:headEnd type="none" w="med" len="med"/>
+                      <a:tailEnd type="none" w="med" len="med"/>
+                    </a:lnR>
+                    <a:lnT w="6350" cap="flat" cmpd="sng" algn="ctr">
+                      <a:solidFill>
+                        <a:srgbClr val="C9D5E6"/>
+                      </a:solidFill>
+                      <a:prstDash val="solid"/>
+                      <a:round/>
+                      <a:headEnd type="none" w="med" len="med"/>
+                      <a:tailEnd type="none" w="med" len="med"/>
+                    </a:lnT>
+                    <a:lnB w="6350" cap="flat" cmpd="sng" algn="ctr">
+                      <a:solidFill>
+                        <a:srgbClr val="C9D5E6"/>
+                      </a:solidFill>
+                      <a:prstDash val="solid"/>
+                      <a:round/>
+                      <a:headEnd type="none" w="med" len="med"/>
+                      <a:tailEnd type="none" w="med" len="med"/>
+                    </a:lnB>
+                  </a:tcPr>
+                </a:tc>
+                <a:tc>
+                  <a:txBody>
+                    <a:bodyPr/>
+                    <a:lstStyle/>
+                    <a:p>
+                      <a:pPr indent="0" marL="0">
+                        <a:buNone/>
+                      </a:pPr>
+                      <a:r>
+                        <a:rPr lang="en-US" sz="730" dirty="0">
+                          <a:solidFill>
+                            <a:srgbClr val="000000"/>
+                          </a:solidFill>
+                          <a:latin typeface="Meiryo" pitchFamily="34" charset="0"/>
+                          <a:ea typeface="Meiryo" pitchFamily="34" charset="-122"/>
+                          <a:cs typeface="Meiryo" pitchFamily="34" charset="-120"/>
+                        </a:rPr>
+                        <a:t>海外法人向けは削除。国内は実態をESGに確認のうえ調整</a:t>
+                      </a:r>
+                      <a:endParaRPr lang="en-US" sz="730" dirty="0">
+                        <a:latin typeface="Meiryo" charset="0"/>
+                        <a:ea typeface="Meiryo" charset="0"/>
+                        <a:cs typeface="Meiryo" charset="0"/>
+                      </a:endParaRPr>
+                    </a:p>
+                  </a:txBody>
+                  <a:tcPr marL="91440" marR="91440" marT="45720" marB="45720" anchor="ctr">
+                    <a:lnL w="6350" cap="flat" cmpd="sng" algn="ctr">
+                      <a:solidFill>
+                        <a:srgbClr val="C9D5E6"/>
+                      </a:solidFill>
+                      <a:prstDash val="solid"/>
+                      <a:round/>
+                      <a:headEnd type="none" w="med" len="med"/>
+                      <a:tailEnd type="none" w="med" len="med"/>
+                    </a:lnL>
+                    <a:lnR w="6350" cap="flat" cmpd="sng" algn="ctr">
+                      <a:solidFill>
+                        <a:srgbClr val="C9D5E6"/>
+                      </a:solidFill>
+                      <a:prstDash val="solid"/>
+                      <a:round/>
+                      <a:headEnd type="none" w="med" len="med"/>
+                      <a:tailEnd type="none" w="med" len="med"/>
+                    </a:lnR>
+                    <a:lnT w="6350" cap="flat" cmpd="sng" algn="ctr">
+                      <a:solidFill>
+                        <a:srgbClr val="C9D5E6"/>
+                      </a:solidFill>
+                      <a:prstDash val="solid"/>
+                      <a:round/>
+                      <a:headEnd type="none" w="med" len="med"/>
+                      <a:tailEnd type="none" w="med" len="med"/>
+                    </a:lnT>
+                    <a:lnB w="6350" cap="flat" cmpd="sng" algn="ctr">
+                      <a:solidFill>
+                        <a:srgbClr val="C9D5E6"/>
+                      </a:solidFill>
+                      <a:prstDash val="solid"/>
+                      <a:round/>
+                      <a:headEnd type="none" w="med" len="med"/>
+                      <a:tailEnd type="none" w="med" len="med"/>
+                    </a:lnB>
+                  </a:tcPr>
+                </a:tc>
+                <a:tc>
+                  <a:txBody>
+                    <a:bodyPr/>
+                    <a:lstStyle/>
+                    <a:p>
+                      <a:pPr algn="ctr" indent="0" marL="0">
+                        <a:buNone/>
+                      </a:pPr>
+                      <a:r>
+                        <a:rPr lang="en-US" sz="750" b="1" dirty="0">
+                          <a:solidFill>
+                            <a:srgbClr val="8A3B12"/>
+                          </a:solidFill>
+                          <a:latin typeface="Meiryo" pitchFamily="34" charset="0"/>
+                          <a:ea typeface="Meiryo" pitchFamily="34" charset="-122"/>
+                          <a:cs typeface="Meiryo" pitchFamily="34" charset="-120"/>
+                        </a:rPr>
+                        <a:t>リスク残存・理由不十分</a:t>
+                      </a:r>
+                      <a:endParaRPr lang="en-US" sz="750" dirty="0">
+                        <a:latin typeface="Meiryo" charset="0"/>
+                        <a:ea typeface="Meiryo" charset="0"/>
+                        <a:cs typeface="Meiryo" charset="0"/>
+                      </a:endParaRPr>
+                    </a:p>
+                  </a:txBody>
+                  <a:tcPr marL="91440" marR="91440" marT="45720" marB="45720" anchor="ctr">
+                    <a:lnL w="6350" cap="flat" cmpd="sng" algn="ctr">
+                      <a:solidFill>
+                        <a:srgbClr val="C9D5E6"/>
+                      </a:solidFill>
+                      <a:prstDash val="solid"/>
+                      <a:round/>
+                      <a:headEnd type="none" w="med" len="med"/>
+                      <a:tailEnd type="none" w="med" len="med"/>
+                    </a:lnL>
+                    <a:lnR w="6350" cap="flat" cmpd="sng" algn="ctr">
+                      <a:solidFill>
+                        <a:srgbClr val="C9D5E6"/>
+                      </a:solidFill>
+                      <a:prstDash val="solid"/>
+                      <a:round/>
+                      <a:headEnd type="none" w="med" len="med"/>
+                      <a:tailEnd type="none" w="med" len="med"/>
+                    </a:lnR>
+                    <a:lnT w="6350" cap="flat" cmpd="sng" algn="ctr">
+                      <a:solidFill>
+                        <a:srgbClr val="C9D5E6"/>
+                      </a:solidFill>
+                      <a:prstDash val="solid"/>
+                      <a:round/>
+                      <a:headEnd type="none" w="med" len="med"/>
+                      <a:tailEnd type="none" w="med" len="med"/>
+                    </a:lnT>
+                    <a:lnB w="6350" cap="flat" cmpd="sng" algn="ctr">
+                      <a:solidFill>
+                        <a:srgbClr val="C9D5E6"/>
+                      </a:solidFill>
+                      <a:prstDash val="solid"/>
+                      <a:round/>
+                      <a:headEnd type="none" w="med" len="med"/>
+                      <a:tailEnd type="none" w="med" len="med"/>
+                    </a:lnB>
+                    <a:solidFill>
+                      <a:srgbClr val="F8CBAD"/>
+                    </a:solidFill>
+                  </a:tcPr>
+                </a:tc>
+                <a:tc>
+                  <a:txBody>
+                    <a:bodyPr/>
+                    <a:lstStyle/>
+                    <a:p>
+                      <a:pPr indent="0" marL="0">
+                        <a:buNone/>
+                      </a:pPr>
+                      <a:r>
+                        <a:rPr lang="en-US" sz="730" dirty="0">
+                          <a:solidFill>
+                            <a:srgbClr val="000000"/>
+                          </a:solidFill>
+                          <a:latin typeface="Meiryo" pitchFamily="34" charset="0"/>
+                          <a:ea typeface="Meiryo" pitchFamily="34" charset="-122"/>
+                          <a:cs typeface="Meiryo" pitchFamily="34" charset="-120"/>
+                        </a:rPr>
+                        <a:t>海外BU自身が「生産拠点では自前で算定をしている」と明言。削除は当初のリスク（拠点独自計算による数値連続性の断絶）を放置。国内分はステータス『保留』のまま未決着</a:t>
+                      </a:r>
+                      <a:endParaRPr lang="en-US" sz="730" dirty="0">
+                        <a:latin typeface="Meiryo" charset="0"/>
+                        <a:ea typeface="Meiryo" charset="0"/>
+                        <a:cs typeface="Meiryo" charset="0"/>
+                      </a:endParaRPr>
+                    </a:p>
+                  </a:txBody>
+                  <a:tcPr marL="91440" marR="91440" marT="45720" marB="45720" anchor="ctr">
+                    <a:lnL w="6350" cap="flat" cmpd="sng" algn="ctr">
+                      <a:solidFill>
+                        <a:srgbClr val="C9D5E6"/>
+                      </a:solidFill>
+                      <a:prstDash val="solid"/>
+                      <a:round/>
+                      <a:headEnd type="none" w="med" len="med"/>
+                      <a:tailEnd type="none" w="med" len="med"/>
+                    </a:lnL>
+                    <a:lnR w="6350" cap="flat" cmpd="sng" algn="ctr">
+                      <a:solidFill>
+                        <a:srgbClr val="C9D5E6"/>
+                      </a:solidFill>
+                      <a:prstDash val="solid"/>
+                      <a:round/>
+                      <a:headEnd type="none" w="med" len="med"/>
+                      <a:tailEnd type="none" w="med" len="med"/>
+                    </a:lnR>
+                    <a:lnT w="6350" cap="flat" cmpd="sng" algn="ctr">
+                      <a:solidFill>
+                        <a:srgbClr val="C9D5E6"/>
+                      </a:solidFill>
+                      <a:prstDash val="solid"/>
+                      <a:round/>
+                      <a:headEnd type="none" w="med" len="med"/>
+                      <a:tailEnd type="none" w="med" len="med"/>
+                    </a:lnT>
+                    <a:lnB w="6350" cap="flat" cmpd="sng" algn="ctr">
+                      <a:solidFill>
+                        <a:srgbClr val="C9D5E6"/>
+                      </a:solidFill>
+                      <a:prstDash val="solid"/>
+                      <a:round/>
+                      <a:headEnd type="none" w="med" len="med"/>
+                      <a:tailEnd type="none" w="med" len="med"/>
+                    </a:lnB>
+                  </a:tcPr>
+                </a:tc>
+                <a:tc>
+                  <a:txBody>
+                    <a:bodyPr/>
+                    <a:lstStyle/>
+                    <a:p>
+                      <a:pPr algn="ctr" indent="0" marL="0">
+                        <a:buNone/>
+                      </a:pPr>
+                      <a:r>
+                        <a:rPr lang="en-US" sz="850" b="1" dirty="0">
+                          <a:solidFill>
+                            <a:srgbClr val="8A3B12"/>
+                          </a:solidFill>
+                          <a:latin typeface="Meiryo" pitchFamily="34" charset="0"/>
+                          <a:ea typeface="Meiryo" pitchFamily="34" charset="-122"/>
+                          <a:cs typeface="Meiryo" pitchFamily="34" charset="-120"/>
+                        </a:rPr>
+                        <a:t>高</a:t>
+                      </a:r>
+                      <a:endParaRPr lang="en-US" sz="850" dirty="0">
+                        <a:latin typeface="Meiryo" charset="0"/>
+                        <a:ea typeface="Meiryo" charset="0"/>
+                        <a:cs typeface="Meiryo" charset="0"/>
+                      </a:endParaRPr>
+                    </a:p>
+                  </a:txBody>
+                  <a:tcPr marL="91440" marR="91440" marT="45720" marB="45720" anchor="ctr">
+                    <a:lnL w="6350" cap="flat" cmpd="sng" algn="ctr">
+                      <a:solidFill>
+                        <a:srgbClr val="C9D5E6"/>
+                      </a:solidFill>
+                      <a:prstDash val="solid"/>
+                      <a:round/>
+                      <a:headEnd type="none" w="med" len="med"/>
+                      <a:tailEnd type="none" w="med" len="med"/>
+                    </a:lnL>
+                    <a:lnR w="6350" cap="flat" cmpd="sng" algn="ctr">
+                      <a:solidFill>
+                        <a:srgbClr val="C9D5E6"/>
+                      </a:solidFill>
+                      <a:prstDash val="solid"/>
+                      <a:round/>
+                      <a:headEnd type="none" w="med" len="med"/>
+                      <a:tailEnd type="none" w="med" len="med"/>
+                    </a:lnR>
+                    <a:lnT w="6350" cap="flat" cmpd="sng" algn="ctr">
+                      <a:solidFill>
+                        <a:srgbClr val="C9D5E6"/>
+                      </a:solidFill>
+                      <a:prstDash val="solid"/>
+                      <a:round/>
+                      <a:headEnd type="none" w="med" len="med"/>
+                      <a:tailEnd type="none" w="med" len="med"/>
+                    </a:lnT>
+                    <a:lnB w="6350" cap="flat" cmpd="sng" algn="ctr">
+                      <a:solidFill>
+                        <a:srgbClr val="C9D5E6"/>
+                      </a:solidFill>
+                      <a:prstDash val="solid"/>
+                      <a:round/>
+                      <a:headEnd type="none" w="med" len="med"/>
+                      <a:tailEnd type="none" w="med" len="med"/>
+                    </a:lnB>
+                    <a:solidFill>
+                      <a:srgbClr val="F8CBAD"/>
+                    </a:solidFill>
+                  </a:tcPr>
+                </a:tc>
+              </a:tr>
+              <a:tr h="0">
+                <a:tc>
+                  <a:txBody>
+                    <a:bodyPr/>
+                    <a:lstStyle/>
+                    <a:p>
+                      <a:pPr algn="ctr" indent="0" marL="0">
+                        <a:buNone/>
+                      </a:pPr>
+                      <a:r>
+                        <a:rPr lang="en-US" sz="800" b="1" dirty="0">
+                          <a:solidFill>
+                            <a:srgbClr val="000000"/>
+                          </a:solidFill>
+                          <a:latin typeface="Meiryo" pitchFamily="34" charset="0"/>
+                          <a:ea typeface="Meiryo" pitchFamily="34" charset="-122"/>
+                          <a:cs typeface="Meiryo" pitchFamily="34" charset="-120"/>
+                        </a:rPr>
+                        <a:t>C-11</a:t>
+                      </a:r>
+                      <a:endParaRPr lang="en-US" sz="800" dirty="0">
+                        <a:latin typeface="Meiryo" charset="0"/>
+                        <a:ea typeface="Meiryo" charset="0"/>
+                        <a:cs typeface="Meiryo" charset="0"/>
+                      </a:endParaRPr>
+                    </a:p>
+                  </a:txBody>
+                  <a:tcPr marL="91440" marR="91440" marT="45720" marB="45720" anchor="ctr">
+                    <a:lnL w="6350" cap="flat" cmpd="sng" algn="ctr">
+                      <a:solidFill>
+                        <a:srgbClr val="C9D5E6"/>
+                      </a:solidFill>
+                      <a:prstDash val="solid"/>
+                      <a:round/>
+                      <a:headEnd type="none" w="med" len="med"/>
+                      <a:tailEnd type="none" w="med" len="med"/>
+                    </a:lnL>
+                    <a:lnR w="6350" cap="flat" cmpd="sng" algn="ctr">
+                      <a:solidFill>
+                        <a:srgbClr val="C9D5E6"/>
+                      </a:solidFill>
+                      <a:prstDash val="solid"/>
+                      <a:round/>
+                      <a:headEnd type="none" w="med" len="med"/>
+                      <a:tailEnd type="none" w="med" len="med"/>
+                    </a:lnR>
+                    <a:lnT w="6350" cap="flat" cmpd="sng" algn="ctr">
+                      <a:solidFill>
+                        <a:srgbClr val="C9D5E6"/>
+                      </a:solidFill>
+                      <a:prstDash val="solid"/>
+                      <a:round/>
+                      <a:headEnd type="none" w="med" len="med"/>
+                      <a:tailEnd type="none" w="med" len="med"/>
+                    </a:lnT>
+                    <a:lnB w="6350" cap="flat" cmpd="sng" algn="ctr">
+                      <a:solidFill>
+                        <a:srgbClr val="C9D5E6"/>
+                      </a:solidFill>
+                      <a:prstDash val="solid"/>
+                      <a:round/>
+                      <a:headEnd type="none" w="med" len="med"/>
+                      <a:tailEnd type="none" w="med" len="med"/>
+                    </a:lnB>
+                  </a:tcPr>
+                </a:tc>
+                <a:tc>
+                  <a:txBody>
+                    <a:bodyPr/>
+                    <a:lstStyle/>
+                    <a:p>
+                      <a:pPr indent="0" marL="0">
+                        <a:buNone/>
+                      </a:pPr>
+                      <a:r>
+                        <a:rPr lang="en-US" sz="730" dirty="0">
+                          <a:solidFill>
+                            <a:srgbClr val="000000"/>
+                          </a:solidFill>
+                          <a:latin typeface="Meiryo" pitchFamily="34" charset="0"/>
+                          <a:ea typeface="Meiryo" pitchFamily="34" charset="-122"/>
+                          <a:cs typeface="Meiryo" pitchFamily="34" charset="-120"/>
+                        </a:rPr>
+                        <a:t>証憑添付必須化時の対応可否</a:t>
+                      </a:r>
+                      <a:endParaRPr lang="en-US" sz="730" dirty="0">
+                        <a:latin typeface="Meiryo" charset="0"/>
+                        <a:ea typeface="Meiryo" charset="0"/>
+                        <a:cs typeface="Meiryo" charset="0"/>
+                      </a:endParaRPr>
+                    </a:p>
+                  </a:txBody>
+                  <a:tcPr marL="91440" marR="91440" marT="45720" marB="45720" anchor="ctr">
+                    <a:lnL w="6350" cap="flat" cmpd="sng" algn="ctr">
+                      <a:solidFill>
+                        <a:srgbClr val="C9D5E6"/>
+                      </a:solidFill>
+                      <a:prstDash val="solid"/>
+                      <a:round/>
+                      <a:headEnd type="none" w="med" len="med"/>
+                      <a:tailEnd type="none" w="med" len="med"/>
+                    </a:lnL>
+                    <a:lnR w="6350" cap="flat" cmpd="sng" algn="ctr">
+                      <a:solidFill>
+                        <a:srgbClr val="C9D5E6"/>
+                      </a:solidFill>
+                      <a:prstDash val="solid"/>
+                      <a:round/>
+                      <a:headEnd type="none" w="med" len="med"/>
+                      <a:tailEnd type="none" w="med" len="med"/>
+                    </a:lnR>
+                    <a:lnT w="6350" cap="flat" cmpd="sng" algn="ctr">
+                      <a:solidFill>
+                        <a:srgbClr val="C9D5E6"/>
+                      </a:solidFill>
+                      <a:prstDash val="solid"/>
+                      <a:round/>
+                      <a:headEnd type="none" w="med" len="med"/>
+                      <a:tailEnd type="none" w="med" len="med"/>
+                    </a:lnT>
+                    <a:lnB w="6350" cap="flat" cmpd="sng" algn="ctr">
+                      <a:solidFill>
+                        <a:srgbClr val="C9D5E6"/>
+                      </a:solidFill>
+                      <a:prstDash val="solid"/>
+                      <a:round/>
+                      <a:headEnd type="none" w="med" len="med"/>
+                      <a:tailEnd type="none" w="med" len="med"/>
+                    </a:lnB>
+                  </a:tcPr>
+                </a:tc>
+                <a:tc>
+                  <a:txBody>
+                    <a:bodyPr/>
+                    <a:lstStyle/>
+                    <a:p>
+                      <a:pPr indent="0" marL="0">
+                        <a:buNone/>
+                      </a:pPr>
+                      <a:r>
+                        <a:rPr lang="en-US" sz="730" dirty="0">
+                          <a:solidFill>
+                            <a:srgbClr val="000000"/>
+                          </a:solidFill>
+                          <a:latin typeface="Meiryo" pitchFamily="34" charset="0"/>
+                          <a:ea typeface="Meiryo" pitchFamily="34" charset="-122"/>
+                          <a:cs typeface="Meiryo" pitchFamily="34" charset="-120"/>
+                        </a:rPr>
+                        <a:t>海外は提出方法の指示自体がなく前提不成立のため削除</a:t>
+                      </a:r>
+                      <a:endParaRPr lang="en-US" sz="730" dirty="0">
+                        <a:latin typeface="Meiryo" charset="0"/>
+                        <a:ea typeface="Meiryo" charset="0"/>
+                        <a:cs typeface="Meiryo" charset="0"/>
+                      </a:endParaRPr>
+                    </a:p>
+                  </a:txBody>
+                  <a:tcPr marL="91440" marR="91440" marT="45720" marB="45720" anchor="ctr">
+                    <a:lnL w="6350" cap="flat" cmpd="sng" algn="ctr">
+                      <a:solidFill>
+                        <a:srgbClr val="C9D5E6"/>
+                      </a:solidFill>
+                      <a:prstDash val="solid"/>
+                      <a:round/>
+                      <a:headEnd type="none" w="med" len="med"/>
+                      <a:tailEnd type="none" w="med" len="med"/>
+                    </a:lnL>
+                    <a:lnR w="6350" cap="flat" cmpd="sng" algn="ctr">
+                      <a:solidFill>
+                        <a:srgbClr val="C9D5E6"/>
+                      </a:solidFill>
+                      <a:prstDash val="solid"/>
+                      <a:round/>
+                      <a:headEnd type="none" w="med" len="med"/>
+                      <a:tailEnd type="none" w="med" len="med"/>
+                    </a:lnR>
+                    <a:lnT w="6350" cap="flat" cmpd="sng" algn="ctr">
+                      <a:solidFill>
+                        <a:srgbClr val="C9D5E6"/>
+                      </a:solidFill>
+                      <a:prstDash val="solid"/>
+                      <a:round/>
+                      <a:headEnd type="none" w="med" len="med"/>
+                      <a:tailEnd type="none" w="med" len="med"/>
+                    </a:lnT>
+                    <a:lnB w="6350" cap="flat" cmpd="sng" algn="ctr">
+                      <a:solidFill>
+                        <a:srgbClr val="C9D5E6"/>
+                      </a:solidFill>
+                      <a:prstDash val="solid"/>
+                      <a:round/>
+                      <a:headEnd type="none" w="med" len="med"/>
+                      <a:tailEnd type="none" w="med" len="med"/>
+                    </a:lnB>
+                  </a:tcPr>
+                </a:tc>
+                <a:tc>
+                  <a:txBody>
+                    <a:bodyPr/>
+                    <a:lstStyle/>
+                    <a:p>
+                      <a:pPr algn="ctr" indent="0" marL="0">
+                        <a:buNone/>
+                      </a:pPr>
+                      <a:r>
+                        <a:rPr lang="en-US" sz="750" b="1" dirty="0">
+                          <a:solidFill>
+                            <a:srgbClr val="7A5B00"/>
+                          </a:solidFill>
+                          <a:latin typeface="Meiryo" pitchFamily="34" charset="0"/>
+                          <a:ea typeface="Meiryo" pitchFamily="34" charset="-122"/>
+                          <a:cs typeface="Meiryo" pitchFamily="34" charset="-120"/>
+                        </a:rPr>
+                        <a:t>リスク残存</a:t>
+                      </a:r>
+                      <a:endParaRPr lang="en-US" sz="750" dirty="0">
+                        <a:latin typeface="Meiryo" charset="0"/>
+                        <a:ea typeface="Meiryo" charset="0"/>
+                        <a:cs typeface="Meiryo" charset="0"/>
+                      </a:endParaRPr>
+                    </a:p>
+                  </a:txBody>
+                  <a:tcPr marL="91440" marR="91440" marT="45720" marB="45720" anchor="ctr">
+                    <a:lnL w="6350" cap="flat" cmpd="sng" algn="ctr">
+                      <a:solidFill>
+                        <a:srgbClr val="C9D5E6"/>
+                      </a:solidFill>
+                      <a:prstDash val="solid"/>
+                      <a:round/>
+                      <a:headEnd type="none" w="med" len="med"/>
+                      <a:tailEnd type="none" w="med" len="med"/>
+                    </a:lnL>
+                    <a:lnR w="6350" cap="flat" cmpd="sng" algn="ctr">
+                      <a:solidFill>
+                        <a:srgbClr val="C9D5E6"/>
+                      </a:solidFill>
+                      <a:prstDash val="solid"/>
+                      <a:round/>
+                      <a:headEnd type="none" w="med" len="med"/>
+                      <a:tailEnd type="none" w="med" len="med"/>
+                    </a:lnR>
+                    <a:lnT w="6350" cap="flat" cmpd="sng" algn="ctr">
+                      <a:solidFill>
+                        <a:srgbClr val="C9D5E6"/>
+                      </a:solidFill>
+                      <a:prstDash val="solid"/>
+                      <a:round/>
+                      <a:headEnd type="none" w="med" len="med"/>
+                      <a:tailEnd type="none" w="med" len="med"/>
+                    </a:lnT>
+                    <a:lnB w="6350" cap="flat" cmpd="sng" algn="ctr">
+                      <a:solidFill>
+                        <a:srgbClr val="C9D5E6"/>
+                      </a:solidFill>
+                      <a:prstDash val="solid"/>
+                      <a:round/>
+                      <a:headEnd type="none" w="med" len="med"/>
+                      <a:tailEnd type="none" w="med" len="med"/>
+                    </a:lnB>
+                    <a:solidFill>
+                      <a:srgbClr val="FFE699"/>
+                    </a:solidFill>
+                  </a:tcPr>
+                </a:tc>
+                <a:tc>
+                  <a:txBody>
+                    <a:bodyPr/>
+                    <a:lstStyle/>
+                    <a:p>
+                      <a:pPr indent="0" marL="0">
+                        <a:buNone/>
+                      </a:pPr>
+                      <a:r>
+                        <a:rPr lang="en-US" sz="730" dirty="0">
+                          <a:solidFill>
+                            <a:srgbClr val="000000"/>
+                          </a:solidFill>
+                          <a:latin typeface="Meiryo" pitchFamily="34" charset="0"/>
+                          <a:ea typeface="Meiryo" pitchFamily="34" charset="-122"/>
+                          <a:cs typeface="Meiryo" pitchFamily="34" charset="-120"/>
+                        </a:rPr>
+                        <a:t>設問の前提不成立の指摘は妥当だが、『必須化した場合に運用が回るか』という論点自体は未解消</a:t>
+                      </a:r>
+                      <a:endParaRPr lang="en-US" sz="730" dirty="0">
+                        <a:latin typeface="Meiryo" charset="0"/>
+                        <a:ea typeface="Meiryo" charset="0"/>
+                        <a:cs typeface="Meiryo" charset="0"/>
+                      </a:endParaRPr>
+                    </a:p>
+                  </a:txBody>
+                  <a:tcPr marL="91440" marR="91440" marT="45720" marB="45720" anchor="ctr">
+                    <a:lnL w="6350" cap="flat" cmpd="sng" algn="ctr">
+                      <a:solidFill>
+                        <a:srgbClr val="C9D5E6"/>
+                      </a:solidFill>
+                      <a:prstDash val="solid"/>
+                      <a:round/>
+                      <a:headEnd type="none" w="med" len="med"/>
+                      <a:tailEnd type="none" w="med" len="med"/>
+                    </a:lnL>
+                    <a:lnR w="6350" cap="flat" cmpd="sng" algn="ctr">
+                      <a:solidFill>
+                        <a:srgbClr val="C9D5E6"/>
+                      </a:solidFill>
+                      <a:prstDash val="solid"/>
+                      <a:round/>
+                      <a:headEnd type="none" w="med" len="med"/>
+                      <a:tailEnd type="none" w="med" len="med"/>
+                    </a:lnR>
+                    <a:lnT w="6350" cap="flat" cmpd="sng" algn="ctr">
+                      <a:solidFill>
+                        <a:srgbClr val="C9D5E6"/>
+                      </a:solidFill>
+                      <a:prstDash val="solid"/>
+                      <a:round/>
+                      <a:headEnd type="none" w="med" len="med"/>
+                      <a:tailEnd type="none" w="med" len="med"/>
+                    </a:lnT>
+                    <a:lnB w="6350" cap="flat" cmpd="sng" algn="ctr">
+                      <a:solidFill>
+                        <a:srgbClr val="C9D5E6"/>
+                      </a:solidFill>
+                      <a:prstDash val="solid"/>
+                      <a:round/>
+                      <a:headEnd type="none" w="med" len="med"/>
+                      <a:tailEnd type="none" w="med" len="med"/>
+                    </a:lnB>
+                  </a:tcPr>
+                </a:tc>
+                <a:tc>
+                  <a:txBody>
+                    <a:bodyPr/>
+                    <a:lstStyle/>
+                    <a:p>
+                      <a:pPr algn="ctr" indent="0" marL="0">
+                        <a:buNone/>
+                      </a:pPr>
+                      <a:r>
+                        <a:rPr lang="en-US" sz="850" b="1" dirty="0">
+                          <a:solidFill>
+                            <a:srgbClr val="8A3B12"/>
+                          </a:solidFill>
+                          <a:latin typeface="Meiryo" pitchFamily="34" charset="0"/>
+                          <a:ea typeface="Meiryo" pitchFamily="34" charset="-122"/>
+                          <a:cs typeface="Meiryo" pitchFamily="34" charset="-120"/>
+                        </a:rPr>
+                        <a:t>高</a:t>
+                      </a:r>
+                      <a:endParaRPr lang="en-US" sz="850" dirty="0">
+                        <a:latin typeface="Meiryo" charset="0"/>
+                        <a:ea typeface="Meiryo" charset="0"/>
+                        <a:cs typeface="Meiryo" charset="0"/>
+                      </a:endParaRPr>
+                    </a:p>
+                  </a:txBody>
+                  <a:tcPr marL="91440" marR="91440" marT="45720" marB="45720" anchor="ctr">
+                    <a:lnL w="6350" cap="flat" cmpd="sng" algn="ctr">
+                      <a:solidFill>
+                        <a:srgbClr val="C9D5E6"/>
+                      </a:solidFill>
+                      <a:prstDash val="solid"/>
+                      <a:round/>
+                      <a:headEnd type="none" w="med" len="med"/>
+                      <a:tailEnd type="none" w="med" len="med"/>
+                    </a:lnL>
+                    <a:lnR w="6350" cap="flat" cmpd="sng" algn="ctr">
+                      <a:solidFill>
+                        <a:srgbClr val="C9D5E6"/>
+                      </a:solidFill>
+                      <a:prstDash val="solid"/>
+                      <a:round/>
+                      <a:headEnd type="none" w="med" len="med"/>
+                      <a:tailEnd type="none" w="med" len="med"/>
+                    </a:lnR>
+                    <a:lnT w="6350" cap="flat" cmpd="sng" algn="ctr">
+                      <a:solidFill>
+                        <a:srgbClr val="C9D5E6"/>
+                      </a:solidFill>
+                      <a:prstDash val="solid"/>
+                      <a:round/>
+                      <a:headEnd type="none" w="med" len="med"/>
+                      <a:tailEnd type="none" w="med" len="med"/>
+                    </a:lnT>
+                    <a:lnB w="6350" cap="flat" cmpd="sng" algn="ctr">
+                      <a:solidFill>
+                        <a:srgbClr val="C9D5E6"/>
+                      </a:solidFill>
+                      <a:prstDash val="solid"/>
+                      <a:round/>
+                      <a:headEnd type="none" w="med" len="med"/>
+                      <a:tailEnd type="none" w="med" len="med"/>
+                    </a:lnB>
+                    <a:solidFill>
+                      <a:srgbClr val="F8CBAD"/>
                     </a:solidFill>
                   </a:tcPr>
                 </a:tc>
@@ -14380,7 +15200,7 @@
                 <a:ea typeface="Meiryo" pitchFamily="34" charset="-122"/>
                 <a:cs typeface="Meiryo" pitchFamily="34" charset="-120"/>
               </a:rPr>
-              <a:t>追加検証分（「【回答】」形式で記載されていた項目）</a:t>
+              <a:t>追加検証分（「【回答】」形式で記載されていた項目・ユーザー指摘による再分類分）</a:t>
             </a:r>
             <a:endParaRPr lang="en-US" sz="1000" dirty="0"/>
           </a:p>
@@ -14455,7 +15275,7 @@
                 <a:gridCol w="3730752"/>
                 <a:gridCol w="640080"/>
               </a:tblGrid>
-              <a:tr h="790303">
+              <a:tr h="691515">
                 <a:tc>
                   <a:txBody>
                     <a:bodyPr/>
@@ -14865,7 +15685,7 @@
                   </a:tcPr>
                 </a:tc>
               </a:tr>
-              <a:tr h="790303">
+              <a:tr h="691515">
                 <a:tc>
                   <a:txBody>
                     <a:bodyPr/>
@@ -14883,7 +15703,7 @@
                           <a:ea typeface="Meiryo" pitchFamily="34" charset="-122"/>
                           <a:cs typeface="Meiryo" pitchFamily="34" charset="-120"/>
                         </a:rPr>
-                        <a:t>C-06</a:t>
+                        <a:t>C-17</a:t>
                       </a:r>
                       <a:endParaRPr lang="en-US" sz="800" dirty="0">
                         <a:latin typeface="Meiryo" charset="0"/>
@@ -14948,7 +15768,7 @@
                           <a:ea typeface="Meiryo" pitchFamily="34" charset="-122"/>
                           <a:cs typeface="Meiryo" pitchFamily="34" charset="-120"/>
                         </a:rPr>
-                        <a:t>拠点側での計算実施範囲</a:t>
+                        <a:t>非財務データ業務の月間工数（詳細含む）</a:t>
                       </a:r>
                       <a:endParaRPr lang="en-US" sz="730" dirty="0">
                         <a:latin typeface="Meiryo" charset="0"/>
@@ -15013,7 +15833,7 @@
                           <a:ea typeface="Meiryo" pitchFamily="34" charset="-122"/>
                           <a:cs typeface="Meiryo" pitchFamily="34" charset="-120"/>
                         </a:rPr>
-                        <a:t>海外法人向けは削除。国内は実態をESGに確認のうえ調整</a:t>
+                        <a:t>本社推定で進める。拠点への設問（詳細①〜⑤）は削除</a:t>
                       </a:r>
                       <a:endParaRPr lang="en-US" sz="730" dirty="0">
                         <a:latin typeface="Meiryo" charset="0"/>
@@ -15072,15 +15892,148 @@
                       <a:r>
                         <a:rPr lang="en-US" sz="750" b="1" dirty="0">
                           <a:solidFill>
+                            <a:srgbClr val="7A5B00"/>
+                          </a:solidFill>
+                          <a:latin typeface="Meiryo" pitchFamily="34" charset="0"/>
+                          <a:ea typeface="Meiryo" pitchFamily="34" charset="-122"/>
+                          <a:cs typeface="Meiryo" pitchFamily="34" charset="-120"/>
+                        </a:rPr>
+                        <a:t>リスク残存（データなし）</a:t>
+                      </a:r>
+                      <a:endParaRPr lang="en-US" sz="750" dirty="0">
+                        <a:latin typeface="Meiryo" charset="0"/>
+                        <a:ea typeface="Meiryo" charset="0"/>
+                        <a:cs typeface="Meiryo" charset="0"/>
+                      </a:endParaRPr>
+                    </a:p>
+                  </a:txBody>
+                  <a:tcPr marL="91440" marR="91440" marT="45720" marB="45720" anchor="ctr">
+                    <a:lnL w="6350" cap="flat" cmpd="sng" algn="ctr">
+                      <a:solidFill>
+                        <a:srgbClr val="C9D5E6"/>
+                      </a:solidFill>
+                      <a:prstDash val="solid"/>
+                      <a:round/>
+                      <a:headEnd type="none" w="med" len="med"/>
+                      <a:tailEnd type="none" w="med" len="med"/>
+                    </a:lnL>
+                    <a:lnR w="6350" cap="flat" cmpd="sng" algn="ctr">
+                      <a:solidFill>
+                        <a:srgbClr val="C9D5E6"/>
+                      </a:solidFill>
+                      <a:prstDash val="solid"/>
+                      <a:round/>
+                      <a:headEnd type="none" w="med" len="med"/>
+                      <a:tailEnd type="none" w="med" len="med"/>
+                    </a:lnR>
+                    <a:lnT w="6350" cap="flat" cmpd="sng" algn="ctr">
+                      <a:solidFill>
+                        <a:srgbClr val="C9D5E6"/>
+                      </a:solidFill>
+                      <a:prstDash val="solid"/>
+                      <a:round/>
+                      <a:headEnd type="none" w="med" len="med"/>
+                      <a:tailEnd type="none" w="med" len="med"/>
+                    </a:lnT>
+                    <a:lnB w="6350" cap="flat" cmpd="sng" algn="ctr">
+                      <a:solidFill>
+                        <a:srgbClr val="C9D5E6"/>
+                      </a:solidFill>
+                      <a:prstDash val="solid"/>
+                      <a:round/>
+                      <a:headEnd type="none" w="med" len="med"/>
+                      <a:tailEnd type="none" w="med" len="med"/>
+                    </a:lnB>
+                    <a:solidFill>
+                      <a:srgbClr val="FFE699"/>
+                    </a:solidFill>
+                  </a:tcPr>
+                </a:tc>
+                <a:tc>
+                  <a:txBody>
+                    <a:bodyPr/>
+                    <a:lstStyle/>
+                    <a:p>
+                      <a:pPr indent="0" marL="0">
+                        <a:buNone/>
+                      </a:pPr>
+                      <a:r>
+                        <a:rPr lang="en-US" sz="730" dirty="0">
+                          <a:solidFill>
+                            <a:srgbClr val="000000"/>
+                          </a:solidFill>
+                          <a:latin typeface="Meiryo" pitchFamily="34" charset="0"/>
+                          <a:ea typeface="Meiryo" pitchFamily="34" charset="-122"/>
+                          <a:cs typeface="Meiryo" pitchFamily="34" charset="-120"/>
+                        </a:rPr>
+                        <a:t>回答者コメントは「まともに実施したことがない」「推測で進めてください」「質問が分からなかった」＝実質未回答。ROI試算の分母が未検証のまま確定する、最も影響が大きい項目</a:t>
+                      </a:r>
+                      <a:endParaRPr lang="en-US" sz="730" dirty="0">
+                        <a:latin typeface="Meiryo" charset="0"/>
+                        <a:ea typeface="Meiryo" charset="0"/>
+                        <a:cs typeface="Meiryo" charset="0"/>
+                      </a:endParaRPr>
+                    </a:p>
+                  </a:txBody>
+                  <a:tcPr marL="91440" marR="91440" marT="45720" marB="45720" anchor="ctr">
+                    <a:lnL w="6350" cap="flat" cmpd="sng" algn="ctr">
+                      <a:solidFill>
+                        <a:srgbClr val="C9D5E6"/>
+                      </a:solidFill>
+                      <a:prstDash val="solid"/>
+                      <a:round/>
+                      <a:headEnd type="none" w="med" len="med"/>
+                      <a:tailEnd type="none" w="med" len="med"/>
+                    </a:lnL>
+                    <a:lnR w="6350" cap="flat" cmpd="sng" algn="ctr">
+                      <a:solidFill>
+                        <a:srgbClr val="C9D5E6"/>
+                      </a:solidFill>
+                      <a:prstDash val="solid"/>
+                      <a:round/>
+                      <a:headEnd type="none" w="med" len="med"/>
+                      <a:tailEnd type="none" w="med" len="med"/>
+                    </a:lnR>
+                    <a:lnT w="6350" cap="flat" cmpd="sng" algn="ctr">
+                      <a:solidFill>
+                        <a:srgbClr val="C9D5E6"/>
+                      </a:solidFill>
+                      <a:prstDash val="solid"/>
+                      <a:round/>
+                      <a:headEnd type="none" w="med" len="med"/>
+                      <a:tailEnd type="none" w="med" len="med"/>
+                    </a:lnT>
+                    <a:lnB w="6350" cap="flat" cmpd="sng" algn="ctr">
+                      <a:solidFill>
+                        <a:srgbClr val="C9D5E6"/>
+                      </a:solidFill>
+                      <a:prstDash val="solid"/>
+                      <a:round/>
+                      <a:headEnd type="none" w="med" len="med"/>
+                      <a:tailEnd type="none" w="med" len="med"/>
+                    </a:lnB>
+                  </a:tcPr>
+                </a:tc>
+                <a:tc>
+                  <a:txBody>
+                    <a:bodyPr/>
+                    <a:lstStyle/>
+                    <a:p>
+                      <a:pPr algn="ctr" indent="0" marL="0">
+                        <a:buNone/>
+                      </a:pPr>
+                      <a:r>
+                        <a:rPr lang="en-US" sz="850" b="1" dirty="0">
+                          <a:solidFill>
                             <a:srgbClr val="8A3B12"/>
                           </a:solidFill>
                           <a:latin typeface="Meiryo" pitchFamily="34" charset="0"/>
                           <a:ea typeface="Meiryo" pitchFamily="34" charset="-122"/>
                           <a:cs typeface="Meiryo" pitchFamily="34" charset="-120"/>
                         </a:rPr>
-                        <a:t>リスク残存・理由不十分</a:t>
-                      </a:r>
-                      <a:endParaRPr lang="en-US" sz="750" dirty="0">
+                        <a:t>高</a:t>
+                      </a:r>
+                      <a:endParaRPr lang="en-US" sz="850" dirty="0">
                         <a:latin typeface="Meiryo" charset="0"/>
                         <a:ea typeface="Meiryo" charset="0"/>
                         <a:cs typeface="Meiryo" charset="0"/>
@@ -15129,6 +16082,73 @@
                     </a:solidFill>
                   </a:tcPr>
                 </a:tc>
+              </a:tr>
+              <a:tr h="691515">
+                <a:tc>
+                  <a:txBody>
+                    <a:bodyPr/>
+                    <a:lstStyle/>
+                    <a:p>
+                      <a:pPr algn="ctr" indent="0" marL="0">
+                        <a:buNone/>
+                      </a:pPr>
+                      <a:r>
+                        <a:rPr lang="en-US" sz="800" b="1" dirty="0">
+                          <a:solidFill>
+                            <a:srgbClr val="000000"/>
+                          </a:solidFill>
+                          <a:latin typeface="Meiryo" pitchFamily="34" charset="0"/>
+                          <a:ea typeface="Meiryo" pitchFamily="34" charset="-122"/>
+                          <a:cs typeface="Meiryo" pitchFamily="34" charset="-120"/>
+                        </a:rPr>
+                        <a:t>C-32</a:t>
+                      </a:r>
+                      <a:endParaRPr lang="en-US" sz="800" dirty="0">
+                        <a:latin typeface="Meiryo" charset="0"/>
+                        <a:ea typeface="Meiryo" charset="0"/>
+                        <a:cs typeface="Meiryo" charset="0"/>
+                      </a:endParaRPr>
+                    </a:p>
+                  </a:txBody>
+                  <a:tcPr marL="91440" marR="91440" marT="45720" marB="45720" anchor="ctr">
+                    <a:lnL w="6350" cap="flat" cmpd="sng" algn="ctr">
+                      <a:solidFill>
+                        <a:srgbClr val="C9D5E6"/>
+                      </a:solidFill>
+                      <a:prstDash val="solid"/>
+                      <a:round/>
+                      <a:headEnd type="none" w="med" len="med"/>
+                      <a:tailEnd type="none" w="med" len="med"/>
+                    </a:lnL>
+                    <a:lnR w="6350" cap="flat" cmpd="sng" algn="ctr">
+                      <a:solidFill>
+                        <a:srgbClr val="C9D5E6"/>
+                      </a:solidFill>
+                      <a:prstDash val="solid"/>
+                      <a:round/>
+                      <a:headEnd type="none" w="med" len="med"/>
+                      <a:tailEnd type="none" w="med" len="med"/>
+                    </a:lnR>
+                    <a:lnT w="6350" cap="flat" cmpd="sng" algn="ctr">
+                      <a:solidFill>
+                        <a:srgbClr val="C9D5E6"/>
+                      </a:solidFill>
+                      <a:prstDash val="solid"/>
+                      <a:round/>
+                      <a:headEnd type="none" w="med" len="med"/>
+                      <a:tailEnd type="none" w="med" len="med"/>
+                    </a:lnT>
+                    <a:lnB w="6350" cap="flat" cmpd="sng" algn="ctr">
+                      <a:solidFill>
+                        <a:srgbClr val="C9D5E6"/>
+                      </a:solidFill>
+                      <a:prstDash val="solid"/>
+                      <a:round/>
+                      <a:headEnd type="none" w="med" len="med"/>
+                      <a:tailEnd type="none" w="med" len="med"/>
+                    </a:lnB>
+                  </a:tcPr>
+                </a:tc>
                 <a:tc>
                   <a:txBody>
                     <a:bodyPr/>
@@ -15146,7 +16166,205 @@
                           <a:ea typeface="Meiryo" pitchFamily="34" charset="-122"/>
                           <a:cs typeface="Meiryo" pitchFamily="34" charset="-120"/>
                         </a:rPr>
-                        <a:t>海外BU自身が「生産拠点では自前で算定をしている」と明言。削除は当初のリスク（拠点独自計算による数値連続性の断絶）を放置。国内分はステータス『保留』のまま未決着</a:t>
+                        <a:t>入力ファイル・システムのアクセス権</a:t>
+                      </a:r>
+                      <a:endParaRPr lang="en-US" sz="730" dirty="0">
+                        <a:latin typeface="Meiryo" charset="0"/>
+                        <a:ea typeface="Meiryo" charset="0"/>
+                        <a:cs typeface="Meiryo" charset="0"/>
+                      </a:endParaRPr>
+                    </a:p>
+                  </a:txBody>
+                  <a:tcPr marL="91440" marR="91440" marT="45720" marB="45720" anchor="ctr">
+                    <a:lnL w="6350" cap="flat" cmpd="sng" algn="ctr">
+                      <a:solidFill>
+                        <a:srgbClr val="C9D5E6"/>
+                      </a:solidFill>
+                      <a:prstDash val="solid"/>
+                      <a:round/>
+                      <a:headEnd type="none" w="med" len="med"/>
+                      <a:tailEnd type="none" w="med" len="med"/>
+                    </a:lnL>
+                    <a:lnR w="6350" cap="flat" cmpd="sng" algn="ctr">
+                      <a:solidFill>
+                        <a:srgbClr val="C9D5E6"/>
+                      </a:solidFill>
+                      <a:prstDash val="solid"/>
+                      <a:round/>
+                      <a:headEnd type="none" w="med" len="med"/>
+                      <a:tailEnd type="none" w="med" len="med"/>
+                    </a:lnR>
+                    <a:lnT w="6350" cap="flat" cmpd="sng" algn="ctr">
+                      <a:solidFill>
+                        <a:srgbClr val="C9D5E6"/>
+                      </a:solidFill>
+                      <a:prstDash val="solid"/>
+                      <a:round/>
+                      <a:headEnd type="none" w="med" len="med"/>
+                      <a:tailEnd type="none" w="med" len="med"/>
+                    </a:lnT>
+                    <a:lnB w="6350" cap="flat" cmpd="sng" algn="ctr">
+                      <a:solidFill>
+                        <a:srgbClr val="C9D5E6"/>
+                      </a:solidFill>
+                      <a:prstDash val="solid"/>
+                      <a:round/>
+                      <a:headEnd type="none" w="med" len="med"/>
+                      <a:tailEnd type="none" w="med" len="med"/>
+                    </a:lnB>
+                  </a:tcPr>
+                </a:tc>
+                <a:tc>
+                  <a:txBody>
+                    <a:bodyPr/>
+                    <a:lstStyle/>
+                    <a:p>
+                      <a:pPr indent="0" marL="0">
+                        <a:buNone/>
+                      </a:pPr>
+                      <a:r>
+                        <a:rPr lang="en-US" sz="730" dirty="0">
+                          <a:solidFill>
+                            <a:srgbClr val="000000"/>
+                          </a:solidFill>
+                          <a:latin typeface="Meiryo" pitchFamily="34" charset="0"/>
+                          <a:ea typeface="Meiryo" pitchFamily="34" charset="-122"/>
+                          <a:cs typeface="Meiryo" pitchFamily="34" charset="-120"/>
+                        </a:rPr>
+                        <a:t>計算用Excelを想定した設問だったため削除</a:t>
+                      </a:r>
+                      <a:endParaRPr lang="en-US" sz="730" dirty="0">
+                        <a:latin typeface="Meiryo" charset="0"/>
+                        <a:ea typeface="Meiryo" charset="0"/>
+                        <a:cs typeface="Meiryo" charset="0"/>
+                      </a:endParaRPr>
+                    </a:p>
+                  </a:txBody>
+                  <a:tcPr marL="91440" marR="91440" marT="45720" marB="45720" anchor="ctr">
+                    <a:lnL w="6350" cap="flat" cmpd="sng" algn="ctr">
+                      <a:solidFill>
+                        <a:srgbClr val="C9D5E6"/>
+                      </a:solidFill>
+                      <a:prstDash val="solid"/>
+                      <a:round/>
+                      <a:headEnd type="none" w="med" len="med"/>
+                      <a:tailEnd type="none" w="med" len="med"/>
+                    </a:lnL>
+                    <a:lnR w="6350" cap="flat" cmpd="sng" algn="ctr">
+                      <a:solidFill>
+                        <a:srgbClr val="C9D5E6"/>
+                      </a:solidFill>
+                      <a:prstDash val="solid"/>
+                      <a:round/>
+                      <a:headEnd type="none" w="med" len="med"/>
+                      <a:tailEnd type="none" w="med" len="med"/>
+                    </a:lnR>
+                    <a:lnT w="6350" cap="flat" cmpd="sng" algn="ctr">
+                      <a:solidFill>
+                        <a:srgbClr val="C9D5E6"/>
+                      </a:solidFill>
+                      <a:prstDash val="solid"/>
+                      <a:round/>
+                      <a:headEnd type="none" w="med" len="med"/>
+                      <a:tailEnd type="none" w="med" len="med"/>
+                    </a:lnT>
+                    <a:lnB w="6350" cap="flat" cmpd="sng" algn="ctr">
+                      <a:solidFill>
+                        <a:srgbClr val="C9D5E6"/>
+                      </a:solidFill>
+                      <a:prstDash val="solid"/>
+                      <a:round/>
+                      <a:headEnd type="none" w="med" len="med"/>
+                      <a:tailEnd type="none" w="med" len="med"/>
+                    </a:lnB>
+                  </a:tcPr>
+                </a:tc>
+                <a:tc>
+                  <a:txBody>
+                    <a:bodyPr/>
+                    <a:lstStyle/>
+                    <a:p>
+                      <a:pPr algn="ctr" indent="0" marL="0">
+                        <a:buNone/>
+                      </a:pPr>
+                      <a:r>
+                        <a:rPr lang="en-US" sz="750" b="1" dirty="0">
+                          <a:solidFill>
+                            <a:srgbClr val="7A5B00"/>
+                          </a:solidFill>
+                          <a:latin typeface="Meiryo" pitchFamily="34" charset="0"/>
+                          <a:ea typeface="Meiryo" pitchFamily="34" charset="-122"/>
+                          <a:cs typeface="Meiryo" pitchFamily="34" charset="-120"/>
+                        </a:rPr>
+                        <a:t>リスク残存</a:t>
+                      </a:r>
+                      <a:endParaRPr lang="en-US" sz="750" dirty="0">
+                        <a:latin typeface="Meiryo" charset="0"/>
+                        <a:ea typeface="Meiryo" charset="0"/>
+                        <a:cs typeface="Meiryo" charset="0"/>
+                      </a:endParaRPr>
+                    </a:p>
+                  </a:txBody>
+                  <a:tcPr marL="91440" marR="91440" marT="45720" marB="45720" anchor="ctr">
+                    <a:lnL w="6350" cap="flat" cmpd="sng" algn="ctr">
+                      <a:solidFill>
+                        <a:srgbClr val="C9D5E6"/>
+                      </a:solidFill>
+                      <a:prstDash val="solid"/>
+                      <a:round/>
+                      <a:headEnd type="none" w="med" len="med"/>
+                      <a:tailEnd type="none" w="med" len="med"/>
+                    </a:lnL>
+                    <a:lnR w="6350" cap="flat" cmpd="sng" algn="ctr">
+                      <a:solidFill>
+                        <a:srgbClr val="C9D5E6"/>
+                      </a:solidFill>
+                      <a:prstDash val="solid"/>
+                      <a:round/>
+                      <a:headEnd type="none" w="med" len="med"/>
+                      <a:tailEnd type="none" w="med" len="med"/>
+                    </a:lnR>
+                    <a:lnT w="6350" cap="flat" cmpd="sng" algn="ctr">
+                      <a:solidFill>
+                        <a:srgbClr val="C9D5E6"/>
+                      </a:solidFill>
+                      <a:prstDash val="solid"/>
+                      <a:round/>
+                      <a:headEnd type="none" w="med" len="med"/>
+                      <a:tailEnd type="none" w="med" len="med"/>
+                    </a:lnT>
+                    <a:lnB w="6350" cap="flat" cmpd="sng" algn="ctr">
+                      <a:solidFill>
+                        <a:srgbClr val="C9D5E6"/>
+                      </a:solidFill>
+                      <a:prstDash val="solid"/>
+                      <a:round/>
+                      <a:headEnd type="none" w="med" len="med"/>
+                      <a:tailEnd type="none" w="med" len="med"/>
+                    </a:lnB>
+                    <a:solidFill>
+                      <a:srgbClr val="FFE699"/>
+                    </a:solidFill>
+                  </a:tcPr>
+                </a:tc>
+                <a:tc>
+                  <a:txBody>
+                    <a:bodyPr/>
+                    <a:lstStyle/>
+                    <a:p>
+                      <a:pPr indent="0" marL="0">
+                        <a:buNone/>
+                      </a:pPr>
+                      <a:r>
+                        <a:rPr lang="en-US" sz="730" dirty="0">
+                          <a:solidFill>
+                            <a:srgbClr val="000000"/>
+                          </a:solidFill>
+                          <a:latin typeface="Meiryo" pitchFamily="34" charset="0"/>
+                          <a:ea typeface="Meiryo" pitchFamily="34" charset="-122"/>
+                          <a:cs typeface="Meiryo" pitchFamily="34" charset="-120"/>
+                        </a:rPr>
+                        <a:t>『誰でも編集できる状態か』という統制上の論点自体は未解消。改ざんリスクの指摘可能性が残る</a:t>
                       </a:r>
                       <a:endParaRPr lang="en-US" sz="730" dirty="0">
                         <a:latin typeface="Meiryo" charset="0"/>
@@ -15263,7 +16481,7 @@
                   </a:tcPr>
                 </a:tc>
               </a:tr>
-              <a:tr h="790303">
+              <a:tr h="691515">
                 <a:tc>
                   <a:txBody>
                     <a:bodyPr/>
@@ -15281,7 +16499,7 @@
                           <a:ea typeface="Meiryo" pitchFamily="34" charset="-122"/>
                           <a:cs typeface="Meiryo" pitchFamily="34" charset="-120"/>
                         </a:rPr>
-                        <a:t>C-11</a:t>
+                        <a:t>H3-07</a:t>
                       </a:r>
                       <a:endParaRPr lang="en-US" sz="800" dirty="0">
                         <a:latin typeface="Meiryo" charset="0"/>
@@ -15346,7 +16564,7 @@
                           <a:ea typeface="Meiryo" pitchFamily="34" charset="-122"/>
                           <a:cs typeface="Meiryo" pitchFamily="34" charset="-120"/>
                         </a:rPr>
-                        <a:t>証憑添付必須化時の対応可否</a:t>
+                        <a:t>メーター交換・契約変更時のデータ処理手順</a:t>
                       </a:r>
                       <a:endParaRPr lang="en-US" sz="730" dirty="0">
                         <a:latin typeface="Meiryo" charset="0"/>
@@ -15411,7 +16629,7 @@
                           <a:ea typeface="Meiryo" pitchFamily="34" charset="-122"/>
                           <a:cs typeface="Meiryo" pitchFamily="34" charset="-120"/>
                         </a:rPr>
-                        <a:t>海外は提出方法の指示自体がなく前提不成立のため削除</a:t>
+                        <a:t>校正済みとして交換の影響を無視し削除</a:t>
                       </a:r>
                       <a:endParaRPr lang="en-US" sz="730" dirty="0">
                         <a:latin typeface="Meiryo" charset="0"/>
@@ -15470,15 +16688,148 @@
                       <a:r>
                         <a:rPr lang="en-US" sz="750" b="1" dirty="0">
                           <a:solidFill>
+                            <a:srgbClr val="8A3B12"/>
+                          </a:solidFill>
+                          <a:latin typeface="Meiryo" pitchFamily="34" charset="0"/>
+                          <a:ea typeface="Meiryo" pitchFamily="34" charset="-122"/>
+                          <a:cs typeface="Meiryo" pitchFamily="34" charset="-120"/>
+                        </a:rPr>
+                        <a:t>根拠不明確</a:t>
+                      </a:r>
+                      <a:endParaRPr lang="en-US" sz="750" dirty="0">
+                        <a:latin typeface="Meiryo" charset="0"/>
+                        <a:ea typeface="Meiryo" charset="0"/>
+                        <a:cs typeface="Meiryo" charset="0"/>
+                      </a:endParaRPr>
+                    </a:p>
+                  </a:txBody>
+                  <a:tcPr marL="91440" marR="91440" marT="45720" marB="45720" anchor="ctr">
+                    <a:lnL w="6350" cap="flat" cmpd="sng" algn="ctr">
+                      <a:solidFill>
+                        <a:srgbClr val="C9D5E6"/>
+                      </a:solidFill>
+                      <a:prstDash val="solid"/>
+                      <a:round/>
+                      <a:headEnd type="none" w="med" len="med"/>
+                      <a:tailEnd type="none" w="med" len="med"/>
+                    </a:lnL>
+                    <a:lnR w="6350" cap="flat" cmpd="sng" algn="ctr">
+                      <a:solidFill>
+                        <a:srgbClr val="C9D5E6"/>
+                      </a:solidFill>
+                      <a:prstDash val="solid"/>
+                      <a:round/>
+                      <a:headEnd type="none" w="med" len="med"/>
+                      <a:tailEnd type="none" w="med" len="med"/>
+                    </a:lnR>
+                    <a:lnT w="6350" cap="flat" cmpd="sng" algn="ctr">
+                      <a:solidFill>
+                        <a:srgbClr val="C9D5E6"/>
+                      </a:solidFill>
+                      <a:prstDash val="solid"/>
+                      <a:round/>
+                      <a:headEnd type="none" w="med" len="med"/>
+                      <a:tailEnd type="none" w="med" len="med"/>
+                    </a:lnT>
+                    <a:lnB w="6350" cap="flat" cmpd="sng" algn="ctr">
+                      <a:solidFill>
+                        <a:srgbClr val="C9D5E6"/>
+                      </a:solidFill>
+                      <a:prstDash val="solid"/>
+                      <a:round/>
+                      <a:headEnd type="none" w="med" len="med"/>
+                      <a:tailEnd type="none" w="med" len="med"/>
+                    </a:lnB>
+                    <a:solidFill>
+                      <a:srgbClr val="F8CBAD"/>
+                    </a:solidFill>
+                  </a:tcPr>
+                </a:tc>
+                <a:tc>
+                  <a:txBody>
+                    <a:bodyPr/>
+                    <a:lstStyle/>
+                    <a:p>
+                      <a:pPr indent="0" marL="0">
+                        <a:buNone/>
+                      </a:pPr>
+                      <a:r>
+                        <a:rPr lang="en-US" sz="730" dirty="0">
+                          <a:solidFill>
+                            <a:srgbClr val="000000"/>
+                          </a:solidFill>
+                          <a:latin typeface="Meiryo" pitchFamily="34" charset="0"/>
+                          <a:ea typeface="Meiryo" pitchFamily="34" charset="-122"/>
+                          <a:cs typeface="Meiryo" pitchFamily="34" charset="-120"/>
+                        </a:rPr>
+                        <a:t>『影響を無視する』根拠が示されていない。頻度は低いが精度への影響は未確認</a:t>
+                      </a:r>
+                      <a:endParaRPr lang="en-US" sz="730" dirty="0">
+                        <a:latin typeface="Meiryo" charset="0"/>
+                        <a:ea typeface="Meiryo" charset="0"/>
+                        <a:cs typeface="Meiryo" charset="0"/>
+                      </a:endParaRPr>
+                    </a:p>
+                  </a:txBody>
+                  <a:tcPr marL="91440" marR="91440" marT="45720" marB="45720" anchor="ctr">
+                    <a:lnL w="6350" cap="flat" cmpd="sng" algn="ctr">
+                      <a:solidFill>
+                        <a:srgbClr val="C9D5E6"/>
+                      </a:solidFill>
+                      <a:prstDash val="solid"/>
+                      <a:round/>
+                      <a:headEnd type="none" w="med" len="med"/>
+                      <a:tailEnd type="none" w="med" len="med"/>
+                    </a:lnL>
+                    <a:lnR w="6350" cap="flat" cmpd="sng" algn="ctr">
+                      <a:solidFill>
+                        <a:srgbClr val="C9D5E6"/>
+                      </a:solidFill>
+                      <a:prstDash val="solid"/>
+                      <a:round/>
+                      <a:headEnd type="none" w="med" len="med"/>
+                      <a:tailEnd type="none" w="med" len="med"/>
+                    </a:lnR>
+                    <a:lnT w="6350" cap="flat" cmpd="sng" algn="ctr">
+                      <a:solidFill>
+                        <a:srgbClr val="C9D5E6"/>
+                      </a:solidFill>
+                      <a:prstDash val="solid"/>
+                      <a:round/>
+                      <a:headEnd type="none" w="med" len="med"/>
+                      <a:tailEnd type="none" w="med" len="med"/>
+                    </a:lnT>
+                    <a:lnB w="6350" cap="flat" cmpd="sng" algn="ctr">
+                      <a:solidFill>
+                        <a:srgbClr val="C9D5E6"/>
+                      </a:solidFill>
+                      <a:prstDash val="solid"/>
+                      <a:round/>
+                      <a:headEnd type="none" w="med" len="med"/>
+                      <a:tailEnd type="none" w="med" len="med"/>
+                    </a:lnB>
+                  </a:tcPr>
+                </a:tc>
+                <a:tc>
+                  <a:txBody>
+                    <a:bodyPr/>
+                    <a:lstStyle/>
+                    <a:p>
+                      <a:pPr algn="ctr" indent="0" marL="0">
+                        <a:buNone/>
+                      </a:pPr>
+                      <a:r>
+                        <a:rPr lang="en-US" sz="850" b="1" dirty="0">
+                          <a:solidFill>
                             <a:srgbClr val="7A5B00"/>
                           </a:solidFill>
                           <a:latin typeface="Meiryo" pitchFamily="34" charset="0"/>
                           <a:ea typeface="Meiryo" pitchFamily="34" charset="-122"/>
                           <a:cs typeface="Meiryo" pitchFamily="34" charset="-120"/>
                         </a:rPr>
-                        <a:t>リスク残存</a:t>
-                      </a:r>
-                      <a:endParaRPr lang="en-US" sz="750" dirty="0">
+                        <a:t>中</a:t>
+                      </a:r>
+                      <a:endParaRPr lang="en-US" sz="850" dirty="0">
                         <a:latin typeface="Meiryo" charset="0"/>
                         <a:ea typeface="Meiryo" charset="0"/>
                         <a:cs typeface="Meiryo" charset="0"/>
@@ -15527,6 +16878,73 @@
                     </a:solidFill>
                   </a:tcPr>
                 </a:tc>
+              </a:tr>
+              <a:tr h="691515">
+                <a:tc>
+                  <a:txBody>
+                    <a:bodyPr/>
+                    <a:lstStyle/>
+                    <a:p>
+                      <a:pPr algn="ctr" indent="0" marL="0">
+                        <a:buNone/>
+                      </a:pPr>
+                      <a:r>
+                        <a:rPr lang="en-US" sz="800" b="1" dirty="0">
+                          <a:solidFill>
+                            <a:srgbClr val="000000"/>
+                          </a:solidFill>
+                          <a:latin typeface="Meiryo" pitchFamily="34" charset="0"/>
+                          <a:ea typeface="Meiryo" pitchFamily="34" charset="-122"/>
+                          <a:cs typeface="Meiryo" pitchFamily="34" charset="-120"/>
+                        </a:rPr>
+                        <a:t>H7-05</a:t>
+                      </a:r>
+                      <a:endParaRPr lang="en-US" sz="800" dirty="0">
+                        <a:latin typeface="Meiryo" charset="0"/>
+                        <a:ea typeface="Meiryo" charset="0"/>
+                        <a:cs typeface="Meiryo" charset="0"/>
+                      </a:endParaRPr>
+                    </a:p>
+                  </a:txBody>
+                  <a:tcPr marL="91440" marR="91440" marT="45720" marB="45720" anchor="ctr">
+                    <a:lnL w="6350" cap="flat" cmpd="sng" algn="ctr">
+                      <a:solidFill>
+                        <a:srgbClr val="C9D5E6"/>
+                      </a:solidFill>
+                      <a:prstDash val="solid"/>
+                      <a:round/>
+                      <a:headEnd type="none" w="med" len="med"/>
+                      <a:tailEnd type="none" w="med" len="med"/>
+                    </a:lnL>
+                    <a:lnR w="6350" cap="flat" cmpd="sng" algn="ctr">
+                      <a:solidFill>
+                        <a:srgbClr val="C9D5E6"/>
+                      </a:solidFill>
+                      <a:prstDash val="solid"/>
+                      <a:round/>
+                      <a:headEnd type="none" w="med" len="med"/>
+                      <a:tailEnd type="none" w="med" len="med"/>
+                    </a:lnR>
+                    <a:lnT w="6350" cap="flat" cmpd="sng" algn="ctr">
+                      <a:solidFill>
+                        <a:srgbClr val="C9D5E6"/>
+                      </a:solidFill>
+                      <a:prstDash val="solid"/>
+                      <a:round/>
+                      <a:headEnd type="none" w="med" len="med"/>
+                      <a:tailEnd type="none" w="med" len="med"/>
+                    </a:lnT>
+                    <a:lnB w="6350" cap="flat" cmpd="sng" algn="ctr">
+                      <a:solidFill>
+                        <a:srgbClr val="C9D5E6"/>
+                      </a:solidFill>
+                      <a:prstDash val="solid"/>
+                      <a:round/>
+                      <a:headEnd type="none" w="med" len="med"/>
+                      <a:tailEnd type="none" w="med" len="med"/>
+                    </a:lnB>
+                  </a:tcPr>
+                </a:tc>
                 <a:tc>
                   <a:txBody>
                     <a:bodyPr/>
@@ -15544,7 +16962,205 @@
                           <a:ea typeface="Meiryo" pitchFamily="34" charset="-122"/>
                           <a:cs typeface="Meiryo" pitchFamily="34" charset="-120"/>
                         </a:rPr>
-                        <a:t>設問の前提不成立の指摘は妥当だが、『必須化した場合に運用が回るか』という論点自体は未解消</a:t>
+                        <a:t>過去に定着しなかったシステムとその理由</a:t>
+                      </a:r>
+                      <a:endParaRPr lang="en-US" sz="730" dirty="0">
+                        <a:latin typeface="Meiryo" charset="0"/>
+                        <a:ea typeface="Meiryo" charset="0"/>
+                        <a:cs typeface="Meiryo" charset="0"/>
+                      </a:endParaRPr>
+                    </a:p>
+                  </a:txBody>
+                  <a:tcPr marL="91440" marR="91440" marT="45720" marB="45720" anchor="ctr">
+                    <a:lnL w="6350" cap="flat" cmpd="sng" algn="ctr">
+                      <a:solidFill>
+                        <a:srgbClr val="C9D5E6"/>
+                      </a:solidFill>
+                      <a:prstDash val="solid"/>
+                      <a:round/>
+                      <a:headEnd type="none" w="med" len="med"/>
+                      <a:tailEnd type="none" w="med" len="med"/>
+                    </a:lnL>
+                    <a:lnR w="6350" cap="flat" cmpd="sng" algn="ctr">
+                      <a:solidFill>
+                        <a:srgbClr val="C9D5E6"/>
+                      </a:solidFill>
+                      <a:prstDash val="solid"/>
+                      <a:round/>
+                      <a:headEnd type="none" w="med" len="med"/>
+                      <a:tailEnd type="none" w="med" len="med"/>
+                    </a:lnR>
+                    <a:lnT w="6350" cap="flat" cmpd="sng" algn="ctr">
+                      <a:solidFill>
+                        <a:srgbClr val="C9D5E6"/>
+                      </a:solidFill>
+                      <a:prstDash val="solid"/>
+                      <a:round/>
+                      <a:headEnd type="none" w="med" len="med"/>
+                      <a:tailEnd type="none" w="med" len="med"/>
+                    </a:lnT>
+                    <a:lnB w="6350" cap="flat" cmpd="sng" algn="ctr">
+                      <a:solidFill>
+                        <a:srgbClr val="C9D5E6"/>
+                      </a:solidFill>
+                      <a:prstDash val="solid"/>
+                      <a:round/>
+                      <a:headEnd type="none" w="med" len="med"/>
+                      <a:tailEnd type="none" w="med" len="med"/>
+                    </a:lnB>
+                  </a:tcPr>
+                </a:tc>
+                <a:tc>
+                  <a:txBody>
+                    <a:bodyPr/>
+                    <a:lstStyle/>
+                    <a:p>
+                      <a:pPr indent="0" marL="0">
+                        <a:buNone/>
+                      </a:pPr>
+                      <a:r>
+                        <a:rPr lang="en-US" sz="730" dirty="0">
+                          <a:solidFill>
+                            <a:srgbClr val="000000"/>
+                          </a:solidFill>
+                          <a:latin typeface="Meiryo" pitchFamily="34" charset="0"/>
+                          <a:ea typeface="Meiryo" pitchFamily="34" charset="-122"/>
+                          <a:cs typeface="Meiryo" pitchFamily="34" charset="-120"/>
+                        </a:rPr>
+                        <a:t>ESG室の末武さんに確認する予定として削除</a:t>
+                      </a:r>
+                      <a:endParaRPr lang="en-US" sz="730" dirty="0">
+                        <a:latin typeface="Meiryo" charset="0"/>
+                        <a:ea typeface="Meiryo" charset="0"/>
+                        <a:cs typeface="Meiryo" charset="0"/>
+                      </a:endParaRPr>
+                    </a:p>
+                  </a:txBody>
+                  <a:tcPr marL="91440" marR="91440" marT="45720" marB="45720" anchor="ctr">
+                    <a:lnL w="6350" cap="flat" cmpd="sng" algn="ctr">
+                      <a:solidFill>
+                        <a:srgbClr val="C9D5E6"/>
+                      </a:solidFill>
+                      <a:prstDash val="solid"/>
+                      <a:round/>
+                      <a:headEnd type="none" w="med" len="med"/>
+                      <a:tailEnd type="none" w="med" len="med"/>
+                    </a:lnL>
+                    <a:lnR w="6350" cap="flat" cmpd="sng" algn="ctr">
+                      <a:solidFill>
+                        <a:srgbClr val="C9D5E6"/>
+                      </a:solidFill>
+                      <a:prstDash val="solid"/>
+                      <a:round/>
+                      <a:headEnd type="none" w="med" len="med"/>
+                      <a:tailEnd type="none" w="med" len="med"/>
+                    </a:lnR>
+                    <a:lnT w="6350" cap="flat" cmpd="sng" algn="ctr">
+                      <a:solidFill>
+                        <a:srgbClr val="C9D5E6"/>
+                      </a:solidFill>
+                      <a:prstDash val="solid"/>
+                      <a:round/>
+                      <a:headEnd type="none" w="med" len="med"/>
+                      <a:tailEnd type="none" w="med" len="med"/>
+                    </a:lnT>
+                    <a:lnB w="6350" cap="flat" cmpd="sng" algn="ctr">
+                      <a:solidFill>
+                        <a:srgbClr val="C9D5E6"/>
+                      </a:solidFill>
+                      <a:prstDash val="solid"/>
+                      <a:round/>
+                      <a:headEnd type="none" w="med" len="med"/>
+                      <a:tailEnd type="none" w="med" len="med"/>
+                    </a:lnB>
+                  </a:tcPr>
+                </a:tc>
+                <a:tc>
+                  <a:txBody>
+                    <a:bodyPr/>
+                    <a:lstStyle/>
+                    <a:p>
+                      <a:pPr algn="ctr" indent="0" marL="0">
+                        <a:buNone/>
+                      </a:pPr>
+                      <a:r>
+                        <a:rPr lang="en-US" sz="750" b="1" dirty="0">
+                          <a:solidFill>
+                            <a:srgbClr val="7A5B00"/>
+                          </a:solidFill>
+                          <a:latin typeface="Meiryo" pitchFamily="34" charset="0"/>
+                          <a:ea typeface="Meiryo" pitchFamily="34" charset="-122"/>
+                          <a:cs typeface="Meiryo" pitchFamily="34" charset="-120"/>
+                        </a:rPr>
+                        <a:t>対応未完了</a:t>
+                      </a:r>
+                      <a:endParaRPr lang="en-US" sz="750" dirty="0">
+                        <a:latin typeface="Meiryo" charset="0"/>
+                        <a:ea typeface="Meiryo" charset="0"/>
+                        <a:cs typeface="Meiryo" charset="0"/>
+                      </a:endParaRPr>
+                    </a:p>
+                  </a:txBody>
+                  <a:tcPr marL="91440" marR="91440" marT="45720" marB="45720" anchor="ctr">
+                    <a:lnL w="6350" cap="flat" cmpd="sng" algn="ctr">
+                      <a:solidFill>
+                        <a:srgbClr val="C9D5E6"/>
+                      </a:solidFill>
+                      <a:prstDash val="solid"/>
+                      <a:round/>
+                      <a:headEnd type="none" w="med" len="med"/>
+                      <a:tailEnd type="none" w="med" len="med"/>
+                    </a:lnL>
+                    <a:lnR w="6350" cap="flat" cmpd="sng" algn="ctr">
+                      <a:solidFill>
+                        <a:srgbClr val="C9D5E6"/>
+                      </a:solidFill>
+                      <a:prstDash val="solid"/>
+                      <a:round/>
+                      <a:headEnd type="none" w="med" len="med"/>
+                      <a:tailEnd type="none" w="med" len="med"/>
+                    </a:lnR>
+                    <a:lnT w="6350" cap="flat" cmpd="sng" algn="ctr">
+                      <a:solidFill>
+                        <a:srgbClr val="C9D5E6"/>
+                      </a:solidFill>
+                      <a:prstDash val="solid"/>
+                      <a:round/>
+                      <a:headEnd type="none" w="med" len="med"/>
+                      <a:tailEnd type="none" w="med" len="med"/>
+                    </a:lnT>
+                    <a:lnB w="6350" cap="flat" cmpd="sng" algn="ctr">
+                      <a:solidFill>
+                        <a:srgbClr val="C9D5E6"/>
+                      </a:solidFill>
+                      <a:prstDash val="solid"/>
+                      <a:round/>
+                      <a:headEnd type="none" w="med" len="med"/>
+                      <a:tailEnd type="none" w="med" len="med"/>
+                    </a:lnB>
+                    <a:solidFill>
+                      <a:srgbClr val="FFE699"/>
+                    </a:solidFill>
+                  </a:tcPr>
+                </a:tc>
+                <a:tc>
+                  <a:txBody>
+                    <a:bodyPr/>
+                    <a:lstStyle/>
+                    <a:p>
+                      <a:pPr indent="0" marL="0">
+                        <a:buNone/>
+                      </a:pPr>
+                      <a:r>
+                        <a:rPr lang="en-US" sz="730" dirty="0">
+                          <a:solidFill>
+                            <a:srgbClr val="000000"/>
+                          </a:solidFill>
+                          <a:latin typeface="Meiryo" pitchFamily="34" charset="0"/>
+                          <a:ea typeface="Meiryo" pitchFamily="34" charset="-122"/>
+                          <a:cs typeface="Meiryo" pitchFamily="34" charset="-120"/>
+                        </a:rPr>
+                        <a:t>『確認する』は未完了のToDo。定着リスクの最重要インプットであり実施状況の確認を要する</a:t>
                       </a:r>
                       <a:endParaRPr lang="en-US" sz="730" dirty="0">
                         <a:latin typeface="Meiryo" charset="0"/>
@@ -15661,7 +17277,7 @@
                   </a:tcPr>
                 </a:tc>
               </a:tr>
-              <a:tr h="790303">
+              <a:tr h="691515">
                 <a:tc>
                   <a:txBody>
                     <a:bodyPr/>
@@ -15679,7 +17295,7 @@
                           <a:ea typeface="Meiryo" pitchFamily="34" charset="-122"/>
                           <a:cs typeface="Meiryo" pitchFamily="34" charset="-120"/>
                         </a:rPr>
-                        <a:t>C-17</a:t>
+                        <a:t>H9-08</a:t>
                       </a:r>
                       <a:endParaRPr lang="en-US" sz="800" dirty="0">
                         <a:latin typeface="Meiryo" charset="0"/>
@@ -15744,7 +17360,7 @@
                           <a:ea typeface="Meiryo" pitchFamily="34" charset="-122"/>
                           <a:cs typeface="Meiryo" pitchFamily="34" charset="-120"/>
                         </a:rPr>
-                        <a:t>非財務データ業務の月間工数（詳細含む）</a:t>
+                        <a:t>本社未報告の現地環境・安全データ</a:t>
                       </a:r>
                       <a:endParaRPr lang="en-US" sz="730" dirty="0">
                         <a:latin typeface="Meiryo" charset="0"/>
@@ -15809,7 +17425,7 @@
                           <a:ea typeface="Meiryo" pitchFamily="34" charset="-122"/>
                           <a:cs typeface="Meiryo" pitchFamily="34" charset="-120"/>
                         </a:rPr>
-                        <a:t>本社推定で進める。拠点への設問（詳細①〜⑤）は削除</a:t>
+                        <a:t>本社チェックリストで補う方針に切替し削除</a:t>
                       </a:r>
                       <a:endParaRPr lang="en-US" sz="730" dirty="0">
                         <a:latin typeface="Meiryo" charset="0"/>
@@ -15874,7 +17490,7 @@
                           <a:ea typeface="Meiryo" pitchFamily="34" charset="-122"/>
                           <a:cs typeface="Meiryo" pitchFamily="34" charset="-120"/>
                         </a:rPr>
-                        <a:t>リスク残存（データなし）</a:t>
+                        <a:t>リスク残存</a:t>
                       </a:r>
                       <a:endParaRPr lang="en-US" sz="750" dirty="0">
                         <a:latin typeface="Meiryo" charset="0"/>
@@ -15942,7 +17558,7 @@
                           <a:ea typeface="Meiryo" pitchFamily="34" charset="-122"/>
                           <a:cs typeface="Meiryo" pitchFamily="34" charset="-120"/>
                         </a:rPr>
-                        <a:t>回答者コメントは「まともに実施したことがない」「推測で進めてください」「質問が分からなかった」＝実質未回答。ROI試算の分母が未検証のまま確定する、最も影響が大きい項目</a:t>
+                        <a:t>H4-07と同根。本社チェックリストが全海外拠点の未報告データを洗い出せる網羅性は不透明</a:t>
                       </a:r>
                       <a:endParaRPr lang="en-US" sz="730" dirty="0">
                         <a:latin typeface="Meiryo" charset="0"/>
@@ -16059,7 +17675,7 @@
                   </a:tcPr>
                 </a:tc>
               </a:tr>
-              <a:tr h="790303">
+              <a:tr h="691515">
                 <a:tc>
                   <a:txBody>
                     <a:bodyPr/>
@@ -16077,7 +17693,7 @@
                           <a:ea typeface="Meiryo" pitchFamily="34" charset="-122"/>
                           <a:cs typeface="Meiryo" pitchFamily="34" charset="-120"/>
                         </a:rPr>
-                        <a:t>C-32</a:t>
+                        <a:t>C-19</a:t>
                       </a:r>
                       <a:endParaRPr lang="en-US" sz="800" dirty="0">
                         <a:latin typeface="Meiryo" charset="0"/>
@@ -16142,7 +17758,7 @@
                           <a:ea typeface="Meiryo" pitchFamily="34" charset="-122"/>
                           <a:cs typeface="Meiryo" pitchFamily="34" charset="-120"/>
                         </a:rPr>
-                        <a:t>入力ファイル・システムのアクセス権</a:t>
+                        <a:t>多言語UI・現地サポートなしでの運用可否</a:t>
                       </a:r>
                       <a:endParaRPr lang="en-US" sz="730" dirty="0">
                         <a:latin typeface="Meiryo" charset="0"/>
@@ -16207,7 +17823,803 @@
                           <a:ea typeface="Meiryo" pitchFamily="34" charset="-122"/>
                           <a:cs typeface="Meiryo" pitchFamily="34" charset="-120"/>
                         </a:rPr>
-                        <a:t>計算用Excelを想定した設問だったため削除</a:t>
+                        <a:t>多言語対応をRFPに含める前提で設計し削除</a:t>
+                      </a:r>
+                      <a:endParaRPr lang="en-US" sz="730" dirty="0">
+                        <a:latin typeface="Meiryo" charset="0"/>
+                        <a:ea typeface="Meiryo" charset="0"/>
+                        <a:cs typeface="Meiryo" charset="0"/>
+                      </a:endParaRPr>
+                    </a:p>
+                  </a:txBody>
+                  <a:tcPr marL="91440" marR="91440" marT="45720" marB="45720" anchor="ctr">
+                    <a:lnL w="6350" cap="flat" cmpd="sng" algn="ctr">
+                      <a:solidFill>
+                        <a:srgbClr val="C9D5E6"/>
+                      </a:solidFill>
+                      <a:prstDash val="solid"/>
+                      <a:round/>
+                      <a:headEnd type="none" w="med" len="med"/>
+                      <a:tailEnd type="none" w="med" len="med"/>
+                    </a:lnL>
+                    <a:lnR w="6350" cap="flat" cmpd="sng" algn="ctr">
+                      <a:solidFill>
+                        <a:srgbClr val="C9D5E6"/>
+                      </a:solidFill>
+                      <a:prstDash val="solid"/>
+                      <a:round/>
+                      <a:headEnd type="none" w="med" len="med"/>
+                      <a:tailEnd type="none" w="med" len="med"/>
+                    </a:lnR>
+                    <a:lnT w="6350" cap="flat" cmpd="sng" algn="ctr">
+                      <a:solidFill>
+                        <a:srgbClr val="C9D5E6"/>
+                      </a:solidFill>
+                      <a:prstDash val="solid"/>
+                      <a:round/>
+                      <a:headEnd type="none" w="med" len="med"/>
+                      <a:tailEnd type="none" w="med" len="med"/>
+                    </a:lnT>
+                    <a:lnB w="6350" cap="flat" cmpd="sng" algn="ctr">
+                      <a:solidFill>
+                        <a:srgbClr val="C9D5E6"/>
+                      </a:solidFill>
+                      <a:prstDash val="solid"/>
+                      <a:round/>
+                      <a:headEnd type="none" w="med" len="med"/>
+                      <a:tailEnd type="none" w="med" len="med"/>
+                    </a:lnB>
+                  </a:tcPr>
+                </a:tc>
+                <a:tc>
+                  <a:txBody>
+                    <a:bodyPr/>
+                    <a:lstStyle/>
+                    <a:p>
+                      <a:pPr algn="ctr" indent="0" marL="0">
+                        <a:buNone/>
+                      </a:pPr>
+                      <a:r>
+                        <a:rPr lang="en-US" sz="750" b="1" dirty="0">
+                          <a:solidFill>
+                            <a:srgbClr val="8A3B12"/>
+                          </a:solidFill>
+                          <a:latin typeface="Meiryo" pitchFamily="34" charset="0"/>
+                          <a:ea typeface="Meiryo" pitchFamily="34" charset="-122"/>
+                          <a:cs typeface="Meiryo" pitchFamily="34" charset="-120"/>
+                        </a:rPr>
+                        <a:t>理由不十分</a:t>
+                      </a:r>
+                      <a:endParaRPr lang="en-US" sz="750" dirty="0">
+                        <a:latin typeface="Meiryo" charset="0"/>
+                        <a:ea typeface="Meiryo" charset="0"/>
+                        <a:cs typeface="Meiryo" charset="0"/>
+                      </a:endParaRPr>
+                    </a:p>
+                  </a:txBody>
+                  <a:tcPr marL="91440" marR="91440" marT="45720" marB="45720" anchor="ctr">
+                    <a:lnL w="6350" cap="flat" cmpd="sng" algn="ctr">
+                      <a:solidFill>
+                        <a:srgbClr val="C9D5E6"/>
+                      </a:solidFill>
+                      <a:prstDash val="solid"/>
+                      <a:round/>
+                      <a:headEnd type="none" w="med" len="med"/>
+                      <a:tailEnd type="none" w="med" len="med"/>
+                    </a:lnL>
+                    <a:lnR w="6350" cap="flat" cmpd="sng" algn="ctr">
+                      <a:solidFill>
+                        <a:srgbClr val="C9D5E6"/>
+                      </a:solidFill>
+                      <a:prstDash val="solid"/>
+                      <a:round/>
+                      <a:headEnd type="none" w="med" len="med"/>
+                      <a:tailEnd type="none" w="med" len="med"/>
+                    </a:lnR>
+                    <a:lnT w="6350" cap="flat" cmpd="sng" algn="ctr">
+                      <a:solidFill>
+                        <a:srgbClr val="C9D5E6"/>
+                      </a:solidFill>
+                      <a:prstDash val="solid"/>
+                      <a:round/>
+                      <a:headEnd type="none" w="med" len="med"/>
+                      <a:tailEnd type="none" w="med" len="med"/>
+                    </a:lnT>
+                    <a:lnB w="6350" cap="flat" cmpd="sng" algn="ctr">
+                      <a:solidFill>
+                        <a:srgbClr val="C9D5E6"/>
+                      </a:solidFill>
+                      <a:prstDash val="solid"/>
+                      <a:round/>
+                      <a:headEnd type="none" w="med" len="med"/>
+                      <a:tailEnd type="none" w="med" len="med"/>
+                    </a:lnB>
+                    <a:solidFill>
+                      <a:srgbClr val="F8CBAD"/>
+                    </a:solidFill>
+                  </a:tcPr>
+                </a:tc>
+                <a:tc>
+                  <a:txBody>
+                    <a:bodyPr/>
+                    <a:lstStyle/>
+                    <a:p>
+                      <a:pPr indent="0" marL="0">
+                        <a:buNone/>
+                      </a:pPr>
+                      <a:r>
+                        <a:rPr lang="en-US" sz="730" dirty="0">
+                          <a:solidFill>
+                            <a:srgbClr val="000000"/>
+                          </a:solidFill>
+                          <a:latin typeface="Meiryo" pitchFamily="34" charset="0"/>
+                          <a:ea typeface="Meiryo" pitchFamily="34" charset="-122"/>
+                          <a:cs typeface="Meiryo" pitchFamily="34" charset="-120"/>
+                        </a:rPr>
+                        <a:t>「厚めに実装すれば安全」との理由づけは、翻訳コスト・ベンダー減少・価格上昇という当初の指摘を無視。過剰要求は選定失敗に直結（ユーザー指摘により再分類）</a:t>
+                      </a:r>
+                      <a:endParaRPr lang="en-US" sz="730" dirty="0">
+                        <a:latin typeface="Meiryo" charset="0"/>
+                        <a:ea typeface="Meiryo" charset="0"/>
+                        <a:cs typeface="Meiryo" charset="0"/>
+                      </a:endParaRPr>
+                    </a:p>
+                  </a:txBody>
+                  <a:tcPr marL="91440" marR="91440" marT="45720" marB="45720" anchor="ctr">
+                    <a:lnL w="6350" cap="flat" cmpd="sng" algn="ctr">
+                      <a:solidFill>
+                        <a:srgbClr val="C9D5E6"/>
+                      </a:solidFill>
+                      <a:prstDash val="solid"/>
+                      <a:round/>
+                      <a:headEnd type="none" w="med" len="med"/>
+                      <a:tailEnd type="none" w="med" len="med"/>
+                    </a:lnL>
+                    <a:lnR w="6350" cap="flat" cmpd="sng" algn="ctr">
+                      <a:solidFill>
+                        <a:srgbClr val="C9D5E6"/>
+                      </a:solidFill>
+                      <a:prstDash val="solid"/>
+                      <a:round/>
+                      <a:headEnd type="none" w="med" len="med"/>
+                      <a:tailEnd type="none" w="med" len="med"/>
+                    </a:lnR>
+                    <a:lnT w="6350" cap="flat" cmpd="sng" algn="ctr">
+                      <a:solidFill>
+                        <a:srgbClr val="C9D5E6"/>
+                      </a:solidFill>
+                      <a:prstDash val="solid"/>
+                      <a:round/>
+                      <a:headEnd type="none" w="med" len="med"/>
+                      <a:tailEnd type="none" w="med" len="med"/>
+                    </a:lnT>
+                    <a:lnB w="6350" cap="flat" cmpd="sng" algn="ctr">
+                      <a:solidFill>
+                        <a:srgbClr val="C9D5E6"/>
+                      </a:solidFill>
+                      <a:prstDash val="solid"/>
+                      <a:round/>
+                      <a:headEnd type="none" w="med" len="med"/>
+                      <a:tailEnd type="none" w="med" len="med"/>
+                    </a:lnB>
+                  </a:tcPr>
+                </a:tc>
+                <a:tc>
+                  <a:txBody>
+                    <a:bodyPr/>
+                    <a:lstStyle/>
+                    <a:p>
+                      <a:pPr algn="ctr" indent="0" marL="0">
+                        <a:buNone/>
+                      </a:pPr>
+                      <a:r>
+                        <a:rPr lang="en-US" sz="850" b="1" dirty="0">
+                          <a:solidFill>
+                            <a:srgbClr val="8A3B12"/>
+                          </a:solidFill>
+                          <a:latin typeface="Meiryo" pitchFamily="34" charset="0"/>
+                          <a:ea typeface="Meiryo" pitchFamily="34" charset="-122"/>
+                          <a:cs typeface="Meiryo" pitchFamily="34" charset="-120"/>
+                        </a:rPr>
+                        <a:t>高</a:t>
+                      </a:r>
+                      <a:endParaRPr lang="en-US" sz="850" dirty="0">
+                        <a:latin typeface="Meiryo" charset="0"/>
+                        <a:ea typeface="Meiryo" charset="0"/>
+                        <a:cs typeface="Meiryo" charset="0"/>
+                      </a:endParaRPr>
+                    </a:p>
+                  </a:txBody>
+                  <a:tcPr marL="91440" marR="91440" marT="45720" marB="45720" anchor="ctr">
+                    <a:lnL w="6350" cap="flat" cmpd="sng" algn="ctr">
+                      <a:solidFill>
+                        <a:srgbClr val="C9D5E6"/>
+                      </a:solidFill>
+                      <a:prstDash val="solid"/>
+                      <a:round/>
+                      <a:headEnd type="none" w="med" len="med"/>
+                      <a:tailEnd type="none" w="med" len="med"/>
+                    </a:lnL>
+                    <a:lnR w="6350" cap="flat" cmpd="sng" algn="ctr">
+                      <a:solidFill>
+                        <a:srgbClr val="C9D5E6"/>
+                      </a:solidFill>
+                      <a:prstDash val="solid"/>
+                      <a:round/>
+                      <a:headEnd type="none" w="med" len="med"/>
+                      <a:tailEnd type="none" w="med" len="med"/>
+                    </a:lnR>
+                    <a:lnT w="6350" cap="flat" cmpd="sng" algn="ctr">
+                      <a:solidFill>
+                        <a:srgbClr val="C9D5E6"/>
+                      </a:solidFill>
+                      <a:prstDash val="solid"/>
+                      <a:round/>
+                      <a:headEnd type="none" w="med" len="med"/>
+                      <a:tailEnd type="none" w="med" len="med"/>
+                    </a:lnT>
+                    <a:lnB w="6350" cap="flat" cmpd="sng" algn="ctr">
+                      <a:solidFill>
+                        <a:srgbClr val="C9D5E6"/>
+                      </a:solidFill>
+                      <a:prstDash val="solid"/>
+                      <a:round/>
+                      <a:headEnd type="none" w="med" len="med"/>
+                      <a:tailEnd type="none" w="med" len="med"/>
+                    </a:lnB>
+                    <a:solidFill>
+                      <a:srgbClr val="F8CBAD"/>
+                    </a:solidFill>
+                  </a:tcPr>
+                </a:tc>
+              </a:tr>
+              <a:tr h="691515">
+                <a:tc>
+                  <a:txBody>
+                    <a:bodyPr/>
+                    <a:lstStyle/>
+                    <a:p>
+                      <a:pPr algn="ctr" indent="0" marL="0">
+                        <a:buNone/>
+                      </a:pPr>
+                      <a:r>
+                        <a:rPr lang="en-US" sz="800" b="1" dirty="0">
+                          <a:solidFill>
+                            <a:srgbClr val="000000"/>
+                          </a:solidFill>
+                          <a:latin typeface="Meiryo" pitchFamily="34" charset="0"/>
+                          <a:ea typeface="Meiryo" pitchFamily="34" charset="-122"/>
+                          <a:cs typeface="Meiryo" pitchFamily="34" charset="-120"/>
+                        </a:rPr>
+                        <a:t>H9-01</a:t>
+                      </a:r>
+                      <a:endParaRPr lang="en-US" sz="800" dirty="0">
+                        <a:latin typeface="Meiryo" charset="0"/>
+                        <a:ea typeface="Meiryo" charset="0"/>
+                        <a:cs typeface="Meiryo" charset="0"/>
+                      </a:endParaRPr>
+                    </a:p>
+                  </a:txBody>
+                  <a:tcPr marL="91440" marR="91440" marT="45720" marB="45720" anchor="ctr">
+                    <a:lnL w="6350" cap="flat" cmpd="sng" algn="ctr">
+                      <a:solidFill>
+                        <a:srgbClr val="C9D5E6"/>
+                      </a:solidFill>
+                      <a:prstDash val="solid"/>
+                      <a:round/>
+                      <a:headEnd type="none" w="med" len="med"/>
+                      <a:tailEnd type="none" w="med" len="med"/>
+                    </a:lnL>
+                    <a:lnR w="6350" cap="flat" cmpd="sng" algn="ctr">
+                      <a:solidFill>
+                        <a:srgbClr val="C9D5E6"/>
+                      </a:solidFill>
+                      <a:prstDash val="solid"/>
+                      <a:round/>
+                      <a:headEnd type="none" w="med" len="med"/>
+                      <a:tailEnd type="none" w="med" len="med"/>
+                    </a:lnR>
+                    <a:lnT w="6350" cap="flat" cmpd="sng" algn="ctr">
+                      <a:solidFill>
+                        <a:srgbClr val="C9D5E6"/>
+                      </a:solidFill>
+                      <a:prstDash val="solid"/>
+                      <a:round/>
+                      <a:headEnd type="none" w="med" len="med"/>
+                      <a:tailEnd type="none" w="med" len="med"/>
+                    </a:lnT>
+                    <a:lnB w="6350" cap="flat" cmpd="sng" algn="ctr">
+                      <a:solidFill>
+                        <a:srgbClr val="C9D5E6"/>
+                      </a:solidFill>
+                      <a:prstDash val="solid"/>
+                      <a:round/>
+                      <a:headEnd type="none" w="med" len="med"/>
+                      <a:tailEnd type="none" w="med" len="med"/>
+                    </a:lnB>
+                  </a:tcPr>
+                </a:tc>
+                <a:tc>
+                  <a:txBody>
+                    <a:bodyPr/>
+                    <a:lstStyle/>
+                    <a:p>
+                      <a:pPr indent="0" marL="0">
+                        <a:buNone/>
+                      </a:pPr>
+                      <a:r>
+                        <a:rPr lang="en-US" sz="730" dirty="0">
+                          <a:solidFill>
+                            <a:srgbClr val="000000"/>
+                          </a:solidFill>
+                          <a:latin typeface="Meiryo" pitchFamily="34" charset="0"/>
+                          <a:ea typeface="Meiryo" pitchFamily="34" charset="-122"/>
+                          <a:cs typeface="Meiryo" pitchFamily="34" charset="-120"/>
+                        </a:rPr>
+                        <a:t>業務・帳票・システムの言語と翻訳体制</a:t>
+                      </a:r>
+                      <a:endParaRPr lang="en-US" sz="730" dirty="0">
+                        <a:latin typeface="Meiryo" charset="0"/>
+                        <a:ea typeface="Meiryo" charset="0"/>
+                        <a:cs typeface="Meiryo" charset="0"/>
+                      </a:endParaRPr>
+                    </a:p>
+                  </a:txBody>
+                  <a:tcPr marL="91440" marR="91440" marT="45720" marB="45720" anchor="ctr">
+                    <a:lnL w="6350" cap="flat" cmpd="sng" algn="ctr">
+                      <a:solidFill>
+                        <a:srgbClr val="C9D5E6"/>
+                      </a:solidFill>
+                      <a:prstDash val="solid"/>
+                      <a:round/>
+                      <a:headEnd type="none" w="med" len="med"/>
+                      <a:tailEnd type="none" w="med" len="med"/>
+                    </a:lnL>
+                    <a:lnR w="6350" cap="flat" cmpd="sng" algn="ctr">
+                      <a:solidFill>
+                        <a:srgbClr val="C9D5E6"/>
+                      </a:solidFill>
+                      <a:prstDash val="solid"/>
+                      <a:round/>
+                      <a:headEnd type="none" w="med" len="med"/>
+                      <a:tailEnd type="none" w="med" len="med"/>
+                    </a:lnR>
+                    <a:lnT w="6350" cap="flat" cmpd="sng" algn="ctr">
+                      <a:solidFill>
+                        <a:srgbClr val="C9D5E6"/>
+                      </a:solidFill>
+                      <a:prstDash val="solid"/>
+                      <a:round/>
+                      <a:headEnd type="none" w="med" len="med"/>
+                      <a:tailEnd type="none" w="med" len="med"/>
+                    </a:lnT>
+                    <a:lnB w="6350" cap="flat" cmpd="sng" algn="ctr">
+                      <a:solidFill>
+                        <a:srgbClr val="C9D5E6"/>
+                      </a:solidFill>
+                      <a:prstDash val="solid"/>
+                      <a:round/>
+                      <a:headEnd type="none" w="med" len="med"/>
+                      <a:tailEnd type="none" w="med" len="med"/>
+                    </a:lnB>
+                  </a:tcPr>
+                </a:tc>
+                <a:tc>
+                  <a:txBody>
+                    <a:bodyPr/>
+                    <a:lstStyle/>
+                    <a:p>
+                      <a:pPr indent="0" marL="0">
+                        <a:buNone/>
+                      </a:pPr>
+                      <a:r>
+                        <a:rPr lang="en-US" sz="730" dirty="0">
+                          <a:solidFill>
+                            <a:srgbClr val="000000"/>
+                          </a:solidFill>
+                          <a:latin typeface="Meiryo" pitchFamily="34" charset="0"/>
+                          <a:ea typeface="Meiryo" pitchFamily="34" charset="-122"/>
+                          <a:cs typeface="Meiryo" pitchFamily="34" charset="-120"/>
+                        </a:rPr>
+                        <a:t>多言語対応をRFPに含める前提で設計し削除</a:t>
+                      </a:r>
+                      <a:endParaRPr lang="en-US" sz="730" dirty="0">
+                        <a:latin typeface="Meiryo" charset="0"/>
+                        <a:ea typeface="Meiryo" charset="0"/>
+                        <a:cs typeface="Meiryo" charset="0"/>
+                      </a:endParaRPr>
+                    </a:p>
+                  </a:txBody>
+                  <a:tcPr marL="91440" marR="91440" marT="45720" marB="45720" anchor="ctr">
+                    <a:lnL w="6350" cap="flat" cmpd="sng" algn="ctr">
+                      <a:solidFill>
+                        <a:srgbClr val="C9D5E6"/>
+                      </a:solidFill>
+                      <a:prstDash val="solid"/>
+                      <a:round/>
+                      <a:headEnd type="none" w="med" len="med"/>
+                      <a:tailEnd type="none" w="med" len="med"/>
+                    </a:lnL>
+                    <a:lnR w="6350" cap="flat" cmpd="sng" algn="ctr">
+                      <a:solidFill>
+                        <a:srgbClr val="C9D5E6"/>
+                      </a:solidFill>
+                      <a:prstDash val="solid"/>
+                      <a:round/>
+                      <a:headEnd type="none" w="med" len="med"/>
+                      <a:tailEnd type="none" w="med" len="med"/>
+                    </a:lnR>
+                    <a:lnT w="6350" cap="flat" cmpd="sng" algn="ctr">
+                      <a:solidFill>
+                        <a:srgbClr val="C9D5E6"/>
+                      </a:solidFill>
+                      <a:prstDash val="solid"/>
+                      <a:round/>
+                      <a:headEnd type="none" w="med" len="med"/>
+                      <a:tailEnd type="none" w="med" len="med"/>
+                    </a:lnT>
+                    <a:lnB w="6350" cap="flat" cmpd="sng" algn="ctr">
+                      <a:solidFill>
+                        <a:srgbClr val="C9D5E6"/>
+                      </a:solidFill>
+                      <a:prstDash val="solid"/>
+                      <a:round/>
+                      <a:headEnd type="none" w="med" len="med"/>
+                      <a:tailEnd type="none" w="med" len="med"/>
+                    </a:lnB>
+                  </a:tcPr>
+                </a:tc>
+                <a:tc>
+                  <a:txBody>
+                    <a:bodyPr/>
+                    <a:lstStyle/>
+                    <a:p>
+                      <a:pPr algn="ctr" indent="0" marL="0">
+                        <a:buNone/>
+                      </a:pPr>
+                      <a:r>
+                        <a:rPr lang="en-US" sz="750" b="1" dirty="0">
+                          <a:solidFill>
+                            <a:srgbClr val="8A3B12"/>
+                          </a:solidFill>
+                          <a:latin typeface="Meiryo" pitchFamily="34" charset="0"/>
+                          <a:ea typeface="Meiryo" pitchFamily="34" charset="-122"/>
+                          <a:cs typeface="Meiryo" pitchFamily="34" charset="-120"/>
+                        </a:rPr>
+                        <a:t>理由不十分</a:t>
+                      </a:r>
+                      <a:endParaRPr lang="en-US" sz="750" dirty="0">
+                        <a:latin typeface="Meiryo" charset="0"/>
+                        <a:ea typeface="Meiryo" charset="0"/>
+                        <a:cs typeface="Meiryo" charset="0"/>
+                      </a:endParaRPr>
+                    </a:p>
+                  </a:txBody>
+                  <a:tcPr marL="91440" marR="91440" marT="45720" marB="45720" anchor="ctr">
+                    <a:lnL w="6350" cap="flat" cmpd="sng" algn="ctr">
+                      <a:solidFill>
+                        <a:srgbClr val="C9D5E6"/>
+                      </a:solidFill>
+                      <a:prstDash val="solid"/>
+                      <a:round/>
+                      <a:headEnd type="none" w="med" len="med"/>
+                      <a:tailEnd type="none" w="med" len="med"/>
+                    </a:lnL>
+                    <a:lnR w="6350" cap="flat" cmpd="sng" algn="ctr">
+                      <a:solidFill>
+                        <a:srgbClr val="C9D5E6"/>
+                      </a:solidFill>
+                      <a:prstDash val="solid"/>
+                      <a:round/>
+                      <a:headEnd type="none" w="med" len="med"/>
+                      <a:tailEnd type="none" w="med" len="med"/>
+                    </a:lnR>
+                    <a:lnT w="6350" cap="flat" cmpd="sng" algn="ctr">
+                      <a:solidFill>
+                        <a:srgbClr val="C9D5E6"/>
+                      </a:solidFill>
+                      <a:prstDash val="solid"/>
+                      <a:round/>
+                      <a:headEnd type="none" w="med" len="med"/>
+                      <a:tailEnd type="none" w="med" len="med"/>
+                    </a:lnT>
+                    <a:lnB w="6350" cap="flat" cmpd="sng" algn="ctr">
+                      <a:solidFill>
+                        <a:srgbClr val="C9D5E6"/>
+                      </a:solidFill>
+                      <a:prstDash val="solid"/>
+                      <a:round/>
+                      <a:headEnd type="none" w="med" len="med"/>
+                      <a:tailEnd type="none" w="med" len="med"/>
+                    </a:lnB>
+                    <a:solidFill>
+                      <a:srgbClr val="F8CBAD"/>
+                    </a:solidFill>
+                  </a:tcPr>
+                </a:tc>
+                <a:tc>
+                  <a:txBody>
+                    <a:bodyPr/>
+                    <a:lstStyle/>
+                    <a:p>
+                      <a:pPr indent="0" marL="0">
+                        <a:buNone/>
+                      </a:pPr>
+                      <a:r>
+                        <a:rPr lang="en-US" sz="730" dirty="0">
+                          <a:solidFill>
+                            <a:srgbClr val="000000"/>
+                          </a:solidFill>
+                          <a:latin typeface="Meiryo" pitchFamily="34" charset="0"/>
+                          <a:ea typeface="Meiryo" pitchFamily="34" charset="-122"/>
+                          <a:cs typeface="Meiryo" pitchFamily="34" charset="-120"/>
+                        </a:rPr>
+                        <a:t>C-19と同じ問題。「厚めに実装すれば安全」はコスト増・ベンダー減少という当初のリスクを無視（ユーザー指摘により再分類）</a:t>
+                      </a:r>
+                      <a:endParaRPr lang="en-US" sz="730" dirty="0">
+                        <a:latin typeface="Meiryo" charset="0"/>
+                        <a:ea typeface="Meiryo" charset="0"/>
+                        <a:cs typeface="Meiryo" charset="0"/>
+                      </a:endParaRPr>
+                    </a:p>
+                  </a:txBody>
+                  <a:tcPr marL="91440" marR="91440" marT="45720" marB="45720" anchor="ctr">
+                    <a:lnL w="6350" cap="flat" cmpd="sng" algn="ctr">
+                      <a:solidFill>
+                        <a:srgbClr val="C9D5E6"/>
+                      </a:solidFill>
+                      <a:prstDash val="solid"/>
+                      <a:round/>
+                      <a:headEnd type="none" w="med" len="med"/>
+                      <a:tailEnd type="none" w="med" len="med"/>
+                    </a:lnL>
+                    <a:lnR w="6350" cap="flat" cmpd="sng" algn="ctr">
+                      <a:solidFill>
+                        <a:srgbClr val="C9D5E6"/>
+                      </a:solidFill>
+                      <a:prstDash val="solid"/>
+                      <a:round/>
+                      <a:headEnd type="none" w="med" len="med"/>
+                      <a:tailEnd type="none" w="med" len="med"/>
+                    </a:lnR>
+                    <a:lnT w="6350" cap="flat" cmpd="sng" algn="ctr">
+                      <a:solidFill>
+                        <a:srgbClr val="C9D5E6"/>
+                      </a:solidFill>
+                      <a:prstDash val="solid"/>
+                      <a:round/>
+                      <a:headEnd type="none" w="med" len="med"/>
+                      <a:tailEnd type="none" w="med" len="med"/>
+                    </a:lnT>
+                    <a:lnB w="6350" cap="flat" cmpd="sng" algn="ctr">
+                      <a:solidFill>
+                        <a:srgbClr val="C9D5E6"/>
+                      </a:solidFill>
+                      <a:prstDash val="solid"/>
+                      <a:round/>
+                      <a:headEnd type="none" w="med" len="med"/>
+                      <a:tailEnd type="none" w="med" len="med"/>
+                    </a:lnB>
+                  </a:tcPr>
+                </a:tc>
+                <a:tc>
+                  <a:txBody>
+                    <a:bodyPr/>
+                    <a:lstStyle/>
+                    <a:p>
+                      <a:pPr algn="ctr" indent="0" marL="0">
+                        <a:buNone/>
+                      </a:pPr>
+                      <a:r>
+                        <a:rPr lang="en-US" sz="850" b="1" dirty="0">
+                          <a:solidFill>
+                            <a:srgbClr val="8A3B12"/>
+                          </a:solidFill>
+                          <a:latin typeface="Meiryo" pitchFamily="34" charset="0"/>
+                          <a:ea typeface="Meiryo" pitchFamily="34" charset="-122"/>
+                          <a:cs typeface="Meiryo" pitchFamily="34" charset="-120"/>
+                        </a:rPr>
+                        <a:t>高</a:t>
+                      </a:r>
+                      <a:endParaRPr lang="en-US" sz="850" dirty="0">
+                        <a:latin typeface="Meiryo" charset="0"/>
+                        <a:ea typeface="Meiryo" charset="0"/>
+                        <a:cs typeface="Meiryo" charset="0"/>
+                      </a:endParaRPr>
+                    </a:p>
+                  </a:txBody>
+                  <a:tcPr marL="91440" marR="91440" marT="45720" marB="45720" anchor="ctr">
+                    <a:lnL w="6350" cap="flat" cmpd="sng" algn="ctr">
+                      <a:solidFill>
+                        <a:srgbClr val="C9D5E6"/>
+                      </a:solidFill>
+                      <a:prstDash val="solid"/>
+                      <a:round/>
+                      <a:headEnd type="none" w="med" len="med"/>
+                      <a:tailEnd type="none" w="med" len="med"/>
+                    </a:lnL>
+                    <a:lnR w="6350" cap="flat" cmpd="sng" algn="ctr">
+                      <a:solidFill>
+                        <a:srgbClr val="C9D5E6"/>
+                      </a:solidFill>
+                      <a:prstDash val="solid"/>
+                      <a:round/>
+                      <a:headEnd type="none" w="med" len="med"/>
+                      <a:tailEnd type="none" w="med" len="med"/>
+                    </a:lnR>
+                    <a:lnT w="6350" cap="flat" cmpd="sng" algn="ctr">
+                      <a:solidFill>
+                        <a:srgbClr val="C9D5E6"/>
+                      </a:solidFill>
+                      <a:prstDash val="solid"/>
+                      <a:round/>
+                      <a:headEnd type="none" w="med" len="med"/>
+                      <a:tailEnd type="none" w="med" len="med"/>
+                    </a:lnT>
+                    <a:lnB w="6350" cap="flat" cmpd="sng" algn="ctr">
+                      <a:solidFill>
+                        <a:srgbClr val="C9D5E6"/>
+                      </a:solidFill>
+                      <a:prstDash val="solid"/>
+                      <a:round/>
+                      <a:headEnd type="none" w="med" len="med"/>
+                      <a:tailEnd type="none" w="med" len="med"/>
+                    </a:lnB>
+                    <a:solidFill>
+                      <a:srgbClr val="F8CBAD"/>
+                    </a:solidFill>
+                  </a:tcPr>
+                </a:tc>
+              </a:tr>
+              <a:tr h="0">
+                <a:tc>
+                  <a:txBody>
+                    <a:bodyPr/>
+                    <a:lstStyle/>
+                    <a:p>
+                      <a:pPr algn="ctr" indent="0" marL="0">
+                        <a:buNone/>
+                      </a:pPr>
+                      <a:r>
+                        <a:rPr lang="en-US" sz="800" b="1" dirty="0">
+                          <a:solidFill>
+                            <a:srgbClr val="000000"/>
+                          </a:solidFill>
+                          <a:latin typeface="Meiryo" pitchFamily="34" charset="0"/>
+                          <a:ea typeface="Meiryo" pitchFamily="34" charset="-122"/>
+                          <a:cs typeface="Meiryo" pitchFamily="34" charset="-120"/>
+                        </a:rPr>
+                        <a:t>10-09</a:t>
+                      </a:r>
+                      <a:endParaRPr lang="en-US" sz="800" dirty="0">
+                        <a:latin typeface="Meiryo" charset="0"/>
+                        <a:ea typeface="Meiryo" charset="0"/>
+                        <a:cs typeface="Meiryo" charset="0"/>
+                      </a:endParaRPr>
+                    </a:p>
+                  </a:txBody>
+                  <a:tcPr marL="91440" marR="91440" marT="45720" marB="45720" anchor="ctr">
+                    <a:lnL w="6350" cap="flat" cmpd="sng" algn="ctr">
+                      <a:solidFill>
+                        <a:srgbClr val="C9D5E6"/>
+                      </a:solidFill>
+                      <a:prstDash val="solid"/>
+                      <a:round/>
+                      <a:headEnd type="none" w="med" len="med"/>
+                      <a:tailEnd type="none" w="med" len="med"/>
+                    </a:lnL>
+                    <a:lnR w="6350" cap="flat" cmpd="sng" algn="ctr">
+                      <a:solidFill>
+                        <a:srgbClr val="C9D5E6"/>
+                      </a:solidFill>
+                      <a:prstDash val="solid"/>
+                      <a:round/>
+                      <a:headEnd type="none" w="med" len="med"/>
+                      <a:tailEnd type="none" w="med" len="med"/>
+                    </a:lnR>
+                    <a:lnT w="6350" cap="flat" cmpd="sng" algn="ctr">
+                      <a:solidFill>
+                        <a:srgbClr val="C9D5E6"/>
+                      </a:solidFill>
+                      <a:prstDash val="solid"/>
+                      <a:round/>
+                      <a:headEnd type="none" w="med" len="med"/>
+                      <a:tailEnd type="none" w="med" len="med"/>
+                    </a:lnT>
+                    <a:lnB w="6350" cap="flat" cmpd="sng" algn="ctr">
+                      <a:solidFill>
+                        <a:srgbClr val="C9D5E6"/>
+                      </a:solidFill>
+                      <a:prstDash val="solid"/>
+                      <a:round/>
+                      <a:headEnd type="none" w="med" len="med"/>
+                      <a:tailEnd type="none" w="med" len="med"/>
+                    </a:lnB>
+                  </a:tcPr>
+                </a:tc>
+                <a:tc>
+                  <a:txBody>
+                    <a:bodyPr/>
+                    <a:lstStyle/>
+                    <a:p>
+                      <a:pPr indent="0" marL="0">
+                        <a:buNone/>
+                      </a:pPr>
+                      <a:r>
+                        <a:rPr lang="en-US" sz="730" dirty="0">
+                          <a:solidFill>
+                            <a:srgbClr val="000000"/>
+                          </a:solidFill>
+                          <a:latin typeface="Meiryo" pitchFamily="34" charset="0"/>
+                          <a:ea typeface="Meiryo" pitchFamily="34" charset="-122"/>
+                          <a:cs typeface="Meiryo" pitchFamily="34" charset="-120"/>
+                        </a:rPr>
+                        <a:t>再計算への不安</a:t>
+                      </a:r>
+                      <a:endParaRPr lang="en-US" sz="730" dirty="0">
+                        <a:latin typeface="Meiryo" charset="0"/>
+                        <a:ea typeface="Meiryo" charset="0"/>
+                        <a:cs typeface="Meiryo" charset="0"/>
+                      </a:endParaRPr>
+                    </a:p>
+                  </a:txBody>
+                  <a:tcPr marL="91440" marR="91440" marT="45720" marB="45720" anchor="ctr">
+                    <a:lnL w="6350" cap="flat" cmpd="sng" algn="ctr">
+                      <a:solidFill>
+                        <a:srgbClr val="C9D5E6"/>
+                      </a:solidFill>
+                      <a:prstDash val="solid"/>
+                      <a:round/>
+                      <a:headEnd type="none" w="med" len="med"/>
+                      <a:tailEnd type="none" w="med" len="med"/>
+                    </a:lnL>
+                    <a:lnR w="6350" cap="flat" cmpd="sng" algn="ctr">
+                      <a:solidFill>
+                        <a:srgbClr val="C9D5E6"/>
+                      </a:solidFill>
+                      <a:prstDash val="solid"/>
+                      <a:round/>
+                      <a:headEnd type="none" w="med" len="med"/>
+                      <a:tailEnd type="none" w="med" len="med"/>
+                    </a:lnR>
+                    <a:lnT w="6350" cap="flat" cmpd="sng" algn="ctr">
+                      <a:solidFill>
+                        <a:srgbClr val="C9D5E6"/>
+                      </a:solidFill>
+                      <a:prstDash val="solid"/>
+                      <a:round/>
+                      <a:headEnd type="none" w="med" len="med"/>
+                      <a:tailEnd type="none" w="med" len="med"/>
+                    </a:lnT>
+                    <a:lnB w="6350" cap="flat" cmpd="sng" algn="ctr">
+                      <a:solidFill>
+                        <a:srgbClr val="C9D5E6"/>
+                      </a:solidFill>
+                      <a:prstDash val="solid"/>
+                      <a:round/>
+                      <a:headEnd type="none" w="med" len="med"/>
+                      <a:tailEnd type="none" w="med" len="med"/>
+                    </a:lnB>
+                  </a:tcPr>
+                </a:tc>
+                <a:tc>
+                  <a:txBody>
+                    <a:bodyPr/>
+                    <a:lstStyle/>
+                    <a:p>
+                      <a:pPr indent="0" marL="0">
+                        <a:buNone/>
+                      </a:pPr>
+                      <a:r>
+                        <a:rPr lang="en-US" sz="730" dirty="0">
+                          <a:solidFill>
+                            <a:srgbClr val="000000"/>
+                          </a:solidFill>
+                          <a:latin typeface="Meiryo" pitchFamily="34" charset="0"/>
+                          <a:ea typeface="Meiryo" pitchFamily="34" charset="-122"/>
+                          <a:cs typeface="Meiryo" pitchFamily="34" charset="-120"/>
+                        </a:rPr>
+                        <a:t>拠点は計算していないため本社機能として設計</a:t>
                       </a:r>
                       <a:endParaRPr lang="en-US" sz="730" dirty="0">
                         <a:latin typeface="Meiryo" charset="0"/>
@@ -16340,1201 +18752,7 @@
                           <a:ea typeface="Meiryo" pitchFamily="34" charset="-122"/>
                           <a:cs typeface="Meiryo" pitchFamily="34" charset="-120"/>
                         </a:rPr>
-                        <a:t>『誰でも編集できる状態か』という統制上の論点自体は未解消。改ざんリスクの指摘可能性が残る</a:t>
-                      </a:r>
-                      <a:endParaRPr lang="en-US" sz="730" dirty="0">
-                        <a:latin typeface="Meiryo" charset="0"/>
-                        <a:ea typeface="Meiryo" charset="0"/>
-                        <a:cs typeface="Meiryo" charset="0"/>
-                      </a:endParaRPr>
-                    </a:p>
-                  </a:txBody>
-                  <a:tcPr marL="91440" marR="91440" marT="45720" marB="45720" anchor="ctr">
-                    <a:lnL w="6350" cap="flat" cmpd="sng" algn="ctr">
-                      <a:solidFill>
-                        <a:srgbClr val="C9D5E6"/>
-                      </a:solidFill>
-                      <a:prstDash val="solid"/>
-                      <a:round/>
-                      <a:headEnd type="none" w="med" len="med"/>
-                      <a:tailEnd type="none" w="med" len="med"/>
-                    </a:lnL>
-                    <a:lnR w="6350" cap="flat" cmpd="sng" algn="ctr">
-                      <a:solidFill>
-                        <a:srgbClr val="C9D5E6"/>
-                      </a:solidFill>
-                      <a:prstDash val="solid"/>
-                      <a:round/>
-                      <a:headEnd type="none" w="med" len="med"/>
-                      <a:tailEnd type="none" w="med" len="med"/>
-                    </a:lnR>
-                    <a:lnT w="6350" cap="flat" cmpd="sng" algn="ctr">
-                      <a:solidFill>
-                        <a:srgbClr val="C9D5E6"/>
-                      </a:solidFill>
-                      <a:prstDash val="solid"/>
-                      <a:round/>
-                      <a:headEnd type="none" w="med" len="med"/>
-                      <a:tailEnd type="none" w="med" len="med"/>
-                    </a:lnT>
-                    <a:lnB w="6350" cap="flat" cmpd="sng" algn="ctr">
-                      <a:solidFill>
-                        <a:srgbClr val="C9D5E6"/>
-                      </a:solidFill>
-                      <a:prstDash val="solid"/>
-                      <a:round/>
-                      <a:headEnd type="none" w="med" len="med"/>
-                      <a:tailEnd type="none" w="med" len="med"/>
-                    </a:lnB>
-                  </a:tcPr>
-                </a:tc>
-                <a:tc>
-                  <a:txBody>
-                    <a:bodyPr/>
-                    <a:lstStyle/>
-                    <a:p>
-                      <a:pPr algn="ctr" indent="0" marL="0">
-                        <a:buNone/>
-                      </a:pPr>
-                      <a:r>
-                        <a:rPr lang="en-US" sz="850" b="1" dirty="0">
-                          <a:solidFill>
-                            <a:srgbClr val="8A3B12"/>
-                          </a:solidFill>
-                          <a:latin typeface="Meiryo" pitchFamily="34" charset="0"/>
-                          <a:ea typeface="Meiryo" pitchFamily="34" charset="-122"/>
-                          <a:cs typeface="Meiryo" pitchFamily="34" charset="-120"/>
-                        </a:rPr>
-                        <a:t>高</a:t>
-                      </a:r>
-                      <a:endParaRPr lang="en-US" sz="850" dirty="0">
-                        <a:latin typeface="Meiryo" charset="0"/>
-                        <a:ea typeface="Meiryo" charset="0"/>
-                        <a:cs typeface="Meiryo" charset="0"/>
-                      </a:endParaRPr>
-                    </a:p>
-                  </a:txBody>
-                  <a:tcPr marL="91440" marR="91440" marT="45720" marB="45720" anchor="ctr">
-                    <a:lnL w="6350" cap="flat" cmpd="sng" algn="ctr">
-                      <a:solidFill>
-                        <a:srgbClr val="C9D5E6"/>
-                      </a:solidFill>
-                      <a:prstDash val="solid"/>
-                      <a:round/>
-                      <a:headEnd type="none" w="med" len="med"/>
-                      <a:tailEnd type="none" w="med" len="med"/>
-                    </a:lnL>
-                    <a:lnR w="6350" cap="flat" cmpd="sng" algn="ctr">
-                      <a:solidFill>
-                        <a:srgbClr val="C9D5E6"/>
-                      </a:solidFill>
-                      <a:prstDash val="solid"/>
-                      <a:round/>
-                      <a:headEnd type="none" w="med" len="med"/>
-                      <a:tailEnd type="none" w="med" len="med"/>
-                    </a:lnR>
-                    <a:lnT w="6350" cap="flat" cmpd="sng" algn="ctr">
-                      <a:solidFill>
-                        <a:srgbClr val="C9D5E6"/>
-                      </a:solidFill>
-                      <a:prstDash val="solid"/>
-                      <a:round/>
-                      <a:headEnd type="none" w="med" len="med"/>
-                      <a:tailEnd type="none" w="med" len="med"/>
-                    </a:lnT>
-                    <a:lnB w="6350" cap="flat" cmpd="sng" algn="ctr">
-                      <a:solidFill>
-                        <a:srgbClr val="C9D5E6"/>
-                      </a:solidFill>
-                      <a:prstDash val="solid"/>
-                      <a:round/>
-                      <a:headEnd type="none" w="med" len="med"/>
-                      <a:tailEnd type="none" w="med" len="med"/>
-                    </a:lnB>
-                    <a:solidFill>
-                      <a:srgbClr val="F8CBAD"/>
-                    </a:solidFill>
-                  </a:tcPr>
-                </a:tc>
-              </a:tr>
-              <a:tr h="790303">
-                <a:tc>
-                  <a:txBody>
-                    <a:bodyPr/>
-                    <a:lstStyle/>
-                    <a:p>
-                      <a:pPr algn="ctr" indent="0" marL="0">
-                        <a:buNone/>
-                      </a:pPr>
-                      <a:r>
-                        <a:rPr lang="en-US" sz="800" b="1" dirty="0">
-                          <a:solidFill>
-                            <a:srgbClr val="000000"/>
-                          </a:solidFill>
-                          <a:latin typeface="Meiryo" pitchFamily="34" charset="0"/>
-                          <a:ea typeface="Meiryo" pitchFamily="34" charset="-122"/>
-                          <a:cs typeface="Meiryo" pitchFamily="34" charset="-120"/>
-                        </a:rPr>
-                        <a:t>H3-07</a:t>
-                      </a:r>
-                      <a:endParaRPr lang="en-US" sz="800" dirty="0">
-                        <a:latin typeface="Meiryo" charset="0"/>
-                        <a:ea typeface="Meiryo" charset="0"/>
-                        <a:cs typeface="Meiryo" charset="0"/>
-                      </a:endParaRPr>
-                    </a:p>
-                  </a:txBody>
-                  <a:tcPr marL="91440" marR="91440" marT="45720" marB="45720" anchor="ctr">
-                    <a:lnL w="6350" cap="flat" cmpd="sng" algn="ctr">
-                      <a:solidFill>
-                        <a:srgbClr val="C9D5E6"/>
-                      </a:solidFill>
-                      <a:prstDash val="solid"/>
-                      <a:round/>
-                      <a:headEnd type="none" w="med" len="med"/>
-                      <a:tailEnd type="none" w="med" len="med"/>
-                    </a:lnL>
-                    <a:lnR w="6350" cap="flat" cmpd="sng" algn="ctr">
-                      <a:solidFill>
-                        <a:srgbClr val="C9D5E6"/>
-                      </a:solidFill>
-                      <a:prstDash val="solid"/>
-                      <a:round/>
-                      <a:headEnd type="none" w="med" len="med"/>
-                      <a:tailEnd type="none" w="med" len="med"/>
-                    </a:lnR>
-                    <a:lnT w="6350" cap="flat" cmpd="sng" algn="ctr">
-                      <a:solidFill>
-                        <a:srgbClr val="C9D5E6"/>
-                      </a:solidFill>
-                      <a:prstDash val="solid"/>
-                      <a:round/>
-                      <a:headEnd type="none" w="med" len="med"/>
-                      <a:tailEnd type="none" w="med" len="med"/>
-                    </a:lnT>
-                    <a:lnB w="6350" cap="flat" cmpd="sng" algn="ctr">
-                      <a:solidFill>
-                        <a:srgbClr val="C9D5E6"/>
-                      </a:solidFill>
-                      <a:prstDash val="solid"/>
-                      <a:round/>
-                      <a:headEnd type="none" w="med" len="med"/>
-                      <a:tailEnd type="none" w="med" len="med"/>
-                    </a:lnB>
-                  </a:tcPr>
-                </a:tc>
-                <a:tc>
-                  <a:txBody>
-                    <a:bodyPr/>
-                    <a:lstStyle/>
-                    <a:p>
-                      <a:pPr indent="0" marL="0">
-                        <a:buNone/>
-                      </a:pPr>
-                      <a:r>
-                        <a:rPr lang="en-US" sz="730" dirty="0">
-                          <a:solidFill>
-                            <a:srgbClr val="000000"/>
-                          </a:solidFill>
-                          <a:latin typeface="Meiryo" pitchFamily="34" charset="0"/>
-                          <a:ea typeface="Meiryo" pitchFamily="34" charset="-122"/>
-                          <a:cs typeface="Meiryo" pitchFamily="34" charset="-120"/>
-                        </a:rPr>
-                        <a:t>メーター交換・契約変更時のデータ処理手順</a:t>
-                      </a:r>
-                      <a:endParaRPr lang="en-US" sz="730" dirty="0">
-                        <a:latin typeface="Meiryo" charset="0"/>
-                        <a:ea typeface="Meiryo" charset="0"/>
-                        <a:cs typeface="Meiryo" charset="0"/>
-                      </a:endParaRPr>
-                    </a:p>
-                  </a:txBody>
-                  <a:tcPr marL="91440" marR="91440" marT="45720" marB="45720" anchor="ctr">
-                    <a:lnL w="6350" cap="flat" cmpd="sng" algn="ctr">
-                      <a:solidFill>
-                        <a:srgbClr val="C9D5E6"/>
-                      </a:solidFill>
-                      <a:prstDash val="solid"/>
-                      <a:round/>
-                      <a:headEnd type="none" w="med" len="med"/>
-                      <a:tailEnd type="none" w="med" len="med"/>
-                    </a:lnL>
-                    <a:lnR w="6350" cap="flat" cmpd="sng" algn="ctr">
-                      <a:solidFill>
-                        <a:srgbClr val="C9D5E6"/>
-                      </a:solidFill>
-                      <a:prstDash val="solid"/>
-                      <a:round/>
-                      <a:headEnd type="none" w="med" len="med"/>
-                      <a:tailEnd type="none" w="med" len="med"/>
-                    </a:lnR>
-                    <a:lnT w="6350" cap="flat" cmpd="sng" algn="ctr">
-                      <a:solidFill>
-                        <a:srgbClr val="C9D5E6"/>
-                      </a:solidFill>
-                      <a:prstDash val="solid"/>
-                      <a:round/>
-                      <a:headEnd type="none" w="med" len="med"/>
-                      <a:tailEnd type="none" w="med" len="med"/>
-                    </a:lnT>
-                    <a:lnB w="6350" cap="flat" cmpd="sng" algn="ctr">
-                      <a:solidFill>
-                        <a:srgbClr val="C9D5E6"/>
-                      </a:solidFill>
-                      <a:prstDash val="solid"/>
-                      <a:round/>
-                      <a:headEnd type="none" w="med" len="med"/>
-                      <a:tailEnd type="none" w="med" len="med"/>
-                    </a:lnB>
-                  </a:tcPr>
-                </a:tc>
-                <a:tc>
-                  <a:txBody>
-                    <a:bodyPr/>
-                    <a:lstStyle/>
-                    <a:p>
-                      <a:pPr indent="0" marL="0">
-                        <a:buNone/>
-                      </a:pPr>
-                      <a:r>
-                        <a:rPr lang="en-US" sz="730" dirty="0">
-                          <a:solidFill>
-                            <a:srgbClr val="000000"/>
-                          </a:solidFill>
-                          <a:latin typeface="Meiryo" pitchFamily="34" charset="0"/>
-                          <a:ea typeface="Meiryo" pitchFamily="34" charset="-122"/>
-                          <a:cs typeface="Meiryo" pitchFamily="34" charset="-120"/>
-                        </a:rPr>
-                        <a:t>校正済みとして交換の影響を無視し削除</a:t>
-                      </a:r>
-                      <a:endParaRPr lang="en-US" sz="730" dirty="0">
-                        <a:latin typeface="Meiryo" charset="0"/>
-                        <a:ea typeface="Meiryo" charset="0"/>
-                        <a:cs typeface="Meiryo" charset="0"/>
-                      </a:endParaRPr>
-                    </a:p>
-                  </a:txBody>
-                  <a:tcPr marL="91440" marR="91440" marT="45720" marB="45720" anchor="ctr">
-                    <a:lnL w="6350" cap="flat" cmpd="sng" algn="ctr">
-                      <a:solidFill>
-                        <a:srgbClr val="C9D5E6"/>
-                      </a:solidFill>
-                      <a:prstDash val="solid"/>
-                      <a:round/>
-                      <a:headEnd type="none" w="med" len="med"/>
-                      <a:tailEnd type="none" w="med" len="med"/>
-                    </a:lnL>
-                    <a:lnR w="6350" cap="flat" cmpd="sng" algn="ctr">
-                      <a:solidFill>
-                        <a:srgbClr val="C9D5E6"/>
-                      </a:solidFill>
-                      <a:prstDash val="solid"/>
-                      <a:round/>
-                      <a:headEnd type="none" w="med" len="med"/>
-                      <a:tailEnd type="none" w="med" len="med"/>
-                    </a:lnR>
-                    <a:lnT w="6350" cap="flat" cmpd="sng" algn="ctr">
-                      <a:solidFill>
-                        <a:srgbClr val="C9D5E6"/>
-                      </a:solidFill>
-                      <a:prstDash val="solid"/>
-                      <a:round/>
-                      <a:headEnd type="none" w="med" len="med"/>
-                      <a:tailEnd type="none" w="med" len="med"/>
-                    </a:lnT>
-                    <a:lnB w="6350" cap="flat" cmpd="sng" algn="ctr">
-                      <a:solidFill>
-                        <a:srgbClr val="C9D5E6"/>
-                      </a:solidFill>
-                      <a:prstDash val="solid"/>
-                      <a:round/>
-                      <a:headEnd type="none" w="med" len="med"/>
-                      <a:tailEnd type="none" w="med" len="med"/>
-                    </a:lnB>
-                  </a:tcPr>
-                </a:tc>
-                <a:tc>
-                  <a:txBody>
-                    <a:bodyPr/>
-                    <a:lstStyle/>
-                    <a:p>
-                      <a:pPr algn="ctr" indent="0" marL="0">
-                        <a:buNone/>
-                      </a:pPr>
-                      <a:r>
-                        <a:rPr lang="en-US" sz="750" b="1" dirty="0">
-                          <a:solidFill>
-                            <a:srgbClr val="8A3B12"/>
-                          </a:solidFill>
-                          <a:latin typeface="Meiryo" pitchFamily="34" charset="0"/>
-                          <a:ea typeface="Meiryo" pitchFamily="34" charset="-122"/>
-                          <a:cs typeface="Meiryo" pitchFamily="34" charset="-120"/>
-                        </a:rPr>
-                        <a:t>根拠不明確</a:t>
-                      </a:r>
-                      <a:endParaRPr lang="en-US" sz="750" dirty="0">
-                        <a:latin typeface="Meiryo" charset="0"/>
-                        <a:ea typeface="Meiryo" charset="0"/>
-                        <a:cs typeface="Meiryo" charset="0"/>
-                      </a:endParaRPr>
-                    </a:p>
-                  </a:txBody>
-                  <a:tcPr marL="91440" marR="91440" marT="45720" marB="45720" anchor="ctr">
-                    <a:lnL w="6350" cap="flat" cmpd="sng" algn="ctr">
-                      <a:solidFill>
-                        <a:srgbClr val="C9D5E6"/>
-                      </a:solidFill>
-                      <a:prstDash val="solid"/>
-                      <a:round/>
-                      <a:headEnd type="none" w="med" len="med"/>
-                      <a:tailEnd type="none" w="med" len="med"/>
-                    </a:lnL>
-                    <a:lnR w="6350" cap="flat" cmpd="sng" algn="ctr">
-                      <a:solidFill>
-                        <a:srgbClr val="C9D5E6"/>
-                      </a:solidFill>
-                      <a:prstDash val="solid"/>
-                      <a:round/>
-                      <a:headEnd type="none" w="med" len="med"/>
-                      <a:tailEnd type="none" w="med" len="med"/>
-                    </a:lnR>
-                    <a:lnT w="6350" cap="flat" cmpd="sng" algn="ctr">
-                      <a:solidFill>
-                        <a:srgbClr val="C9D5E6"/>
-                      </a:solidFill>
-                      <a:prstDash val="solid"/>
-                      <a:round/>
-                      <a:headEnd type="none" w="med" len="med"/>
-                      <a:tailEnd type="none" w="med" len="med"/>
-                    </a:lnT>
-                    <a:lnB w="6350" cap="flat" cmpd="sng" algn="ctr">
-                      <a:solidFill>
-                        <a:srgbClr val="C9D5E6"/>
-                      </a:solidFill>
-                      <a:prstDash val="solid"/>
-                      <a:round/>
-                      <a:headEnd type="none" w="med" len="med"/>
-                      <a:tailEnd type="none" w="med" len="med"/>
-                    </a:lnB>
-                    <a:solidFill>
-                      <a:srgbClr val="F8CBAD"/>
-                    </a:solidFill>
-                  </a:tcPr>
-                </a:tc>
-                <a:tc>
-                  <a:txBody>
-                    <a:bodyPr/>
-                    <a:lstStyle/>
-                    <a:p>
-                      <a:pPr indent="0" marL="0">
-                        <a:buNone/>
-                      </a:pPr>
-                      <a:r>
-                        <a:rPr lang="en-US" sz="730" dirty="0">
-                          <a:solidFill>
-                            <a:srgbClr val="000000"/>
-                          </a:solidFill>
-                          <a:latin typeface="Meiryo" pitchFamily="34" charset="0"/>
-                          <a:ea typeface="Meiryo" pitchFamily="34" charset="-122"/>
-                          <a:cs typeface="Meiryo" pitchFamily="34" charset="-120"/>
-                        </a:rPr>
-                        <a:t>『影響を無視する』根拠が示されていない。頻度は低いが精度への影響は未確認</a:t>
-                      </a:r>
-                      <a:endParaRPr lang="en-US" sz="730" dirty="0">
-                        <a:latin typeface="Meiryo" charset="0"/>
-                        <a:ea typeface="Meiryo" charset="0"/>
-                        <a:cs typeface="Meiryo" charset="0"/>
-                      </a:endParaRPr>
-                    </a:p>
-                  </a:txBody>
-                  <a:tcPr marL="91440" marR="91440" marT="45720" marB="45720" anchor="ctr">
-                    <a:lnL w="6350" cap="flat" cmpd="sng" algn="ctr">
-                      <a:solidFill>
-                        <a:srgbClr val="C9D5E6"/>
-                      </a:solidFill>
-                      <a:prstDash val="solid"/>
-                      <a:round/>
-                      <a:headEnd type="none" w="med" len="med"/>
-                      <a:tailEnd type="none" w="med" len="med"/>
-                    </a:lnL>
-                    <a:lnR w="6350" cap="flat" cmpd="sng" algn="ctr">
-                      <a:solidFill>
-                        <a:srgbClr val="C9D5E6"/>
-                      </a:solidFill>
-                      <a:prstDash val="solid"/>
-                      <a:round/>
-                      <a:headEnd type="none" w="med" len="med"/>
-                      <a:tailEnd type="none" w="med" len="med"/>
-                    </a:lnR>
-                    <a:lnT w="6350" cap="flat" cmpd="sng" algn="ctr">
-                      <a:solidFill>
-                        <a:srgbClr val="C9D5E6"/>
-                      </a:solidFill>
-                      <a:prstDash val="solid"/>
-                      <a:round/>
-                      <a:headEnd type="none" w="med" len="med"/>
-                      <a:tailEnd type="none" w="med" len="med"/>
-                    </a:lnT>
-                    <a:lnB w="6350" cap="flat" cmpd="sng" algn="ctr">
-                      <a:solidFill>
-                        <a:srgbClr val="C9D5E6"/>
-                      </a:solidFill>
-                      <a:prstDash val="solid"/>
-                      <a:round/>
-                      <a:headEnd type="none" w="med" len="med"/>
-                      <a:tailEnd type="none" w="med" len="med"/>
-                    </a:lnB>
-                  </a:tcPr>
-                </a:tc>
-                <a:tc>
-                  <a:txBody>
-                    <a:bodyPr/>
-                    <a:lstStyle/>
-                    <a:p>
-                      <a:pPr algn="ctr" indent="0" marL="0">
-                        <a:buNone/>
-                      </a:pPr>
-                      <a:r>
-                        <a:rPr lang="en-US" sz="850" b="1" dirty="0">
-                          <a:solidFill>
-                            <a:srgbClr val="7A5B00"/>
-                          </a:solidFill>
-                          <a:latin typeface="Meiryo" pitchFamily="34" charset="0"/>
-                          <a:ea typeface="Meiryo" pitchFamily="34" charset="-122"/>
-                          <a:cs typeface="Meiryo" pitchFamily="34" charset="-120"/>
-                        </a:rPr>
-                        <a:t>中</a:t>
-                      </a:r>
-                      <a:endParaRPr lang="en-US" sz="850" dirty="0">
-                        <a:latin typeface="Meiryo" charset="0"/>
-                        <a:ea typeface="Meiryo" charset="0"/>
-                        <a:cs typeface="Meiryo" charset="0"/>
-                      </a:endParaRPr>
-                    </a:p>
-                  </a:txBody>
-                  <a:tcPr marL="91440" marR="91440" marT="45720" marB="45720" anchor="ctr">
-                    <a:lnL w="6350" cap="flat" cmpd="sng" algn="ctr">
-                      <a:solidFill>
-                        <a:srgbClr val="C9D5E6"/>
-                      </a:solidFill>
-                      <a:prstDash val="solid"/>
-                      <a:round/>
-                      <a:headEnd type="none" w="med" len="med"/>
-                      <a:tailEnd type="none" w="med" len="med"/>
-                    </a:lnL>
-                    <a:lnR w="6350" cap="flat" cmpd="sng" algn="ctr">
-                      <a:solidFill>
-                        <a:srgbClr val="C9D5E6"/>
-                      </a:solidFill>
-                      <a:prstDash val="solid"/>
-                      <a:round/>
-                      <a:headEnd type="none" w="med" len="med"/>
-                      <a:tailEnd type="none" w="med" len="med"/>
-                    </a:lnR>
-                    <a:lnT w="6350" cap="flat" cmpd="sng" algn="ctr">
-                      <a:solidFill>
-                        <a:srgbClr val="C9D5E6"/>
-                      </a:solidFill>
-                      <a:prstDash val="solid"/>
-                      <a:round/>
-                      <a:headEnd type="none" w="med" len="med"/>
-                      <a:tailEnd type="none" w="med" len="med"/>
-                    </a:lnT>
-                    <a:lnB w="6350" cap="flat" cmpd="sng" algn="ctr">
-                      <a:solidFill>
-                        <a:srgbClr val="C9D5E6"/>
-                      </a:solidFill>
-                      <a:prstDash val="solid"/>
-                      <a:round/>
-                      <a:headEnd type="none" w="med" len="med"/>
-                      <a:tailEnd type="none" w="med" len="med"/>
-                    </a:lnB>
-                    <a:solidFill>
-                      <a:srgbClr val="FFE699"/>
-                    </a:solidFill>
-                  </a:tcPr>
-                </a:tc>
-              </a:tr>
-              <a:tr h="790303">
-                <a:tc>
-                  <a:txBody>
-                    <a:bodyPr/>
-                    <a:lstStyle/>
-                    <a:p>
-                      <a:pPr algn="ctr" indent="0" marL="0">
-                        <a:buNone/>
-                      </a:pPr>
-                      <a:r>
-                        <a:rPr lang="en-US" sz="800" b="1" dirty="0">
-                          <a:solidFill>
-                            <a:srgbClr val="000000"/>
-                          </a:solidFill>
-                          <a:latin typeface="Meiryo" pitchFamily="34" charset="0"/>
-                          <a:ea typeface="Meiryo" pitchFamily="34" charset="-122"/>
-                          <a:cs typeface="Meiryo" pitchFamily="34" charset="-120"/>
-                        </a:rPr>
-                        <a:t>H7-05</a:t>
-                      </a:r>
-                      <a:endParaRPr lang="en-US" sz="800" dirty="0">
-                        <a:latin typeface="Meiryo" charset="0"/>
-                        <a:ea typeface="Meiryo" charset="0"/>
-                        <a:cs typeface="Meiryo" charset="0"/>
-                      </a:endParaRPr>
-                    </a:p>
-                  </a:txBody>
-                  <a:tcPr marL="91440" marR="91440" marT="45720" marB="45720" anchor="ctr">
-                    <a:lnL w="6350" cap="flat" cmpd="sng" algn="ctr">
-                      <a:solidFill>
-                        <a:srgbClr val="C9D5E6"/>
-                      </a:solidFill>
-                      <a:prstDash val="solid"/>
-                      <a:round/>
-                      <a:headEnd type="none" w="med" len="med"/>
-                      <a:tailEnd type="none" w="med" len="med"/>
-                    </a:lnL>
-                    <a:lnR w="6350" cap="flat" cmpd="sng" algn="ctr">
-                      <a:solidFill>
-                        <a:srgbClr val="C9D5E6"/>
-                      </a:solidFill>
-                      <a:prstDash val="solid"/>
-                      <a:round/>
-                      <a:headEnd type="none" w="med" len="med"/>
-                      <a:tailEnd type="none" w="med" len="med"/>
-                    </a:lnR>
-                    <a:lnT w="6350" cap="flat" cmpd="sng" algn="ctr">
-                      <a:solidFill>
-                        <a:srgbClr val="C9D5E6"/>
-                      </a:solidFill>
-                      <a:prstDash val="solid"/>
-                      <a:round/>
-                      <a:headEnd type="none" w="med" len="med"/>
-                      <a:tailEnd type="none" w="med" len="med"/>
-                    </a:lnT>
-                    <a:lnB w="6350" cap="flat" cmpd="sng" algn="ctr">
-                      <a:solidFill>
-                        <a:srgbClr val="C9D5E6"/>
-                      </a:solidFill>
-                      <a:prstDash val="solid"/>
-                      <a:round/>
-                      <a:headEnd type="none" w="med" len="med"/>
-                      <a:tailEnd type="none" w="med" len="med"/>
-                    </a:lnB>
-                  </a:tcPr>
-                </a:tc>
-                <a:tc>
-                  <a:txBody>
-                    <a:bodyPr/>
-                    <a:lstStyle/>
-                    <a:p>
-                      <a:pPr indent="0" marL="0">
-                        <a:buNone/>
-                      </a:pPr>
-                      <a:r>
-                        <a:rPr lang="en-US" sz="730" dirty="0">
-                          <a:solidFill>
-                            <a:srgbClr val="000000"/>
-                          </a:solidFill>
-                          <a:latin typeface="Meiryo" pitchFamily="34" charset="0"/>
-                          <a:ea typeface="Meiryo" pitchFamily="34" charset="-122"/>
-                          <a:cs typeface="Meiryo" pitchFamily="34" charset="-120"/>
-                        </a:rPr>
-                        <a:t>過去に定着しなかったシステムとその理由</a:t>
-                      </a:r>
-                      <a:endParaRPr lang="en-US" sz="730" dirty="0">
-                        <a:latin typeface="Meiryo" charset="0"/>
-                        <a:ea typeface="Meiryo" charset="0"/>
-                        <a:cs typeface="Meiryo" charset="0"/>
-                      </a:endParaRPr>
-                    </a:p>
-                  </a:txBody>
-                  <a:tcPr marL="91440" marR="91440" marT="45720" marB="45720" anchor="ctr">
-                    <a:lnL w="6350" cap="flat" cmpd="sng" algn="ctr">
-                      <a:solidFill>
-                        <a:srgbClr val="C9D5E6"/>
-                      </a:solidFill>
-                      <a:prstDash val="solid"/>
-                      <a:round/>
-                      <a:headEnd type="none" w="med" len="med"/>
-                      <a:tailEnd type="none" w="med" len="med"/>
-                    </a:lnL>
-                    <a:lnR w="6350" cap="flat" cmpd="sng" algn="ctr">
-                      <a:solidFill>
-                        <a:srgbClr val="C9D5E6"/>
-                      </a:solidFill>
-                      <a:prstDash val="solid"/>
-                      <a:round/>
-                      <a:headEnd type="none" w="med" len="med"/>
-                      <a:tailEnd type="none" w="med" len="med"/>
-                    </a:lnR>
-                    <a:lnT w="6350" cap="flat" cmpd="sng" algn="ctr">
-                      <a:solidFill>
-                        <a:srgbClr val="C9D5E6"/>
-                      </a:solidFill>
-                      <a:prstDash val="solid"/>
-                      <a:round/>
-                      <a:headEnd type="none" w="med" len="med"/>
-                      <a:tailEnd type="none" w="med" len="med"/>
-                    </a:lnT>
-                    <a:lnB w="6350" cap="flat" cmpd="sng" algn="ctr">
-                      <a:solidFill>
-                        <a:srgbClr val="C9D5E6"/>
-                      </a:solidFill>
-                      <a:prstDash val="solid"/>
-                      <a:round/>
-                      <a:headEnd type="none" w="med" len="med"/>
-                      <a:tailEnd type="none" w="med" len="med"/>
-                    </a:lnB>
-                  </a:tcPr>
-                </a:tc>
-                <a:tc>
-                  <a:txBody>
-                    <a:bodyPr/>
-                    <a:lstStyle/>
-                    <a:p>
-                      <a:pPr indent="0" marL="0">
-                        <a:buNone/>
-                      </a:pPr>
-                      <a:r>
-                        <a:rPr lang="en-US" sz="730" dirty="0">
-                          <a:solidFill>
-                            <a:srgbClr val="000000"/>
-                          </a:solidFill>
-                          <a:latin typeface="Meiryo" pitchFamily="34" charset="0"/>
-                          <a:ea typeface="Meiryo" pitchFamily="34" charset="-122"/>
-                          <a:cs typeface="Meiryo" pitchFamily="34" charset="-120"/>
-                        </a:rPr>
-                        <a:t>ESG室の末武さんに確認する予定として削除</a:t>
-                      </a:r>
-                      <a:endParaRPr lang="en-US" sz="730" dirty="0">
-                        <a:latin typeface="Meiryo" charset="0"/>
-                        <a:ea typeface="Meiryo" charset="0"/>
-                        <a:cs typeface="Meiryo" charset="0"/>
-                      </a:endParaRPr>
-                    </a:p>
-                  </a:txBody>
-                  <a:tcPr marL="91440" marR="91440" marT="45720" marB="45720" anchor="ctr">
-                    <a:lnL w="6350" cap="flat" cmpd="sng" algn="ctr">
-                      <a:solidFill>
-                        <a:srgbClr val="C9D5E6"/>
-                      </a:solidFill>
-                      <a:prstDash val="solid"/>
-                      <a:round/>
-                      <a:headEnd type="none" w="med" len="med"/>
-                      <a:tailEnd type="none" w="med" len="med"/>
-                    </a:lnL>
-                    <a:lnR w="6350" cap="flat" cmpd="sng" algn="ctr">
-                      <a:solidFill>
-                        <a:srgbClr val="C9D5E6"/>
-                      </a:solidFill>
-                      <a:prstDash val="solid"/>
-                      <a:round/>
-                      <a:headEnd type="none" w="med" len="med"/>
-                      <a:tailEnd type="none" w="med" len="med"/>
-                    </a:lnR>
-                    <a:lnT w="6350" cap="flat" cmpd="sng" algn="ctr">
-                      <a:solidFill>
-                        <a:srgbClr val="C9D5E6"/>
-                      </a:solidFill>
-                      <a:prstDash val="solid"/>
-                      <a:round/>
-                      <a:headEnd type="none" w="med" len="med"/>
-                      <a:tailEnd type="none" w="med" len="med"/>
-                    </a:lnT>
-                    <a:lnB w="6350" cap="flat" cmpd="sng" algn="ctr">
-                      <a:solidFill>
-                        <a:srgbClr val="C9D5E6"/>
-                      </a:solidFill>
-                      <a:prstDash val="solid"/>
-                      <a:round/>
-                      <a:headEnd type="none" w="med" len="med"/>
-                      <a:tailEnd type="none" w="med" len="med"/>
-                    </a:lnB>
-                  </a:tcPr>
-                </a:tc>
-                <a:tc>
-                  <a:txBody>
-                    <a:bodyPr/>
-                    <a:lstStyle/>
-                    <a:p>
-                      <a:pPr algn="ctr" indent="0" marL="0">
-                        <a:buNone/>
-                      </a:pPr>
-                      <a:r>
-                        <a:rPr lang="en-US" sz="750" b="1" dirty="0">
-                          <a:solidFill>
-                            <a:srgbClr val="7A5B00"/>
-                          </a:solidFill>
-                          <a:latin typeface="Meiryo" pitchFamily="34" charset="0"/>
-                          <a:ea typeface="Meiryo" pitchFamily="34" charset="-122"/>
-                          <a:cs typeface="Meiryo" pitchFamily="34" charset="-120"/>
-                        </a:rPr>
-                        <a:t>対応未完了</a:t>
-                      </a:r>
-                      <a:endParaRPr lang="en-US" sz="750" dirty="0">
-                        <a:latin typeface="Meiryo" charset="0"/>
-                        <a:ea typeface="Meiryo" charset="0"/>
-                        <a:cs typeface="Meiryo" charset="0"/>
-                      </a:endParaRPr>
-                    </a:p>
-                  </a:txBody>
-                  <a:tcPr marL="91440" marR="91440" marT="45720" marB="45720" anchor="ctr">
-                    <a:lnL w="6350" cap="flat" cmpd="sng" algn="ctr">
-                      <a:solidFill>
-                        <a:srgbClr val="C9D5E6"/>
-                      </a:solidFill>
-                      <a:prstDash val="solid"/>
-                      <a:round/>
-                      <a:headEnd type="none" w="med" len="med"/>
-                      <a:tailEnd type="none" w="med" len="med"/>
-                    </a:lnL>
-                    <a:lnR w="6350" cap="flat" cmpd="sng" algn="ctr">
-                      <a:solidFill>
-                        <a:srgbClr val="C9D5E6"/>
-                      </a:solidFill>
-                      <a:prstDash val="solid"/>
-                      <a:round/>
-                      <a:headEnd type="none" w="med" len="med"/>
-                      <a:tailEnd type="none" w="med" len="med"/>
-                    </a:lnR>
-                    <a:lnT w="6350" cap="flat" cmpd="sng" algn="ctr">
-                      <a:solidFill>
-                        <a:srgbClr val="C9D5E6"/>
-                      </a:solidFill>
-                      <a:prstDash val="solid"/>
-                      <a:round/>
-                      <a:headEnd type="none" w="med" len="med"/>
-                      <a:tailEnd type="none" w="med" len="med"/>
-                    </a:lnT>
-                    <a:lnB w="6350" cap="flat" cmpd="sng" algn="ctr">
-                      <a:solidFill>
-                        <a:srgbClr val="C9D5E6"/>
-                      </a:solidFill>
-                      <a:prstDash val="solid"/>
-                      <a:round/>
-                      <a:headEnd type="none" w="med" len="med"/>
-                      <a:tailEnd type="none" w="med" len="med"/>
-                    </a:lnB>
-                    <a:solidFill>
-                      <a:srgbClr val="FFE699"/>
-                    </a:solidFill>
-                  </a:tcPr>
-                </a:tc>
-                <a:tc>
-                  <a:txBody>
-                    <a:bodyPr/>
-                    <a:lstStyle/>
-                    <a:p>
-                      <a:pPr indent="0" marL="0">
-                        <a:buNone/>
-                      </a:pPr>
-                      <a:r>
-                        <a:rPr lang="en-US" sz="730" dirty="0">
-                          <a:solidFill>
-                            <a:srgbClr val="000000"/>
-                          </a:solidFill>
-                          <a:latin typeface="Meiryo" pitchFamily="34" charset="0"/>
-                          <a:ea typeface="Meiryo" pitchFamily="34" charset="-122"/>
-                          <a:cs typeface="Meiryo" pitchFamily="34" charset="-120"/>
-                        </a:rPr>
-                        <a:t>『確認する』は未完了のToDo。定着リスクの最重要インプットであり実施状況の確認を要する</a:t>
-                      </a:r>
-                      <a:endParaRPr lang="en-US" sz="730" dirty="0">
-                        <a:latin typeface="Meiryo" charset="0"/>
-                        <a:ea typeface="Meiryo" charset="0"/>
-                        <a:cs typeface="Meiryo" charset="0"/>
-                      </a:endParaRPr>
-                    </a:p>
-                  </a:txBody>
-                  <a:tcPr marL="91440" marR="91440" marT="45720" marB="45720" anchor="ctr">
-                    <a:lnL w="6350" cap="flat" cmpd="sng" algn="ctr">
-                      <a:solidFill>
-                        <a:srgbClr val="C9D5E6"/>
-                      </a:solidFill>
-                      <a:prstDash val="solid"/>
-                      <a:round/>
-                      <a:headEnd type="none" w="med" len="med"/>
-                      <a:tailEnd type="none" w="med" len="med"/>
-                    </a:lnL>
-                    <a:lnR w="6350" cap="flat" cmpd="sng" algn="ctr">
-                      <a:solidFill>
-                        <a:srgbClr val="C9D5E6"/>
-                      </a:solidFill>
-                      <a:prstDash val="solid"/>
-                      <a:round/>
-                      <a:headEnd type="none" w="med" len="med"/>
-                      <a:tailEnd type="none" w="med" len="med"/>
-                    </a:lnR>
-                    <a:lnT w="6350" cap="flat" cmpd="sng" algn="ctr">
-                      <a:solidFill>
-                        <a:srgbClr val="C9D5E6"/>
-                      </a:solidFill>
-                      <a:prstDash val="solid"/>
-                      <a:round/>
-                      <a:headEnd type="none" w="med" len="med"/>
-                      <a:tailEnd type="none" w="med" len="med"/>
-                    </a:lnT>
-                    <a:lnB w="6350" cap="flat" cmpd="sng" algn="ctr">
-                      <a:solidFill>
-                        <a:srgbClr val="C9D5E6"/>
-                      </a:solidFill>
-                      <a:prstDash val="solid"/>
-                      <a:round/>
-                      <a:headEnd type="none" w="med" len="med"/>
-                      <a:tailEnd type="none" w="med" len="med"/>
-                    </a:lnB>
-                  </a:tcPr>
-                </a:tc>
-                <a:tc>
-                  <a:txBody>
-                    <a:bodyPr/>
-                    <a:lstStyle/>
-                    <a:p>
-                      <a:pPr algn="ctr" indent="0" marL="0">
-                        <a:buNone/>
-                      </a:pPr>
-                      <a:r>
-                        <a:rPr lang="en-US" sz="850" b="1" dirty="0">
-                          <a:solidFill>
-                            <a:srgbClr val="8A3B12"/>
-                          </a:solidFill>
-                          <a:latin typeface="Meiryo" pitchFamily="34" charset="0"/>
-                          <a:ea typeface="Meiryo" pitchFamily="34" charset="-122"/>
-                          <a:cs typeface="Meiryo" pitchFamily="34" charset="-120"/>
-                        </a:rPr>
-                        <a:t>高</a:t>
-                      </a:r>
-                      <a:endParaRPr lang="en-US" sz="850" dirty="0">
-                        <a:latin typeface="Meiryo" charset="0"/>
-                        <a:ea typeface="Meiryo" charset="0"/>
-                        <a:cs typeface="Meiryo" charset="0"/>
-                      </a:endParaRPr>
-                    </a:p>
-                  </a:txBody>
-                  <a:tcPr marL="91440" marR="91440" marT="45720" marB="45720" anchor="ctr">
-                    <a:lnL w="6350" cap="flat" cmpd="sng" algn="ctr">
-                      <a:solidFill>
-                        <a:srgbClr val="C9D5E6"/>
-                      </a:solidFill>
-                      <a:prstDash val="solid"/>
-                      <a:round/>
-                      <a:headEnd type="none" w="med" len="med"/>
-                      <a:tailEnd type="none" w="med" len="med"/>
-                    </a:lnL>
-                    <a:lnR w="6350" cap="flat" cmpd="sng" algn="ctr">
-                      <a:solidFill>
-                        <a:srgbClr val="C9D5E6"/>
-                      </a:solidFill>
-                      <a:prstDash val="solid"/>
-                      <a:round/>
-                      <a:headEnd type="none" w="med" len="med"/>
-                      <a:tailEnd type="none" w="med" len="med"/>
-                    </a:lnR>
-                    <a:lnT w="6350" cap="flat" cmpd="sng" algn="ctr">
-                      <a:solidFill>
-                        <a:srgbClr val="C9D5E6"/>
-                      </a:solidFill>
-                      <a:prstDash val="solid"/>
-                      <a:round/>
-                      <a:headEnd type="none" w="med" len="med"/>
-                      <a:tailEnd type="none" w="med" len="med"/>
-                    </a:lnT>
-                    <a:lnB w="6350" cap="flat" cmpd="sng" algn="ctr">
-                      <a:solidFill>
-                        <a:srgbClr val="C9D5E6"/>
-                      </a:solidFill>
-                      <a:prstDash val="solid"/>
-                      <a:round/>
-                      <a:headEnd type="none" w="med" len="med"/>
-                      <a:tailEnd type="none" w="med" len="med"/>
-                    </a:lnB>
-                    <a:solidFill>
-                      <a:srgbClr val="F8CBAD"/>
-                    </a:solidFill>
-                  </a:tcPr>
-                </a:tc>
-              </a:tr>
-              <a:tr h="0">
-                <a:tc>
-                  <a:txBody>
-                    <a:bodyPr/>
-                    <a:lstStyle/>
-                    <a:p>
-                      <a:pPr algn="ctr" indent="0" marL="0">
-                        <a:buNone/>
-                      </a:pPr>
-                      <a:r>
-                        <a:rPr lang="en-US" sz="800" b="1" dirty="0">
-                          <a:solidFill>
-                            <a:srgbClr val="000000"/>
-                          </a:solidFill>
-                          <a:latin typeface="Meiryo" pitchFamily="34" charset="0"/>
-                          <a:ea typeface="Meiryo" pitchFamily="34" charset="-122"/>
-                          <a:cs typeface="Meiryo" pitchFamily="34" charset="-120"/>
-                        </a:rPr>
-                        <a:t>H9-08</a:t>
-                      </a:r>
-                      <a:endParaRPr lang="en-US" sz="800" dirty="0">
-                        <a:latin typeface="Meiryo" charset="0"/>
-                        <a:ea typeface="Meiryo" charset="0"/>
-                        <a:cs typeface="Meiryo" charset="0"/>
-                      </a:endParaRPr>
-                    </a:p>
-                  </a:txBody>
-                  <a:tcPr marL="91440" marR="91440" marT="45720" marB="45720" anchor="ctr">
-                    <a:lnL w="6350" cap="flat" cmpd="sng" algn="ctr">
-                      <a:solidFill>
-                        <a:srgbClr val="C9D5E6"/>
-                      </a:solidFill>
-                      <a:prstDash val="solid"/>
-                      <a:round/>
-                      <a:headEnd type="none" w="med" len="med"/>
-                      <a:tailEnd type="none" w="med" len="med"/>
-                    </a:lnL>
-                    <a:lnR w="6350" cap="flat" cmpd="sng" algn="ctr">
-                      <a:solidFill>
-                        <a:srgbClr val="C9D5E6"/>
-                      </a:solidFill>
-                      <a:prstDash val="solid"/>
-                      <a:round/>
-                      <a:headEnd type="none" w="med" len="med"/>
-                      <a:tailEnd type="none" w="med" len="med"/>
-                    </a:lnR>
-                    <a:lnT w="6350" cap="flat" cmpd="sng" algn="ctr">
-                      <a:solidFill>
-                        <a:srgbClr val="C9D5E6"/>
-                      </a:solidFill>
-                      <a:prstDash val="solid"/>
-                      <a:round/>
-                      <a:headEnd type="none" w="med" len="med"/>
-                      <a:tailEnd type="none" w="med" len="med"/>
-                    </a:lnT>
-                    <a:lnB w="6350" cap="flat" cmpd="sng" algn="ctr">
-                      <a:solidFill>
-                        <a:srgbClr val="C9D5E6"/>
-                      </a:solidFill>
-                      <a:prstDash val="solid"/>
-                      <a:round/>
-                      <a:headEnd type="none" w="med" len="med"/>
-                      <a:tailEnd type="none" w="med" len="med"/>
-                    </a:lnB>
-                  </a:tcPr>
-                </a:tc>
-                <a:tc>
-                  <a:txBody>
-                    <a:bodyPr/>
-                    <a:lstStyle/>
-                    <a:p>
-                      <a:pPr indent="0" marL="0">
-                        <a:buNone/>
-                      </a:pPr>
-                      <a:r>
-                        <a:rPr lang="en-US" sz="730" dirty="0">
-                          <a:solidFill>
-                            <a:srgbClr val="000000"/>
-                          </a:solidFill>
-                          <a:latin typeface="Meiryo" pitchFamily="34" charset="0"/>
-                          <a:ea typeface="Meiryo" pitchFamily="34" charset="-122"/>
-                          <a:cs typeface="Meiryo" pitchFamily="34" charset="-120"/>
-                        </a:rPr>
-                        <a:t>本社未報告の現地環境・安全データ</a:t>
-                      </a:r>
-                      <a:endParaRPr lang="en-US" sz="730" dirty="0">
-                        <a:latin typeface="Meiryo" charset="0"/>
-                        <a:ea typeface="Meiryo" charset="0"/>
-                        <a:cs typeface="Meiryo" charset="0"/>
-                      </a:endParaRPr>
-                    </a:p>
-                  </a:txBody>
-                  <a:tcPr marL="91440" marR="91440" marT="45720" marB="45720" anchor="ctr">
-                    <a:lnL w="6350" cap="flat" cmpd="sng" algn="ctr">
-                      <a:solidFill>
-                        <a:srgbClr val="C9D5E6"/>
-                      </a:solidFill>
-                      <a:prstDash val="solid"/>
-                      <a:round/>
-                      <a:headEnd type="none" w="med" len="med"/>
-                      <a:tailEnd type="none" w="med" len="med"/>
-                    </a:lnL>
-                    <a:lnR w="6350" cap="flat" cmpd="sng" algn="ctr">
-                      <a:solidFill>
-                        <a:srgbClr val="C9D5E6"/>
-                      </a:solidFill>
-                      <a:prstDash val="solid"/>
-                      <a:round/>
-                      <a:headEnd type="none" w="med" len="med"/>
-                      <a:tailEnd type="none" w="med" len="med"/>
-                    </a:lnR>
-                    <a:lnT w="6350" cap="flat" cmpd="sng" algn="ctr">
-                      <a:solidFill>
-                        <a:srgbClr val="C9D5E6"/>
-                      </a:solidFill>
-                      <a:prstDash val="solid"/>
-                      <a:round/>
-                      <a:headEnd type="none" w="med" len="med"/>
-                      <a:tailEnd type="none" w="med" len="med"/>
-                    </a:lnT>
-                    <a:lnB w="6350" cap="flat" cmpd="sng" algn="ctr">
-                      <a:solidFill>
-                        <a:srgbClr val="C9D5E6"/>
-                      </a:solidFill>
-                      <a:prstDash val="solid"/>
-                      <a:round/>
-                      <a:headEnd type="none" w="med" len="med"/>
-                      <a:tailEnd type="none" w="med" len="med"/>
-                    </a:lnB>
-                  </a:tcPr>
-                </a:tc>
-                <a:tc>
-                  <a:txBody>
-                    <a:bodyPr/>
-                    <a:lstStyle/>
-                    <a:p>
-                      <a:pPr indent="0" marL="0">
-                        <a:buNone/>
-                      </a:pPr>
-                      <a:r>
-                        <a:rPr lang="en-US" sz="730" dirty="0">
-                          <a:solidFill>
-                            <a:srgbClr val="000000"/>
-                          </a:solidFill>
-                          <a:latin typeface="Meiryo" pitchFamily="34" charset="0"/>
-                          <a:ea typeface="Meiryo" pitchFamily="34" charset="-122"/>
-                          <a:cs typeface="Meiryo" pitchFamily="34" charset="-120"/>
-                        </a:rPr>
-                        <a:t>本社チェックリストで補う方針に切替し削除</a:t>
-                      </a:r>
-                      <a:endParaRPr lang="en-US" sz="730" dirty="0">
-                        <a:latin typeface="Meiryo" charset="0"/>
-                        <a:ea typeface="Meiryo" charset="0"/>
-                        <a:cs typeface="Meiryo" charset="0"/>
-                      </a:endParaRPr>
-                    </a:p>
-                  </a:txBody>
-                  <a:tcPr marL="91440" marR="91440" marT="45720" marB="45720" anchor="ctr">
-                    <a:lnL w="6350" cap="flat" cmpd="sng" algn="ctr">
-                      <a:solidFill>
-                        <a:srgbClr val="C9D5E6"/>
-                      </a:solidFill>
-                      <a:prstDash val="solid"/>
-                      <a:round/>
-                      <a:headEnd type="none" w="med" len="med"/>
-                      <a:tailEnd type="none" w="med" len="med"/>
-                    </a:lnL>
-                    <a:lnR w="6350" cap="flat" cmpd="sng" algn="ctr">
-                      <a:solidFill>
-                        <a:srgbClr val="C9D5E6"/>
-                      </a:solidFill>
-                      <a:prstDash val="solid"/>
-                      <a:round/>
-                      <a:headEnd type="none" w="med" len="med"/>
-                      <a:tailEnd type="none" w="med" len="med"/>
-                    </a:lnR>
-                    <a:lnT w="6350" cap="flat" cmpd="sng" algn="ctr">
-                      <a:solidFill>
-                        <a:srgbClr val="C9D5E6"/>
-                      </a:solidFill>
-                      <a:prstDash val="solid"/>
-                      <a:round/>
-                      <a:headEnd type="none" w="med" len="med"/>
-                      <a:tailEnd type="none" w="med" len="med"/>
-                    </a:lnT>
-                    <a:lnB w="6350" cap="flat" cmpd="sng" algn="ctr">
-                      <a:solidFill>
-                        <a:srgbClr val="C9D5E6"/>
-                      </a:solidFill>
-                      <a:prstDash val="solid"/>
-                      <a:round/>
-                      <a:headEnd type="none" w="med" len="med"/>
-                      <a:tailEnd type="none" w="med" len="med"/>
-                    </a:lnB>
-                  </a:tcPr>
-                </a:tc>
-                <a:tc>
-                  <a:txBody>
-                    <a:bodyPr/>
-                    <a:lstStyle/>
-                    <a:p>
-                      <a:pPr algn="ctr" indent="0" marL="0">
-                        <a:buNone/>
-                      </a:pPr>
-                      <a:r>
-                        <a:rPr lang="en-US" sz="750" b="1" dirty="0">
-                          <a:solidFill>
-                            <a:srgbClr val="7A5B00"/>
-                          </a:solidFill>
-                          <a:latin typeface="Meiryo" pitchFamily="34" charset="0"/>
-                          <a:ea typeface="Meiryo" pitchFamily="34" charset="-122"/>
-                          <a:cs typeface="Meiryo" pitchFamily="34" charset="-120"/>
-                        </a:rPr>
-                        <a:t>リスク残存</a:t>
-                      </a:r>
-                      <a:endParaRPr lang="en-US" sz="750" dirty="0">
-                        <a:latin typeface="Meiryo" charset="0"/>
-                        <a:ea typeface="Meiryo" charset="0"/>
-                        <a:cs typeface="Meiryo" charset="0"/>
-                      </a:endParaRPr>
-                    </a:p>
-                  </a:txBody>
-                  <a:tcPr marL="91440" marR="91440" marT="45720" marB="45720" anchor="ctr">
-                    <a:lnL w="6350" cap="flat" cmpd="sng" algn="ctr">
-                      <a:solidFill>
-                        <a:srgbClr val="C9D5E6"/>
-                      </a:solidFill>
-                      <a:prstDash val="solid"/>
-                      <a:round/>
-                      <a:headEnd type="none" w="med" len="med"/>
-                      <a:tailEnd type="none" w="med" len="med"/>
-                    </a:lnL>
-                    <a:lnR w="6350" cap="flat" cmpd="sng" algn="ctr">
-                      <a:solidFill>
-                        <a:srgbClr val="C9D5E6"/>
-                      </a:solidFill>
-                      <a:prstDash val="solid"/>
-                      <a:round/>
-                      <a:headEnd type="none" w="med" len="med"/>
-                      <a:tailEnd type="none" w="med" len="med"/>
-                    </a:lnR>
-                    <a:lnT w="6350" cap="flat" cmpd="sng" algn="ctr">
-                      <a:solidFill>
-                        <a:srgbClr val="C9D5E6"/>
-                      </a:solidFill>
-                      <a:prstDash val="solid"/>
-                      <a:round/>
-                      <a:headEnd type="none" w="med" len="med"/>
-                      <a:tailEnd type="none" w="med" len="med"/>
-                    </a:lnT>
-                    <a:lnB w="6350" cap="flat" cmpd="sng" algn="ctr">
-                      <a:solidFill>
-                        <a:srgbClr val="C9D5E6"/>
-                      </a:solidFill>
-                      <a:prstDash val="solid"/>
-                      <a:round/>
-                      <a:headEnd type="none" w="med" len="med"/>
-                      <a:tailEnd type="none" w="med" len="med"/>
-                    </a:lnB>
-                    <a:solidFill>
-                      <a:srgbClr val="FFE699"/>
-                    </a:solidFill>
-                  </a:tcPr>
-                </a:tc>
-                <a:tc>
-                  <a:txBody>
-                    <a:bodyPr/>
-                    <a:lstStyle/>
-                    <a:p>
-                      <a:pPr indent="0" marL="0">
-                        <a:buNone/>
-                      </a:pPr>
-                      <a:r>
-                        <a:rPr lang="en-US" sz="730" dirty="0">
-                          <a:solidFill>
-                            <a:srgbClr val="000000"/>
-                          </a:solidFill>
-                          <a:latin typeface="Meiryo" pitchFamily="34" charset="0"/>
-                          <a:ea typeface="Meiryo" pitchFamily="34" charset="-122"/>
-                          <a:cs typeface="Meiryo" pitchFamily="34" charset="-120"/>
-                        </a:rPr>
-                        <a:t>H4-07と同根。本社チェックリストが全海外拠点の未報告データを洗い出せる網羅性は不透明</a:t>
+                        <a:t>安全網としていたC-06自体の削除判断に問題があると判明（海外BUが自前算定を証言）。前提の再検証が必要（ユーザー指摘により再分類）</a:t>
                       </a:r>
                       <a:endParaRPr lang="en-US" sz="730" dirty="0">
                         <a:latin typeface="Meiryo" charset="0"/>
@@ -17779,7 +18997,7 @@
                 <a:ea typeface="Meiryo" pitchFamily="34" charset="-122"/>
                 <a:cs typeface="Meiryo" pitchFamily="34" charset="-120"/>
               </a:rPr>
-              <a:t>付録｜削除に同意した51件</a:t>
+              <a:t>付録｜削除に同意した48件</a:t>
             </a:r>
             <a:endParaRPr lang="en-US" sz="2200" dirty="0"/>
           </a:p>
@@ -17891,7 +19109,7 @@
                 <a:gridCol w="3291840"/>
                 <a:gridCol w="4507992"/>
               </a:tblGrid>
-              <a:tr h="368808">
+              <a:tr h="395151">
                 <a:tc>
                   <a:txBody>
                     <a:bodyPr/>
@@ -18165,7 +19383,7 @@
                   </a:tcPr>
                 </a:tc>
               </a:tr>
-              <a:tr h="368808">
+              <a:tr h="395151">
                 <a:tc>
                   <a:txBody>
                     <a:bodyPr/>
@@ -18427,7 +19645,7 @@
                   </a:tcPr>
                 </a:tc>
               </a:tr>
-              <a:tr h="368808">
+              <a:tr h="395151">
                 <a:tc>
                   <a:txBody>
                     <a:bodyPr/>
@@ -18689,7 +19907,7 @@
                   </a:tcPr>
                 </a:tc>
               </a:tr>
-              <a:tr h="368808">
+              <a:tr h="395151">
                 <a:tc>
                   <a:txBody>
                     <a:bodyPr/>
@@ -18951,7 +20169,7 @@
                   </a:tcPr>
                 </a:tc>
               </a:tr>
-              <a:tr h="368808">
+              <a:tr h="395151">
                 <a:tc>
                   <a:txBody>
                     <a:bodyPr/>
@@ -19213,7 +20431,7 @@
                   </a:tcPr>
                 </a:tc>
               </a:tr>
-              <a:tr h="368808">
+              <a:tr h="395151">
                 <a:tc>
                   <a:txBody>
                     <a:bodyPr/>
@@ -19475,7 +20693,7 @@
                   </a:tcPr>
                 </a:tc>
               </a:tr>
-              <a:tr h="368808">
+              <a:tr h="395151">
                 <a:tc>
                   <a:txBody>
                     <a:bodyPr/>
@@ -19737,7 +20955,7 @@
                   </a:tcPr>
                 </a:tc>
               </a:tr>
-              <a:tr h="368808">
+              <a:tr h="395151">
                 <a:tc>
                   <a:txBody>
                     <a:bodyPr/>
@@ -19999,7 +21217,7 @@
                   </a:tcPr>
                 </a:tc>
               </a:tr>
-              <a:tr h="368808">
+              <a:tr h="395151">
                 <a:tc>
                   <a:txBody>
                     <a:bodyPr/>
@@ -20261,7 +21479,7 @@
                   </a:tcPr>
                 </a:tc>
               </a:tr>
-              <a:tr h="368808">
+              <a:tr h="395151">
                 <a:tc>
                   <a:txBody>
                     <a:bodyPr/>
@@ -20523,7 +21741,7 @@
                   </a:tcPr>
                 </a:tc>
               </a:tr>
-              <a:tr h="368808">
+              <a:tr h="395151">
                 <a:tc>
                   <a:txBody>
                     <a:bodyPr/>
@@ -20785,7 +22003,7 @@
                   </a:tcPr>
                 </a:tc>
               </a:tr>
-              <a:tr h="368808">
+              <a:tr h="395151">
                 <a:tc>
                   <a:txBody>
                     <a:bodyPr/>
@@ -21047,7 +22265,7 @@
                   </a:tcPr>
                 </a:tc>
               </a:tr>
-              <a:tr h="368808">
+              <a:tr h="395151">
                 <a:tc>
                   <a:txBody>
                     <a:bodyPr/>
@@ -21309,269 +22527,7 @@
                   </a:tcPr>
                 </a:tc>
               </a:tr>
-              <a:tr h="368808">
-                <a:tc>
-                  <a:txBody>
-                    <a:bodyPr/>
-                    <a:lstStyle/>
-                    <a:p>
-                      <a:pPr algn="ctr" indent="0" marL="0">
-                        <a:buNone/>
-                      </a:pPr>
-                      <a:r>
-                        <a:rPr lang="en-US" sz="780" b="1" dirty="0">
-                          <a:solidFill>
-                            <a:srgbClr val="000000"/>
-                          </a:solidFill>
-                          <a:latin typeface="Meiryo" pitchFamily="34" charset="0"/>
-                          <a:ea typeface="Meiryo" pitchFamily="34" charset="-122"/>
-                          <a:cs typeface="Meiryo" pitchFamily="34" charset="-120"/>
-                        </a:rPr>
-                        <a:t>10-09</a:t>
-                      </a:r>
-                      <a:endParaRPr lang="en-US" sz="780" dirty="0">
-                        <a:latin typeface="Meiryo" charset="0"/>
-                        <a:ea typeface="Meiryo" charset="0"/>
-                        <a:cs typeface="Meiryo" charset="0"/>
-                      </a:endParaRPr>
-                    </a:p>
-                  </a:txBody>
-                  <a:tcPr marL="91440" marR="91440" marT="45720" marB="45720" anchor="ctr">
-                    <a:lnL w="6350" cap="flat" cmpd="sng" algn="ctr">
-                      <a:solidFill>
-                        <a:srgbClr val="C9D5E6"/>
-                      </a:solidFill>
-                      <a:prstDash val="solid"/>
-                      <a:round/>
-                      <a:headEnd type="none" w="med" len="med"/>
-                      <a:tailEnd type="none" w="med" len="med"/>
-                    </a:lnL>
-                    <a:lnR w="6350" cap="flat" cmpd="sng" algn="ctr">
-                      <a:solidFill>
-                        <a:srgbClr val="C9D5E6"/>
-                      </a:solidFill>
-                      <a:prstDash val="solid"/>
-                      <a:round/>
-                      <a:headEnd type="none" w="med" len="med"/>
-                      <a:tailEnd type="none" w="med" len="med"/>
-                    </a:lnR>
-                    <a:lnT w="6350" cap="flat" cmpd="sng" algn="ctr">
-                      <a:solidFill>
-                        <a:srgbClr val="C9D5E6"/>
-                      </a:solidFill>
-                      <a:prstDash val="solid"/>
-                      <a:round/>
-                      <a:headEnd type="none" w="med" len="med"/>
-                      <a:tailEnd type="none" w="med" len="med"/>
-                    </a:lnT>
-                    <a:lnB w="6350" cap="flat" cmpd="sng" algn="ctr">
-                      <a:solidFill>
-                        <a:srgbClr val="C9D5E6"/>
-                      </a:solidFill>
-                      <a:prstDash val="solid"/>
-                      <a:round/>
-                      <a:headEnd type="none" w="med" len="med"/>
-                      <a:tailEnd type="none" w="med" len="med"/>
-                    </a:lnB>
-                  </a:tcPr>
-                </a:tc>
-                <a:tc>
-                  <a:txBody>
-                    <a:bodyPr/>
-                    <a:lstStyle/>
-                    <a:p>
-                      <a:pPr indent="0" marL="0">
-                        <a:buNone/>
-                      </a:pPr>
-                      <a:r>
-                        <a:rPr lang="en-US" sz="760" dirty="0">
-                          <a:solidFill>
-                            <a:srgbClr val="000000"/>
-                          </a:solidFill>
-                          <a:latin typeface="Meiryo" pitchFamily="34" charset="0"/>
-                          <a:ea typeface="Meiryo" pitchFamily="34" charset="-122"/>
-                          <a:cs typeface="Meiryo" pitchFamily="34" charset="-120"/>
-                        </a:rPr>
-                        <a:t>再計算への不安</a:t>
-                      </a:r>
-                      <a:endParaRPr lang="en-US" sz="760" dirty="0">
-                        <a:latin typeface="Meiryo" charset="0"/>
-                        <a:ea typeface="Meiryo" charset="0"/>
-                        <a:cs typeface="Meiryo" charset="0"/>
-                      </a:endParaRPr>
-                    </a:p>
-                  </a:txBody>
-                  <a:tcPr marL="91440" marR="91440" marT="45720" marB="45720" anchor="ctr">
-                    <a:lnL w="6350" cap="flat" cmpd="sng" algn="ctr">
-                      <a:solidFill>
-                        <a:srgbClr val="C9D5E6"/>
-                      </a:solidFill>
-                      <a:prstDash val="solid"/>
-                      <a:round/>
-                      <a:headEnd type="none" w="med" len="med"/>
-                      <a:tailEnd type="none" w="med" len="med"/>
-                    </a:lnL>
-                    <a:lnR w="6350" cap="flat" cmpd="sng" algn="ctr">
-                      <a:solidFill>
-                        <a:srgbClr val="C9D5E6"/>
-                      </a:solidFill>
-                      <a:prstDash val="solid"/>
-                      <a:round/>
-                      <a:headEnd type="none" w="med" len="med"/>
-                      <a:tailEnd type="none" w="med" len="med"/>
-                    </a:lnR>
-                    <a:lnT w="6350" cap="flat" cmpd="sng" algn="ctr">
-                      <a:solidFill>
-                        <a:srgbClr val="C9D5E6"/>
-                      </a:solidFill>
-                      <a:prstDash val="solid"/>
-                      <a:round/>
-                      <a:headEnd type="none" w="med" len="med"/>
-                      <a:tailEnd type="none" w="med" len="med"/>
-                    </a:lnT>
-                    <a:lnB w="6350" cap="flat" cmpd="sng" algn="ctr">
-                      <a:solidFill>
-                        <a:srgbClr val="C9D5E6"/>
-                      </a:solidFill>
-                      <a:prstDash val="solid"/>
-                      <a:round/>
-                      <a:headEnd type="none" w="med" len="med"/>
-                      <a:tailEnd type="none" w="med" len="med"/>
-                    </a:lnB>
-                  </a:tcPr>
-                </a:tc>
-                <a:tc>
-                  <a:txBody>
-                    <a:bodyPr/>
-                    <a:lstStyle/>
-                    <a:p>
-                      <a:pPr indent="0" marL="0">
-                        <a:buNone/>
-                      </a:pPr>
-                      <a:r>
-                        <a:rPr lang="en-US" sz="760" dirty="0">
-                          <a:solidFill>
-                            <a:srgbClr val="000000"/>
-                          </a:solidFill>
-                          <a:latin typeface="Meiryo" pitchFamily="34" charset="0"/>
-                          <a:ea typeface="Meiryo" pitchFamily="34" charset="-122"/>
-                          <a:cs typeface="Meiryo" pitchFamily="34" charset="-120"/>
-                        </a:rPr>
-                        <a:t>拠点は計算していないため本社機能として設計</a:t>
-                      </a:r>
-                      <a:endParaRPr lang="en-US" sz="760" dirty="0">
-                        <a:latin typeface="Meiryo" charset="0"/>
-                        <a:ea typeface="Meiryo" charset="0"/>
-                        <a:cs typeface="Meiryo" charset="0"/>
-                      </a:endParaRPr>
-                    </a:p>
-                  </a:txBody>
-                  <a:tcPr marL="91440" marR="91440" marT="45720" marB="45720" anchor="ctr">
-                    <a:lnL w="6350" cap="flat" cmpd="sng" algn="ctr">
-                      <a:solidFill>
-                        <a:srgbClr val="C9D5E6"/>
-                      </a:solidFill>
-                      <a:prstDash val="solid"/>
-                      <a:round/>
-                      <a:headEnd type="none" w="med" len="med"/>
-                      <a:tailEnd type="none" w="med" len="med"/>
-                    </a:lnL>
-                    <a:lnR w="6350" cap="flat" cmpd="sng" algn="ctr">
-                      <a:solidFill>
-                        <a:srgbClr val="C9D5E6"/>
-                      </a:solidFill>
-                      <a:prstDash val="solid"/>
-                      <a:round/>
-                      <a:headEnd type="none" w="med" len="med"/>
-                      <a:tailEnd type="none" w="med" len="med"/>
-                    </a:lnR>
-                    <a:lnT w="6350" cap="flat" cmpd="sng" algn="ctr">
-                      <a:solidFill>
-                        <a:srgbClr val="C9D5E6"/>
-                      </a:solidFill>
-                      <a:prstDash val="solid"/>
-                      <a:round/>
-                      <a:headEnd type="none" w="med" len="med"/>
-                      <a:tailEnd type="none" w="med" len="med"/>
-                    </a:lnT>
-                    <a:lnB w="6350" cap="flat" cmpd="sng" algn="ctr">
-                      <a:solidFill>
-                        <a:srgbClr val="C9D5E6"/>
-                      </a:solidFill>
-                      <a:prstDash val="solid"/>
-                      <a:round/>
-                      <a:headEnd type="none" w="med" len="med"/>
-                      <a:tailEnd type="none" w="med" len="med"/>
-                    </a:lnB>
-                  </a:tcPr>
-                </a:tc>
-                <a:tc>
-                  <a:txBody>
-                    <a:bodyPr/>
-                    <a:lstStyle/>
-                    <a:p>
-                      <a:pPr indent="0" marL="0">
-                        <a:buNone/>
-                      </a:pPr>
-                      <a:r>
-                        <a:rPr lang="en-US" sz="760" dirty="0">
-                          <a:solidFill>
-                            <a:srgbClr val="6B7280"/>
-                          </a:solidFill>
-                          <a:latin typeface="Meiryo" pitchFamily="34" charset="0"/>
-                          <a:ea typeface="Meiryo" pitchFamily="34" charset="-122"/>
-                          <a:cs typeface="Meiryo" pitchFamily="34" charset="-120"/>
-                        </a:rPr>
-                        <a:t>C-06が引き続き生きた設問として安全網になる</a:t>
-                      </a:r>
-                      <a:endParaRPr lang="en-US" sz="760" dirty="0">
-                        <a:latin typeface="Meiryo" charset="0"/>
-                        <a:ea typeface="Meiryo" charset="0"/>
-                        <a:cs typeface="Meiryo" charset="0"/>
-                      </a:endParaRPr>
-                    </a:p>
-                  </a:txBody>
-                  <a:tcPr marL="91440" marR="91440" marT="45720" marB="45720" anchor="ctr">
-                    <a:lnL w="6350" cap="flat" cmpd="sng" algn="ctr">
-                      <a:solidFill>
-                        <a:srgbClr val="C9D5E6"/>
-                      </a:solidFill>
-                      <a:prstDash val="solid"/>
-                      <a:round/>
-                      <a:headEnd type="none" w="med" len="med"/>
-                      <a:tailEnd type="none" w="med" len="med"/>
-                    </a:lnL>
-                    <a:lnR w="6350" cap="flat" cmpd="sng" algn="ctr">
-                      <a:solidFill>
-                        <a:srgbClr val="C9D5E6"/>
-                      </a:solidFill>
-                      <a:prstDash val="solid"/>
-                      <a:round/>
-                      <a:headEnd type="none" w="med" len="med"/>
-                      <a:tailEnd type="none" w="med" len="med"/>
-                    </a:lnR>
-                    <a:lnT w="6350" cap="flat" cmpd="sng" algn="ctr">
-                      <a:solidFill>
-                        <a:srgbClr val="C9D5E6"/>
-                      </a:solidFill>
-                      <a:prstDash val="solid"/>
-                      <a:round/>
-                      <a:headEnd type="none" w="med" len="med"/>
-                      <a:tailEnd type="none" w="med" len="med"/>
-                    </a:lnT>
-                    <a:lnB w="6350" cap="flat" cmpd="sng" algn="ctr">
-                      <a:solidFill>
-                        <a:srgbClr val="C9D5E6"/>
-                      </a:solidFill>
-                      <a:prstDash val="solid"/>
-                      <a:round/>
-                      <a:headEnd type="none" w="med" len="med"/>
-                      <a:tailEnd type="none" w="med" len="med"/>
-                    </a:lnB>
-                  </a:tcPr>
-                </a:tc>
-              </a:tr>
-              <a:tr h="368808">
+              <a:tr h="395151">
                 <a:tc>
                   <a:txBody>
                     <a:bodyPr/>
@@ -22223,7 +23179,7 @@
                 <a:ea typeface="Meiryo" pitchFamily="34" charset="-122"/>
                 <a:cs typeface="Meiryo" pitchFamily="34" charset="-120"/>
               </a:rPr>
-              <a:t>付録｜削除に同意した51件</a:t>
+              <a:t>付録｜削除に同意した48件</a:t>
             </a:r>
             <a:endParaRPr lang="en-US" sz="2200" dirty="0"/>
           </a:p>
@@ -28501,7 +29457,7 @@
                 <a:ea typeface="Meiryo" pitchFamily="34" charset="-122"/>
                 <a:cs typeface="Meiryo" pitchFamily="34" charset="-120"/>
               </a:rPr>
-              <a:t>付録｜削除に同意した51件</a:t>
+              <a:t>付録｜削除に同意した48件</a:t>
             </a:r>
             <a:endParaRPr lang="en-US" sz="2200" dirty="0"/>
           </a:p>
@@ -28613,7 +29569,7 @@
                 <a:gridCol w="3291840"/>
                 <a:gridCol w="4507992"/>
               </a:tblGrid>
-              <a:tr h="395151">
+              <a:tr h="461010">
                 <a:tc>
                   <a:txBody>
                     <a:bodyPr/>
@@ -28887,7 +29843,7 @@
                   </a:tcPr>
                 </a:tc>
               </a:tr>
-              <a:tr h="395151">
+              <a:tr h="461010">
                 <a:tc>
                   <a:txBody>
                     <a:bodyPr/>
@@ -29149,7 +30105,7 @@
                   </a:tcPr>
                 </a:tc>
               </a:tr>
-              <a:tr h="395151">
+              <a:tr h="461010">
                 <a:tc>
                   <a:txBody>
                     <a:bodyPr/>
@@ -29411,7 +30367,7 @@
                   </a:tcPr>
                 </a:tc>
               </a:tr>
-              <a:tr h="395151">
+              <a:tr h="461010">
                 <a:tc>
                   <a:txBody>
                     <a:bodyPr/>
@@ -29673,7 +30629,7 @@
                   </a:tcPr>
                 </a:tc>
               </a:tr>
-              <a:tr h="395151">
+              <a:tr h="461010">
                 <a:tc>
                   <a:txBody>
                     <a:bodyPr/>
@@ -29691,7 +30647,7 @@
                           <a:ea typeface="Meiryo" pitchFamily="34" charset="-122"/>
                           <a:cs typeface="Meiryo" pitchFamily="34" charset="-120"/>
                         </a:rPr>
-                        <a:t>C-19</a:t>
+                        <a:t>C-20</a:t>
                       </a:r>
                       <a:endParaRPr lang="en-US" sz="780" dirty="0">
                         <a:latin typeface="Meiryo" charset="0"/>
@@ -29756,7 +30712,7 @@
                           <a:ea typeface="Meiryo" pitchFamily="34" charset="-122"/>
                           <a:cs typeface="Meiryo" pitchFamily="34" charset="-120"/>
                         </a:rPr>
-                        <a:t>多言語UI・現地サポートなしでの運用可否</a:t>
+                        <a:t>月次で最も時間がかかるステップ</a:t>
                       </a:r>
                       <a:endParaRPr lang="en-US" sz="760" dirty="0">
                         <a:latin typeface="Meiryo" charset="0"/>
@@ -29821,7 +30777,7 @@
                           <a:ea typeface="Meiryo" pitchFamily="34" charset="-122"/>
                           <a:cs typeface="Meiryo" pitchFamily="34" charset="-120"/>
                         </a:rPr>
-                        <a:t>多言語対応をRFPに含める前提で設計</a:t>
+                        <a:t>ステップ案をESG室へ確認する対応に切替</a:t>
                       </a:r>
                       <a:endParaRPr lang="en-US" sz="760" dirty="0">
                         <a:latin typeface="Meiryo" charset="0"/>
@@ -29886,6 +30842,268 @@
                           <a:ea typeface="Meiryo" pitchFamily="34" charset="-122"/>
                           <a:cs typeface="Meiryo" pitchFamily="34" charset="-120"/>
                         </a:rPr>
+                        <a:t>全拠点調査の代替として合理的</a:t>
+                      </a:r>
+                      <a:endParaRPr lang="en-US" sz="760" dirty="0">
+                        <a:latin typeface="Meiryo" charset="0"/>
+                        <a:ea typeface="Meiryo" charset="0"/>
+                        <a:cs typeface="Meiryo" charset="0"/>
+                      </a:endParaRPr>
+                    </a:p>
+                  </a:txBody>
+                  <a:tcPr marL="91440" marR="91440" marT="45720" marB="45720" anchor="ctr">
+                    <a:lnL w="6350" cap="flat" cmpd="sng" algn="ctr">
+                      <a:solidFill>
+                        <a:srgbClr val="C9D5E6"/>
+                      </a:solidFill>
+                      <a:prstDash val="solid"/>
+                      <a:round/>
+                      <a:headEnd type="none" w="med" len="med"/>
+                      <a:tailEnd type="none" w="med" len="med"/>
+                    </a:lnL>
+                    <a:lnR w="6350" cap="flat" cmpd="sng" algn="ctr">
+                      <a:solidFill>
+                        <a:srgbClr val="C9D5E6"/>
+                      </a:solidFill>
+                      <a:prstDash val="solid"/>
+                      <a:round/>
+                      <a:headEnd type="none" w="med" len="med"/>
+                      <a:tailEnd type="none" w="med" len="med"/>
+                    </a:lnR>
+                    <a:lnT w="6350" cap="flat" cmpd="sng" algn="ctr">
+                      <a:solidFill>
+                        <a:srgbClr val="C9D5E6"/>
+                      </a:solidFill>
+                      <a:prstDash val="solid"/>
+                      <a:round/>
+                      <a:headEnd type="none" w="med" len="med"/>
+                      <a:tailEnd type="none" w="med" len="med"/>
+                    </a:lnT>
+                    <a:lnB w="6350" cap="flat" cmpd="sng" algn="ctr">
+                      <a:solidFill>
+                        <a:srgbClr val="C9D5E6"/>
+                      </a:solidFill>
+                      <a:prstDash val="solid"/>
+                      <a:round/>
+                      <a:headEnd type="none" w="med" len="med"/>
+                      <a:tailEnd type="none" w="med" len="med"/>
+                    </a:lnB>
+                  </a:tcPr>
+                </a:tc>
+              </a:tr>
+              <a:tr h="461010">
+                <a:tc>
+                  <a:txBody>
+                    <a:bodyPr/>
+                    <a:lstStyle/>
+                    <a:p>
+                      <a:pPr algn="ctr" indent="0" marL="0">
+                        <a:buNone/>
+                      </a:pPr>
+                      <a:r>
+                        <a:rPr lang="en-US" sz="780" b="1" dirty="0">
+                          <a:solidFill>
+                            <a:srgbClr val="000000"/>
+                          </a:solidFill>
+                          <a:latin typeface="Meiryo" pitchFamily="34" charset="0"/>
+                          <a:ea typeface="Meiryo" pitchFamily="34" charset="-122"/>
+                          <a:cs typeface="Meiryo" pitchFamily="34" charset="-120"/>
+                        </a:rPr>
+                        <a:t>C-24</a:t>
+                      </a:r>
+                      <a:endParaRPr lang="en-US" sz="780" dirty="0">
+                        <a:latin typeface="Meiryo" charset="0"/>
+                        <a:ea typeface="Meiryo" charset="0"/>
+                        <a:cs typeface="Meiryo" charset="0"/>
+                      </a:endParaRPr>
+                    </a:p>
+                  </a:txBody>
+                  <a:tcPr marL="91440" marR="91440" marT="45720" marB="45720" anchor="ctr">
+                    <a:lnL w="6350" cap="flat" cmpd="sng" algn="ctr">
+                      <a:solidFill>
+                        <a:srgbClr val="C9D5E6"/>
+                      </a:solidFill>
+                      <a:prstDash val="solid"/>
+                      <a:round/>
+                      <a:headEnd type="none" w="med" len="med"/>
+                      <a:tailEnd type="none" w="med" len="med"/>
+                    </a:lnL>
+                    <a:lnR w="6350" cap="flat" cmpd="sng" algn="ctr">
+                      <a:solidFill>
+                        <a:srgbClr val="C9D5E6"/>
+                      </a:solidFill>
+                      <a:prstDash val="solid"/>
+                      <a:round/>
+                      <a:headEnd type="none" w="med" len="med"/>
+                      <a:tailEnd type="none" w="med" len="med"/>
+                    </a:lnR>
+                    <a:lnT w="6350" cap="flat" cmpd="sng" algn="ctr">
+                      <a:solidFill>
+                        <a:srgbClr val="C9D5E6"/>
+                      </a:solidFill>
+                      <a:prstDash val="solid"/>
+                      <a:round/>
+                      <a:headEnd type="none" w="med" len="med"/>
+                      <a:tailEnd type="none" w="med" len="med"/>
+                    </a:lnT>
+                    <a:lnB w="6350" cap="flat" cmpd="sng" algn="ctr">
+                      <a:solidFill>
+                        <a:srgbClr val="C9D5E6"/>
+                      </a:solidFill>
+                      <a:prstDash val="solid"/>
+                      <a:round/>
+                      <a:headEnd type="none" w="med" len="med"/>
+                      <a:tailEnd type="none" w="med" len="med"/>
+                    </a:lnB>
+                  </a:tcPr>
+                </a:tc>
+                <a:tc>
+                  <a:txBody>
+                    <a:bodyPr/>
+                    <a:lstStyle/>
+                    <a:p>
+                      <a:pPr indent="0" marL="0">
+                        <a:buNone/>
+                      </a:pPr>
+                      <a:r>
+                        <a:rPr lang="en-US" sz="760" dirty="0">
+                          <a:solidFill>
+                            <a:srgbClr val="000000"/>
+                          </a:solidFill>
+                          <a:latin typeface="Meiryo" pitchFamily="34" charset="0"/>
+                          <a:ea typeface="Meiryo" pitchFamily="34" charset="-122"/>
+                          <a:cs typeface="Meiryo" pitchFamily="34" charset="-120"/>
+                        </a:rPr>
+                        <a:t>過年度データの遡及修正経験</a:t>
+                      </a:r>
+                      <a:endParaRPr lang="en-US" sz="760" dirty="0">
+                        <a:latin typeface="Meiryo" charset="0"/>
+                        <a:ea typeface="Meiryo" charset="0"/>
+                        <a:cs typeface="Meiryo" charset="0"/>
+                      </a:endParaRPr>
+                    </a:p>
+                  </a:txBody>
+                  <a:tcPr marL="91440" marR="91440" marT="45720" marB="45720" anchor="ctr">
+                    <a:lnL w="6350" cap="flat" cmpd="sng" algn="ctr">
+                      <a:solidFill>
+                        <a:srgbClr val="C9D5E6"/>
+                      </a:solidFill>
+                      <a:prstDash val="solid"/>
+                      <a:round/>
+                      <a:headEnd type="none" w="med" len="med"/>
+                      <a:tailEnd type="none" w="med" len="med"/>
+                    </a:lnL>
+                    <a:lnR w="6350" cap="flat" cmpd="sng" algn="ctr">
+                      <a:solidFill>
+                        <a:srgbClr val="C9D5E6"/>
+                      </a:solidFill>
+                      <a:prstDash val="solid"/>
+                      <a:round/>
+                      <a:headEnd type="none" w="med" len="med"/>
+                      <a:tailEnd type="none" w="med" len="med"/>
+                    </a:lnR>
+                    <a:lnT w="6350" cap="flat" cmpd="sng" algn="ctr">
+                      <a:solidFill>
+                        <a:srgbClr val="C9D5E6"/>
+                      </a:solidFill>
+                      <a:prstDash val="solid"/>
+                      <a:round/>
+                      <a:headEnd type="none" w="med" len="med"/>
+                      <a:tailEnd type="none" w="med" len="med"/>
+                    </a:lnT>
+                    <a:lnB w="6350" cap="flat" cmpd="sng" algn="ctr">
+                      <a:solidFill>
+                        <a:srgbClr val="C9D5E6"/>
+                      </a:solidFill>
+                      <a:prstDash val="solid"/>
+                      <a:round/>
+                      <a:headEnd type="none" w="med" len="med"/>
+                      <a:tailEnd type="none" w="med" len="med"/>
+                    </a:lnB>
+                  </a:tcPr>
+                </a:tc>
+                <a:tc>
+                  <a:txBody>
+                    <a:bodyPr/>
+                    <a:lstStyle/>
+                    <a:p>
+                      <a:pPr indent="0" marL="0">
+                        <a:buNone/>
+                      </a:pPr>
+                      <a:r>
+                        <a:rPr lang="en-US" sz="760" dirty="0">
+                          <a:solidFill>
+                            <a:srgbClr val="000000"/>
+                          </a:solidFill>
+                          <a:latin typeface="Meiryo" pitchFamily="34" charset="0"/>
+                          <a:ea typeface="Meiryo" pitchFamily="34" charset="-122"/>
+                          <a:cs typeface="Meiryo" pitchFamily="34" charset="-120"/>
+                        </a:rPr>
+                        <a:t>過年度修正機能を要件に含める方向</a:t>
+                      </a:r>
+                      <a:endParaRPr lang="en-US" sz="760" dirty="0">
+                        <a:latin typeface="Meiryo" charset="0"/>
+                        <a:ea typeface="Meiryo" charset="0"/>
+                        <a:cs typeface="Meiryo" charset="0"/>
+                      </a:endParaRPr>
+                    </a:p>
+                  </a:txBody>
+                  <a:tcPr marL="91440" marR="91440" marT="45720" marB="45720" anchor="ctr">
+                    <a:lnL w="6350" cap="flat" cmpd="sng" algn="ctr">
+                      <a:solidFill>
+                        <a:srgbClr val="C9D5E6"/>
+                      </a:solidFill>
+                      <a:prstDash val="solid"/>
+                      <a:round/>
+                      <a:headEnd type="none" w="med" len="med"/>
+                      <a:tailEnd type="none" w="med" len="med"/>
+                    </a:lnL>
+                    <a:lnR w="6350" cap="flat" cmpd="sng" algn="ctr">
+                      <a:solidFill>
+                        <a:srgbClr val="C9D5E6"/>
+                      </a:solidFill>
+                      <a:prstDash val="solid"/>
+                      <a:round/>
+                      <a:headEnd type="none" w="med" len="med"/>
+                      <a:tailEnd type="none" w="med" len="med"/>
+                    </a:lnR>
+                    <a:lnT w="6350" cap="flat" cmpd="sng" algn="ctr">
+                      <a:solidFill>
+                        <a:srgbClr val="C9D5E6"/>
+                      </a:solidFill>
+                      <a:prstDash val="solid"/>
+                      <a:round/>
+                      <a:headEnd type="none" w="med" len="med"/>
+                      <a:tailEnd type="none" w="med" len="med"/>
+                    </a:lnT>
+                    <a:lnB w="6350" cap="flat" cmpd="sng" algn="ctr">
+                      <a:solidFill>
+                        <a:srgbClr val="C9D5E6"/>
+                      </a:solidFill>
+                      <a:prstDash val="solid"/>
+                      <a:round/>
+                      <a:headEnd type="none" w="med" len="med"/>
+                      <a:tailEnd type="none" w="med" len="med"/>
+                    </a:lnB>
+                  </a:tcPr>
+                </a:tc>
+                <a:tc>
+                  <a:txBody>
+                    <a:bodyPr/>
+                    <a:lstStyle/>
+                    <a:p>
+                      <a:pPr indent="0" marL="0">
+                        <a:buNone/>
+                      </a:pPr>
+                      <a:r>
+                        <a:rPr lang="en-US" sz="760" dirty="0">
+                          <a:solidFill>
+                            <a:srgbClr val="6B7280"/>
+                          </a:solidFill>
+                          <a:latin typeface="Meiryo" pitchFamily="34" charset="0"/>
+                          <a:ea typeface="Meiryo" pitchFamily="34" charset="-122"/>
+                          <a:cs typeface="Meiryo" pitchFamily="34" charset="-120"/>
+                        </a:rPr>
                         <a:t>機能を厚めに実装する対応で妥当</a:t>
                       </a:r>
                       <a:endParaRPr lang="en-US" sz="760" dirty="0">
@@ -29935,7 +31153,7 @@
                   </a:tcPr>
                 </a:tc>
               </a:tr>
-              <a:tr h="395151">
+              <a:tr h="461010">
                 <a:tc>
                   <a:txBody>
                     <a:bodyPr/>
@@ -29953,7 +31171,7 @@
                           <a:ea typeface="Meiryo" pitchFamily="34" charset="-122"/>
                           <a:cs typeface="Meiryo" pitchFamily="34" charset="-120"/>
                         </a:rPr>
-                        <a:t>C-20</a:t>
+                        <a:t>C-25</a:t>
                       </a:r>
                       <a:endParaRPr lang="en-US" sz="780" dirty="0">
                         <a:latin typeface="Meiryo" charset="0"/>
@@ -30018,7 +31236,7 @@
                           <a:ea typeface="Meiryo" pitchFamily="34" charset="-122"/>
                           <a:cs typeface="Meiryo" pitchFamily="34" charset="-120"/>
                         </a:rPr>
-                        <a:t>月次で最も時間がかかるステップ</a:t>
+                        <a:t>単位換算・按分の実施有無</a:t>
                       </a:r>
                       <a:endParaRPr lang="en-US" sz="760" dirty="0">
                         <a:latin typeface="Meiryo" charset="0"/>
@@ -30083,7 +31301,7 @@
                           <a:ea typeface="Meiryo" pitchFamily="34" charset="-122"/>
                           <a:cs typeface="Meiryo" pitchFamily="34" charset="-120"/>
                         </a:rPr>
-                        <a:t>ステップ案をESG室へ確認する対応に切替</a:t>
+                        <a:t>換算・按分をシステム側で行う基本方針</a:t>
                       </a:r>
                       <a:endParaRPr lang="en-US" sz="760" dirty="0">
                         <a:latin typeface="Meiryo" charset="0"/>
@@ -30148,7 +31366,7 @@
                           <a:ea typeface="Meiryo" pitchFamily="34" charset="-122"/>
                           <a:cs typeface="Meiryo" pitchFamily="34" charset="-120"/>
                         </a:rPr>
-                        <a:t>全拠点調査の代替として合理的</a:t>
+                        <a:t>機能を厚めに実装する対応で妥当</a:t>
                       </a:r>
                       <a:endParaRPr lang="en-US" sz="760" dirty="0">
                         <a:latin typeface="Meiryo" charset="0"/>
@@ -30197,7 +31415,7 @@
                   </a:tcPr>
                 </a:tc>
               </a:tr>
-              <a:tr h="395151">
+              <a:tr h="461010">
                 <a:tc>
                   <a:txBody>
                     <a:bodyPr/>
@@ -30215,7 +31433,7 @@
                           <a:ea typeface="Meiryo" pitchFamily="34" charset="-122"/>
                           <a:cs typeface="Meiryo" pitchFamily="34" charset="-120"/>
                         </a:rPr>
-                        <a:t>C-24</a:t>
+                        <a:t>C-36</a:t>
                       </a:r>
                       <a:endParaRPr lang="en-US" sz="780" dirty="0">
                         <a:latin typeface="Meiryo" charset="0"/>
@@ -30280,7 +31498,7 @@
                           <a:ea typeface="Meiryo" pitchFamily="34" charset="-122"/>
                           <a:cs typeface="Meiryo" pitchFamily="34" charset="-120"/>
                         </a:rPr>
-                        <a:t>過年度データの遡及修正経験</a:t>
+                        <a:t>電子承認の導入有無</a:t>
                       </a:r>
                       <a:endParaRPr lang="en-US" sz="760" dirty="0">
                         <a:latin typeface="Meiryo" charset="0"/>
@@ -30345,7 +31563,7 @@
                           <a:ea typeface="Meiryo" pitchFamily="34" charset="-122"/>
                           <a:cs typeface="Meiryo" pitchFamily="34" charset="-120"/>
                         </a:rPr>
-                        <a:t>過年度修正機能を要件に含める方向</a:t>
+                        <a:t>入力担当者向けでなくシステム担当者向けの技術確認事項として切り出し</a:t>
                       </a:r>
                       <a:endParaRPr lang="en-US" sz="760" dirty="0">
                         <a:latin typeface="Meiryo" charset="0"/>
@@ -30410,6 +31628,530 @@
                           <a:ea typeface="Meiryo" pitchFamily="34" charset="-122"/>
                           <a:cs typeface="Meiryo" pitchFamily="34" charset="-120"/>
                         </a:rPr>
+                        <a:t>質問対象の適正化として妥当</a:t>
+                      </a:r>
+                      <a:endParaRPr lang="en-US" sz="760" dirty="0">
+                        <a:latin typeface="Meiryo" charset="0"/>
+                        <a:ea typeface="Meiryo" charset="0"/>
+                        <a:cs typeface="Meiryo" charset="0"/>
+                      </a:endParaRPr>
+                    </a:p>
+                  </a:txBody>
+                  <a:tcPr marL="91440" marR="91440" marT="45720" marB="45720" anchor="ctr">
+                    <a:lnL w="6350" cap="flat" cmpd="sng" algn="ctr">
+                      <a:solidFill>
+                        <a:srgbClr val="C9D5E6"/>
+                      </a:solidFill>
+                      <a:prstDash val="solid"/>
+                      <a:round/>
+                      <a:headEnd type="none" w="med" len="med"/>
+                      <a:tailEnd type="none" w="med" len="med"/>
+                    </a:lnL>
+                    <a:lnR w="6350" cap="flat" cmpd="sng" algn="ctr">
+                      <a:solidFill>
+                        <a:srgbClr val="C9D5E6"/>
+                      </a:solidFill>
+                      <a:prstDash val="solid"/>
+                      <a:round/>
+                      <a:headEnd type="none" w="med" len="med"/>
+                      <a:tailEnd type="none" w="med" len="med"/>
+                    </a:lnR>
+                    <a:lnT w="6350" cap="flat" cmpd="sng" algn="ctr">
+                      <a:solidFill>
+                        <a:srgbClr val="C9D5E6"/>
+                      </a:solidFill>
+                      <a:prstDash val="solid"/>
+                      <a:round/>
+                      <a:headEnd type="none" w="med" len="med"/>
+                      <a:tailEnd type="none" w="med" len="med"/>
+                    </a:lnT>
+                    <a:lnB w="6350" cap="flat" cmpd="sng" algn="ctr">
+                      <a:solidFill>
+                        <a:srgbClr val="C9D5E6"/>
+                      </a:solidFill>
+                      <a:prstDash val="solid"/>
+                      <a:round/>
+                      <a:headEnd type="none" w="med" len="med"/>
+                      <a:tailEnd type="none" w="med" len="med"/>
+                    </a:lnB>
+                  </a:tcPr>
+                </a:tc>
+              </a:tr>
+              <a:tr h="461010">
+                <a:tc>
+                  <a:txBody>
+                    <a:bodyPr/>
+                    <a:lstStyle/>
+                    <a:p>
+                      <a:pPr algn="ctr" indent="0" marL="0">
+                        <a:buNone/>
+                      </a:pPr>
+                      <a:r>
+                        <a:rPr lang="en-US" sz="780" b="1" dirty="0">
+                          <a:solidFill>
+                            <a:srgbClr val="000000"/>
+                          </a:solidFill>
+                          <a:latin typeface="Meiryo" pitchFamily="34" charset="0"/>
+                          <a:ea typeface="Meiryo" pitchFamily="34" charset="-122"/>
+                          <a:cs typeface="Meiryo" pitchFamily="34" charset="-120"/>
+                        </a:rPr>
+                        <a:t>H5-05</a:t>
+                      </a:r>
+                      <a:endParaRPr lang="en-US" sz="780" dirty="0">
+                        <a:latin typeface="Meiryo" charset="0"/>
+                        <a:ea typeface="Meiryo" charset="0"/>
+                        <a:cs typeface="Meiryo" charset="0"/>
+                      </a:endParaRPr>
+                    </a:p>
+                  </a:txBody>
+                  <a:tcPr marL="91440" marR="91440" marT="45720" marB="45720" anchor="ctr">
+                    <a:lnL w="6350" cap="flat" cmpd="sng" algn="ctr">
+                      <a:solidFill>
+                        <a:srgbClr val="C9D5E6"/>
+                      </a:solidFill>
+                      <a:prstDash val="solid"/>
+                      <a:round/>
+                      <a:headEnd type="none" w="med" len="med"/>
+                      <a:tailEnd type="none" w="med" len="med"/>
+                    </a:lnL>
+                    <a:lnR w="6350" cap="flat" cmpd="sng" algn="ctr">
+                      <a:solidFill>
+                        <a:srgbClr val="C9D5E6"/>
+                      </a:solidFill>
+                      <a:prstDash val="solid"/>
+                      <a:round/>
+                      <a:headEnd type="none" w="med" len="med"/>
+                      <a:tailEnd type="none" w="med" len="med"/>
+                    </a:lnR>
+                    <a:lnT w="6350" cap="flat" cmpd="sng" algn="ctr">
+                      <a:solidFill>
+                        <a:srgbClr val="C9D5E6"/>
+                      </a:solidFill>
+                      <a:prstDash val="solid"/>
+                      <a:round/>
+                      <a:headEnd type="none" w="med" len="med"/>
+                      <a:tailEnd type="none" w="med" len="med"/>
+                    </a:lnT>
+                    <a:lnB w="6350" cap="flat" cmpd="sng" algn="ctr">
+                      <a:solidFill>
+                        <a:srgbClr val="C9D5E6"/>
+                      </a:solidFill>
+                      <a:prstDash val="solid"/>
+                      <a:round/>
+                      <a:headEnd type="none" w="med" len="med"/>
+                      <a:tailEnd type="none" w="med" len="med"/>
+                    </a:lnB>
+                  </a:tcPr>
+                </a:tc>
+                <a:tc>
+                  <a:txBody>
+                    <a:bodyPr/>
+                    <a:lstStyle/>
+                    <a:p>
+                      <a:pPr indent="0" marL="0">
+                        <a:buNone/>
+                      </a:pPr>
+                      <a:r>
+                        <a:rPr lang="en-US" sz="760" dirty="0">
+                          <a:solidFill>
+                            <a:srgbClr val="000000"/>
+                          </a:solidFill>
+                          <a:latin typeface="Meiryo" pitchFamily="34" charset="0"/>
+                          <a:ea typeface="Meiryo" pitchFamily="34" charset="-122"/>
+                          <a:cs typeface="Meiryo" pitchFamily="34" charset="-120"/>
+                        </a:rPr>
+                        <a:t>記録引継ぎの実態</a:t>
+                      </a:r>
+                      <a:endParaRPr lang="en-US" sz="760" dirty="0">
+                        <a:latin typeface="Meiryo" charset="0"/>
+                        <a:ea typeface="Meiryo" charset="0"/>
+                        <a:cs typeface="Meiryo" charset="0"/>
+                      </a:endParaRPr>
+                    </a:p>
+                  </a:txBody>
+                  <a:tcPr marL="91440" marR="91440" marT="45720" marB="45720" anchor="ctr">
+                    <a:lnL w="6350" cap="flat" cmpd="sng" algn="ctr">
+                      <a:solidFill>
+                        <a:srgbClr val="C9D5E6"/>
+                      </a:solidFill>
+                      <a:prstDash val="solid"/>
+                      <a:round/>
+                      <a:headEnd type="none" w="med" len="med"/>
+                      <a:tailEnd type="none" w="med" len="med"/>
+                    </a:lnL>
+                    <a:lnR w="6350" cap="flat" cmpd="sng" algn="ctr">
+                      <a:solidFill>
+                        <a:srgbClr val="C9D5E6"/>
+                      </a:solidFill>
+                      <a:prstDash val="solid"/>
+                      <a:round/>
+                      <a:headEnd type="none" w="med" len="med"/>
+                      <a:tailEnd type="none" w="med" len="med"/>
+                    </a:lnR>
+                    <a:lnT w="6350" cap="flat" cmpd="sng" algn="ctr">
+                      <a:solidFill>
+                        <a:srgbClr val="C9D5E6"/>
+                      </a:solidFill>
+                      <a:prstDash val="solid"/>
+                      <a:round/>
+                      <a:headEnd type="none" w="med" len="med"/>
+                      <a:tailEnd type="none" w="med" len="med"/>
+                    </a:lnT>
+                    <a:lnB w="6350" cap="flat" cmpd="sng" algn="ctr">
+                      <a:solidFill>
+                        <a:srgbClr val="C9D5E6"/>
+                      </a:solidFill>
+                      <a:prstDash val="solid"/>
+                      <a:round/>
+                      <a:headEnd type="none" w="med" len="med"/>
+                      <a:tailEnd type="none" w="med" len="med"/>
+                    </a:lnB>
+                  </a:tcPr>
+                </a:tc>
+                <a:tc>
+                  <a:txBody>
+                    <a:bodyPr/>
+                    <a:lstStyle/>
+                    <a:p>
+                      <a:pPr indent="0" marL="0">
+                        <a:buNone/>
+                      </a:pPr>
+                      <a:r>
+                        <a:rPr lang="en-US" sz="760" dirty="0">
+                          <a:solidFill>
+                            <a:srgbClr val="000000"/>
+                          </a:solidFill>
+                          <a:latin typeface="Meiryo" pitchFamily="34" charset="0"/>
+                          <a:ea typeface="Meiryo" pitchFamily="34" charset="-122"/>
+                          <a:cs typeface="Meiryo" pitchFamily="34" charset="-120"/>
+                        </a:rPr>
+                        <a:t>本社からデータ・証憑を明示する方式に切替</a:t>
+                      </a:r>
+                      <a:endParaRPr lang="en-US" sz="760" dirty="0">
+                        <a:latin typeface="Meiryo" charset="0"/>
+                        <a:ea typeface="Meiryo" charset="0"/>
+                        <a:cs typeface="Meiryo" charset="0"/>
+                      </a:endParaRPr>
+                    </a:p>
+                  </a:txBody>
+                  <a:tcPr marL="91440" marR="91440" marT="45720" marB="45720" anchor="ctr">
+                    <a:lnL w="6350" cap="flat" cmpd="sng" algn="ctr">
+                      <a:solidFill>
+                        <a:srgbClr val="C9D5E6"/>
+                      </a:solidFill>
+                      <a:prstDash val="solid"/>
+                      <a:round/>
+                      <a:headEnd type="none" w="med" len="med"/>
+                      <a:tailEnd type="none" w="med" len="med"/>
+                    </a:lnL>
+                    <a:lnR w="6350" cap="flat" cmpd="sng" algn="ctr">
+                      <a:solidFill>
+                        <a:srgbClr val="C9D5E6"/>
+                      </a:solidFill>
+                      <a:prstDash val="solid"/>
+                      <a:round/>
+                      <a:headEnd type="none" w="med" len="med"/>
+                      <a:tailEnd type="none" w="med" len="med"/>
+                    </a:lnR>
+                    <a:lnT w="6350" cap="flat" cmpd="sng" algn="ctr">
+                      <a:solidFill>
+                        <a:srgbClr val="C9D5E6"/>
+                      </a:solidFill>
+                      <a:prstDash val="solid"/>
+                      <a:round/>
+                      <a:headEnd type="none" w="med" len="med"/>
+                      <a:tailEnd type="none" w="med" len="med"/>
+                    </a:lnT>
+                    <a:lnB w="6350" cap="flat" cmpd="sng" algn="ctr">
+                      <a:solidFill>
+                        <a:srgbClr val="C9D5E6"/>
+                      </a:solidFill>
+                      <a:prstDash val="solid"/>
+                      <a:round/>
+                      <a:headEnd type="none" w="med" len="med"/>
+                      <a:tailEnd type="none" w="med" len="med"/>
+                    </a:lnB>
+                  </a:tcPr>
+                </a:tc>
+                <a:tc>
+                  <a:txBody>
+                    <a:bodyPr/>
+                    <a:lstStyle/>
+                    <a:p>
+                      <a:pPr indent="0" marL="0">
+                        <a:buNone/>
+                      </a:pPr>
+                      <a:r>
+                        <a:rPr lang="en-US" sz="760" dirty="0">
+                          <a:solidFill>
+                            <a:srgbClr val="6B7280"/>
+                          </a:solidFill>
+                          <a:latin typeface="Meiryo" pitchFamily="34" charset="0"/>
+                          <a:ea typeface="Meiryo" pitchFamily="34" charset="-122"/>
+                          <a:cs typeface="Meiryo" pitchFamily="34" charset="-120"/>
+                        </a:rPr>
+                        <a:t>別の仕組みで正面から対応し妥当</a:t>
+                      </a:r>
+                      <a:endParaRPr lang="en-US" sz="760" dirty="0">
+                        <a:latin typeface="Meiryo" charset="0"/>
+                        <a:ea typeface="Meiryo" charset="0"/>
+                        <a:cs typeface="Meiryo" charset="0"/>
+                      </a:endParaRPr>
+                    </a:p>
+                  </a:txBody>
+                  <a:tcPr marL="91440" marR="91440" marT="45720" marB="45720" anchor="ctr">
+                    <a:lnL w="6350" cap="flat" cmpd="sng" algn="ctr">
+                      <a:solidFill>
+                        <a:srgbClr val="C9D5E6"/>
+                      </a:solidFill>
+                      <a:prstDash val="solid"/>
+                      <a:round/>
+                      <a:headEnd type="none" w="med" len="med"/>
+                      <a:tailEnd type="none" w="med" len="med"/>
+                    </a:lnL>
+                    <a:lnR w="6350" cap="flat" cmpd="sng" algn="ctr">
+                      <a:solidFill>
+                        <a:srgbClr val="C9D5E6"/>
+                      </a:solidFill>
+                      <a:prstDash val="solid"/>
+                      <a:round/>
+                      <a:headEnd type="none" w="med" len="med"/>
+                      <a:tailEnd type="none" w="med" len="med"/>
+                    </a:lnR>
+                    <a:lnT w="6350" cap="flat" cmpd="sng" algn="ctr">
+                      <a:solidFill>
+                        <a:srgbClr val="C9D5E6"/>
+                      </a:solidFill>
+                      <a:prstDash val="solid"/>
+                      <a:round/>
+                      <a:headEnd type="none" w="med" len="med"/>
+                      <a:tailEnd type="none" w="med" len="med"/>
+                    </a:lnT>
+                    <a:lnB w="6350" cap="flat" cmpd="sng" algn="ctr">
+                      <a:solidFill>
+                        <a:srgbClr val="C9D5E6"/>
+                      </a:solidFill>
+                      <a:prstDash val="solid"/>
+                      <a:round/>
+                      <a:headEnd type="none" w="med" len="med"/>
+                      <a:tailEnd type="none" w="med" len="med"/>
+                    </a:lnB>
+                  </a:tcPr>
+                </a:tc>
+              </a:tr>
+              <a:tr h="461010">
+                <a:tc>
+                  <a:txBody>
+                    <a:bodyPr/>
+                    <a:lstStyle/>
+                    <a:p>
+                      <a:pPr algn="ctr" indent="0" marL="0">
+                        <a:buNone/>
+                      </a:pPr>
+                      <a:r>
+                        <a:rPr lang="en-US" sz="780" b="1" dirty="0">
+                          <a:solidFill>
+                            <a:srgbClr val="000000"/>
+                          </a:solidFill>
+                          <a:latin typeface="Meiryo" pitchFamily="34" charset="0"/>
+                          <a:ea typeface="Meiryo" pitchFamily="34" charset="-122"/>
+                          <a:cs typeface="Meiryo" pitchFamily="34" charset="-120"/>
+                        </a:rPr>
+                        <a:t>H5-07</a:t>
+                      </a:r>
+                      <a:endParaRPr lang="en-US" sz="780" dirty="0">
+                        <a:latin typeface="Meiryo" charset="0"/>
+                        <a:ea typeface="Meiryo" charset="0"/>
+                        <a:cs typeface="Meiryo" charset="0"/>
+                      </a:endParaRPr>
+                    </a:p>
+                  </a:txBody>
+                  <a:tcPr marL="91440" marR="91440" marT="45720" marB="45720" anchor="ctr">
+                    <a:lnL w="6350" cap="flat" cmpd="sng" algn="ctr">
+                      <a:solidFill>
+                        <a:srgbClr val="C9D5E6"/>
+                      </a:solidFill>
+                      <a:prstDash val="solid"/>
+                      <a:round/>
+                      <a:headEnd type="none" w="med" len="med"/>
+                      <a:tailEnd type="none" w="med" len="med"/>
+                    </a:lnL>
+                    <a:lnR w="6350" cap="flat" cmpd="sng" algn="ctr">
+                      <a:solidFill>
+                        <a:srgbClr val="C9D5E6"/>
+                      </a:solidFill>
+                      <a:prstDash val="solid"/>
+                      <a:round/>
+                      <a:headEnd type="none" w="med" len="med"/>
+                      <a:tailEnd type="none" w="med" len="med"/>
+                    </a:lnR>
+                    <a:lnT w="6350" cap="flat" cmpd="sng" algn="ctr">
+                      <a:solidFill>
+                        <a:srgbClr val="C9D5E6"/>
+                      </a:solidFill>
+                      <a:prstDash val="solid"/>
+                      <a:round/>
+                      <a:headEnd type="none" w="med" len="med"/>
+                      <a:tailEnd type="none" w="med" len="med"/>
+                    </a:lnT>
+                    <a:lnB w="6350" cap="flat" cmpd="sng" algn="ctr">
+                      <a:solidFill>
+                        <a:srgbClr val="C9D5E6"/>
+                      </a:solidFill>
+                      <a:prstDash val="solid"/>
+                      <a:round/>
+                      <a:headEnd type="none" w="med" len="med"/>
+                      <a:tailEnd type="none" w="med" len="med"/>
+                    </a:lnB>
+                  </a:tcPr>
+                </a:tc>
+                <a:tc>
+                  <a:txBody>
+                    <a:bodyPr/>
+                    <a:lstStyle/>
+                    <a:p>
+                      <a:pPr indent="0" marL="0">
+                        <a:buNone/>
+                      </a:pPr>
+                      <a:r>
+                        <a:rPr lang="en-US" sz="760" dirty="0">
+                          <a:solidFill>
+                            <a:srgbClr val="000000"/>
+                          </a:solidFill>
+                          <a:latin typeface="Meiryo" pitchFamily="34" charset="0"/>
+                          <a:ea typeface="Meiryo" pitchFamily="34" charset="-122"/>
+                          <a:cs typeface="Meiryo" pitchFamily="34" charset="-120"/>
+                        </a:rPr>
+                        <a:t>改ざん防止の仕組み</a:t>
+                      </a:r>
+                      <a:endParaRPr lang="en-US" sz="760" dirty="0">
+                        <a:latin typeface="Meiryo" charset="0"/>
+                        <a:ea typeface="Meiryo" charset="0"/>
+                        <a:cs typeface="Meiryo" charset="0"/>
+                      </a:endParaRPr>
+                    </a:p>
+                  </a:txBody>
+                  <a:tcPr marL="91440" marR="91440" marT="45720" marB="45720" anchor="ctr">
+                    <a:lnL w="6350" cap="flat" cmpd="sng" algn="ctr">
+                      <a:solidFill>
+                        <a:srgbClr val="C9D5E6"/>
+                      </a:solidFill>
+                      <a:prstDash val="solid"/>
+                      <a:round/>
+                      <a:headEnd type="none" w="med" len="med"/>
+                      <a:tailEnd type="none" w="med" len="med"/>
+                    </a:lnL>
+                    <a:lnR w="6350" cap="flat" cmpd="sng" algn="ctr">
+                      <a:solidFill>
+                        <a:srgbClr val="C9D5E6"/>
+                      </a:solidFill>
+                      <a:prstDash val="solid"/>
+                      <a:round/>
+                      <a:headEnd type="none" w="med" len="med"/>
+                      <a:tailEnd type="none" w="med" len="med"/>
+                    </a:lnR>
+                    <a:lnT w="6350" cap="flat" cmpd="sng" algn="ctr">
+                      <a:solidFill>
+                        <a:srgbClr val="C9D5E6"/>
+                      </a:solidFill>
+                      <a:prstDash val="solid"/>
+                      <a:round/>
+                      <a:headEnd type="none" w="med" len="med"/>
+                      <a:tailEnd type="none" w="med" len="med"/>
+                    </a:lnT>
+                    <a:lnB w="6350" cap="flat" cmpd="sng" algn="ctr">
+                      <a:solidFill>
+                        <a:srgbClr val="C9D5E6"/>
+                      </a:solidFill>
+                      <a:prstDash val="solid"/>
+                      <a:round/>
+                      <a:headEnd type="none" w="med" len="med"/>
+                      <a:tailEnd type="none" w="med" len="med"/>
+                    </a:lnB>
+                  </a:tcPr>
+                </a:tc>
+                <a:tc>
+                  <a:txBody>
+                    <a:bodyPr/>
+                    <a:lstStyle/>
+                    <a:p>
+                      <a:pPr indent="0" marL="0">
+                        <a:buNone/>
+                      </a:pPr>
+                      <a:r>
+                        <a:rPr lang="en-US" sz="760" dirty="0">
+                          <a:solidFill>
+                            <a:srgbClr val="000000"/>
+                          </a:solidFill>
+                          <a:latin typeface="Meiryo" pitchFamily="34" charset="0"/>
+                          <a:ea typeface="Meiryo" pitchFamily="34" charset="-122"/>
+                          <a:cs typeface="Meiryo" pitchFamily="34" charset="-120"/>
+                        </a:rPr>
+                        <a:t>権限分離・確定ロック・変更履歴としてシステム側で担保</a:t>
+                      </a:r>
+                      <a:endParaRPr lang="en-US" sz="760" dirty="0">
+                        <a:latin typeface="Meiryo" charset="0"/>
+                        <a:ea typeface="Meiryo" charset="0"/>
+                        <a:cs typeface="Meiryo" charset="0"/>
+                      </a:endParaRPr>
+                    </a:p>
+                  </a:txBody>
+                  <a:tcPr marL="91440" marR="91440" marT="45720" marB="45720" anchor="ctr">
+                    <a:lnL w="6350" cap="flat" cmpd="sng" algn="ctr">
+                      <a:solidFill>
+                        <a:srgbClr val="C9D5E6"/>
+                      </a:solidFill>
+                      <a:prstDash val="solid"/>
+                      <a:round/>
+                      <a:headEnd type="none" w="med" len="med"/>
+                      <a:tailEnd type="none" w="med" len="med"/>
+                    </a:lnL>
+                    <a:lnR w="6350" cap="flat" cmpd="sng" algn="ctr">
+                      <a:solidFill>
+                        <a:srgbClr val="C9D5E6"/>
+                      </a:solidFill>
+                      <a:prstDash val="solid"/>
+                      <a:round/>
+                      <a:headEnd type="none" w="med" len="med"/>
+                      <a:tailEnd type="none" w="med" len="med"/>
+                    </a:lnR>
+                    <a:lnT w="6350" cap="flat" cmpd="sng" algn="ctr">
+                      <a:solidFill>
+                        <a:srgbClr val="C9D5E6"/>
+                      </a:solidFill>
+                      <a:prstDash val="solid"/>
+                      <a:round/>
+                      <a:headEnd type="none" w="med" len="med"/>
+                      <a:tailEnd type="none" w="med" len="med"/>
+                    </a:lnT>
+                    <a:lnB w="6350" cap="flat" cmpd="sng" algn="ctr">
+                      <a:solidFill>
+                        <a:srgbClr val="C9D5E6"/>
+                      </a:solidFill>
+                      <a:prstDash val="solid"/>
+                      <a:round/>
+                      <a:headEnd type="none" w="med" len="med"/>
+                      <a:tailEnd type="none" w="med" len="med"/>
+                    </a:lnB>
+                  </a:tcPr>
+                </a:tc>
+                <a:tc>
+                  <a:txBody>
+                    <a:bodyPr/>
+                    <a:lstStyle/>
+                    <a:p>
+                      <a:pPr indent="0" marL="0">
+                        <a:buNone/>
+                      </a:pPr>
+                      <a:r>
+                        <a:rPr lang="en-US" sz="760" dirty="0">
+                          <a:solidFill>
+                            <a:srgbClr val="6B7280"/>
+                          </a:solidFill>
+                          <a:latin typeface="Meiryo" pitchFamily="34" charset="0"/>
+                          <a:ea typeface="Meiryo" pitchFamily="34" charset="-122"/>
+                          <a:cs typeface="Meiryo" pitchFamily="34" charset="-120"/>
+                        </a:rPr>
                         <a:t>機能を厚めに実装する対応で妥当</a:t>
                       </a:r>
                       <a:endParaRPr lang="en-US" sz="760" dirty="0">
@@ -30459,7 +32201,7 @@
                   </a:tcPr>
                 </a:tc>
               </a:tr>
-              <a:tr h="395151">
+              <a:tr h="461010">
                 <a:tc>
                   <a:txBody>
                     <a:bodyPr/>
@@ -30477,7 +32219,7 @@
                           <a:ea typeface="Meiryo" pitchFamily="34" charset="-122"/>
                           <a:cs typeface="Meiryo" pitchFamily="34" charset="-120"/>
                         </a:rPr>
-                        <a:t>C-25</a:t>
+                        <a:t>H6-08</a:t>
                       </a:r>
                       <a:endParaRPr lang="en-US" sz="780" dirty="0">
                         <a:latin typeface="Meiryo" charset="0"/>
@@ -30542,7 +32284,7 @@
                           <a:ea typeface="Meiryo" pitchFamily="34" charset="-122"/>
                           <a:cs typeface="Meiryo" pitchFamily="34" charset="-120"/>
                         </a:rPr>
-                        <a:t>単位換算・按分の実施有無</a:t>
+                        <a:t>データ信頼性のヒヤリ経験</a:t>
                       </a:r>
                       <a:endParaRPr lang="en-US" sz="760" dirty="0">
                         <a:latin typeface="Meiryo" charset="0"/>
@@ -30607,7 +32349,7 @@
                           <a:ea typeface="Meiryo" pitchFamily="34" charset="-122"/>
                           <a:cs typeface="Meiryo" pitchFamily="34" charset="-120"/>
                         </a:rPr>
-                        <a:t>換算・按分をシステム側で行う基本方針</a:t>
+                        <a:t>自己申告でなく本社側の指摘・修正記録から傾向を把握</a:t>
                       </a:r>
                       <a:endParaRPr lang="en-US" sz="760" dirty="0">
                         <a:latin typeface="Meiryo" charset="0"/>
@@ -30672,7 +32414,7 @@
                           <a:ea typeface="Meiryo" pitchFamily="34" charset="-122"/>
                           <a:cs typeface="Meiryo" pitchFamily="34" charset="-120"/>
                         </a:rPr>
-                        <a:t>機能を厚めに実装する対応で妥当</a:t>
+                        <a:t>客観的データへの切替で妥当</a:t>
                       </a:r>
                       <a:endParaRPr lang="en-US" sz="760" dirty="0">
                         <a:latin typeface="Meiryo" charset="0"/>
@@ -30721,7 +32463,7 @@
                   </a:tcPr>
                 </a:tc>
               </a:tr>
-              <a:tr h="395151">
+              <a:tr h="461010">
                 <a:tc>
                   <a:txBody>
                     <a:bodyPr/>
@@ -30739,7 +32481,7 @@
                           <a:ea typeface="Meiryo" pitchFamily="34" charset="-122"/>
                           <a:cs typeface="Meiryo" pitchFamily="34" charset="-120"/>
                         </a:rPr>
-                        <a:t>C-36</a:t>
+                        <a:t>H8-03</a:t>
                       </a:r>
                       <a:endParaRPr lang="en-US" sz="780" dirty="0">
                         <a:latin typeface="Meiryo" charset="0"/>
@@ -30804,7 +32546,7 @@
                           <a:ea typeface="Meiryo" pitchFamily="34" charset="-122"/>
                           <a:cs typeface="Meiryo" pitchFamily="34" charset="-120"/>
                         </a:rPr>
-                        <a:t>電子承認の導入有無</a:t>
+                        <a:t>担当者のスキル自己評価</a:t>
                       </a:r>
                       <a:endParaRPr lang="en-US" sz="760" dirty="0">
                         <a:latin typeface="Meiryo" charset="0"/>
@@ -30869,7 +32611,7 @@
                           <a:ea typeface="Meiryo" pitchFamily="34" charset="-122"/>
                           <a:cs typeface="Meiryo" pitchFamily="34" charset="-120"/>
                         </a:rPr>
-                        <a:t>入力担当者向けでなくシステム担当者向けの技術確認事項として切り出し</a:t>
+                        <a:t>スキルを前提にせず入力作業をマニュアル化する方針</a:t>
                       </a:r>
                       <a:endParaRPr lang="en-US" sz="760" dirty="0">
                         <a:latin typeface="Meiryo" charset="0"/>
@@ -30934,1317 +32676,7 @@
                           <a:ea typeface="Meiryo" pitchFamily="34" charset="-122"/>
                           <a:cs typeface="Meiryo" pitchFamily="34" charset="-120"/>
                         </a:rPr>
-                        <a:t>質問対象の適正化として妥当</a:t>
-                      </a:r>
-                      <a:endParaRPr lang="en-US" sz="760" dirty="0">
-                        <a:latin typeface="Meiryo" charset="0"/>
-                        <a:ea typeface="Meiryo" charset="0"/>
-                        <a:cs typeface="Meiryo" charset="0"/>
-                      </a:endParaRPr>
-                    </a:p>
-                  </a:txBody>
-                  <a:tcPr marL="91440" marR="91440" marT="45720" marB="45720" anchor="ctr">
-                    <a:lnL w="6350" cap="flat" cmpd="sng" algn="ctr">
-                      <a:solidFill>
-                        <a:srgbClr val="C9D5E6"/>
-                      </a:solidFill>
-                      <a:prstDash val="solid"/>
-                      <a:round/>
-                      <a:headEnd type="none" w="med" len="med"/>
-                      <a:tailEnd type="none" w="med" len="med"/>
-                    </a:lnL>
-                    <a:lnR w="6350" cap="flat" cmpd="sng" algn="ctr">
-                      <a:solidFill>
-                        <a:srgbClr val="C9D5E6"/>
-                      </a:solidFill>
-                      <a:prstDash val="solid"/>
-                      <a:round/>
-                      <a:headEnd type="none" w="med" len="med"/>
-                      <a:tailEnd type="none" w="med" len="med"/>
-                    </a:lnR>
-                    <a:lnT w="6350" cap="flat" cmpd="sng" algn="ctr">
-                      <a:solidFill>
-                        <a:srgbClr val="C9D5E6"/>
-                      </a:solidFill>
-                      <a:prstDash val="solid"/>
-                      <a:round/>
-                      <a:headEnd type="none" w="med" len="med"/>
-                      <a:tailEnd type="none" w="med" len="med"/>
-                    </a:lnT>
-                    <a:lnB w="6350" cap="flat" cmpd="sng" algn="ctr">
-                      <a:solidFill>
-                        <a:srgbClr val="C9D5E6"/>
-                      </a:solidFill>
-                      <a:prstDash val="solid"/>
-                      <a:round/>
-                      <a:headEnd type="none" w="med" len="med"/>
-                      <a:tailEnd type="none" w="med" len="med"/>
-                    </a:lnB>
-                  </a:tcPr>
-                </a:tc>
-              </a:tr>
-              <a:tr h="395151">
-                <a:tc>
-                  <a:txBody>
-                    <a:bodyPr/>
-                    <a:lstStyle/>
-                    <a:p>
-                      <a:pPr algn="ctr" indent="0" marL="0">
-                        <a:buNone/>
-                      </a:pPr>
-                      <a:r>
-                        <a:rPr lang="en-US" sz="780" b="1" dirty="0">
-                          <a:solidFill>
-                            <a:srgbClr val="000000"/>
-                          </a:solidFill>
-                          <a:latin typeface="Meiryo" pitchFamily="34" charset="0"/>
-                          <a:ea typeface="Meiryo" pitchFamily="34" charset="-122"/>
-                          <a:cs typeface="Meiryo" pitchFamily="34" charset="-120"/>
-                        </a:rPr>
-                        <a:t>H5-05</a:t>
-                      </a:r>
-                      <a:endParaRPr lang="en-US" sz="780" dirty="0">
-                        <a:latin typeface="Meiryo" charset="0"/>
-                        <a:ea typeface="Meiryo" charset="0"/>
-                        <a:cs typeface="Meiryo" charset="0"/>
-                      </a:endParaRPr>
-                    </a:p>
-                  </a:txBody>
-                  <a:tcPr marL="91440" marR="91440" marT="45720" marB="45720" anchor="ctr">
-                    <a:lnL w="6350" cap="flat" cmpd="sng" algn="ctr">
-                      <a:solidFill>
-                        <a:srgbClr val="C9D5E6"/>
-                      </a:solidFill>
-                      <a:prstDash val="solid"/>
-                      <a:round/>
-                      <a:headEnd type="none" w="med" len="med"/>
-                      <a:tailEnd type="none" w="med" len="med"/>
-                    </a:lnL>
-                    <a:lnR w="6350" cap="flat" cmpd="sng" algn="ctr">
-                      <a:solidFill>
-                        <a:srgbClr val="C9D5E6"/>
-                      </a:solidFill>
-                      <a:prstDash val="solid"/>
-                      <a:round/>
-                      <a:headEnd type="none" w="med" len="med"/>
-                      <a:tailEnd type="none" w="med" len="med"/>
-                    </a:lnR>
-                    <a:lnT w="6350" cap="flat" cmpd="sng" algn="ctr">
-                      <a:solidFill>
-                        <a:srgbClr val="C9D5E6"/>
-                      </a:solidFill>
-                      <a:prstDash val="solid"/>
-                      <a:round/>
-                      <a:headEnd type="none" w="med" len="med"/>
-                      <a:tailEnd type="none" w="med" len="med"/>
-                    </a:lnT>
-                    <a:lnB w="6350" cap="flat" cmpd="sng" algn="ctr">
-                      <a:solidFill>
-                        <a:srgbClr val="C9D5E6"/>
-                      </a:solidFill>
-                      <a:prstDash val="solid"/>
-                      <a:round/>
-                      <a:headEnd type="none" w="med" len="med"/>
-                      <a:tailEnd type="none" w="med" len="med"/>
-                    </a:lnB>
-                  </a:tcPr>
-                </a:tc>
-                <a:tc>
-                  <a:txBody>
-                    <a:bodyPr/>
-                    <a:lstStyle/>
-                    <a:p>
-                      <a:pPr indent="0" marL="0">
-                        <a:buNone/>
-                      </a:pPr>
-                      <a:r>
-                        <a:rPr lang="en-US" sz="760" dirty="0">
-                          <a:solidFill>
-                            <a:srgbClr val="000000"/>
-                          </a:solidFill>
-                          <a:latin typeface="Meiryo" pitchFamily="34" charset="0"/>
-                          <a:ea typeface="Meiryo" pitchFamily="34" charset="-122"/>
-                          <a:cs typeface="Meiryo" pitchFamily="34" charset="-120"/>
-                        </a:rPr>
-                        <a:t>記録引継ぎの実態</a:t>
-                      </a:r>
-                      <a:endParaRPr lang="en-US" sz="760" dirty="0">
-                        <a:latin typeface="Meiryo" charset="0"/>
-                        <a:ea typeface="Meiryo" charset="0"/>
-                        <a:cs typeface="Meiryo" charset="0"/>
-                      </a:endParaRPr>
-                    </a:p>
-                  </a:txBody>
-                  <a:tcPr marL="91440" marR="91440" marT="45720" marB="45720" anchor="ctr">
-                    <a:lnL w="6350" cap="flat" cmpd="sng" algn="ctr">
-                      <a:solidFill>
-                        <a:srgbClr val="C9D5E6"/>
-                      </a:solidFill>
-                      <a:prstDash val="solid"/>
-                      <a:round/>
-                      <a:headEnd type="none" w="med" len="med"/>
-                      <a:tailEnd type="none" w="med" len="med"/>
-                    </a:lnL>
-                    <a:lnR w="6350" cap="flat" cmpd="sng" algn="ctr">
-                      <a:solidFill>
-                        <a:srgbClr val="C9D5E6"/>
-                      </a:solidFill>
-                      <a:prstDash val="solid"/>
-                      <a:round/>
-                      <a:headEnd type="none" w="med" len="med"/>
-                      <a:tailEnd type="none" w="med" len="med"/>
-                    </a:lnR>
-                    <a:lnT w="6350" cap="flat" cmpd="sng" algn="ctr">
-                      <a:solidFill>
-                        <a:srgbClr val="C9D5E6"/>
-                      </a:solidFill>
-                      <a:prstDash val="solid"/>
-                      <a:round/>
-                      <a:headEnd type="none" w="med" len="med"/>
-                      <a:tailEnd type="none" w="med" len="med"/>
-                    </a:lnT>
-                    <a:lnB w="6350" cap="flat" cmpd="sng" algn="ctr">
-                      <a:solidFill>
-                        <a:srgbClr val="C9D5E6"/>
-                      </a:solidFill>
-                      <a:prstDash val="solid"/>
-                      <a:round/>
-                      <a:headEnd type="none" w="med" len="med"/>
-                      <a:tailEnd type="none" w="med" len="med"/>
-                    </a:lnB>
-                  </a:tcPr>
-                </a:tc>
-                <a:tc>
-                  <a:txBody>
-                    <a:bodyPr/>
-                    <a:lstStyle/>
-                    <a:p>
-                      <a:pPr indent="0" marL="0">
-                        <a:buNone/>
-                      </a:pPr>
-                      <a:r>
-                        <a:rPr lang="en-US" sz="760" dirty="0">
-                          <a:solidFill>
-                            <a:srgbClr val="000000"/>
-                          </a:solidFill>
-                          <a:latin typeface="Meiryo" pitchFamily="34" charset="0"/>
-                          <a:ea typeface="Meiryo" pitchFamily="34" charset="-122"/>
-                          <a:cs typeface="Meiryo" pitchFamily="34" charset="-120"/>
-                        </a:rPr>
-                        <a:t>本社からデータ・証憑を明示する方式に切替</a:t>
-                      </a:r>
-                      <a:endParaRPr lang="en-US" sz="760" dirty="0">
-                        <a:latin typeface="Meiryo" charset="0"/>
-                        <a:ea typeface="Meiryo" charset="0"/>
-                        <a:cs typeface="Meiryo" charset="0"/>
-                      </a:endParaRPr>
-                    </a:p>
-                  </a:txBody>
-                  <a:tcPr marL="91440" marR="91440" marT="45720" marB="45720" anchor="ctr">
-                    <a:lnL w="6350" cap="flat" cmpd="sng" algn="ctr">
-                      <a:solidFill>
-                        <a:srgbClr val="C9D5E6"/>
-                      </a:solidFill>
-                      <a:prstDash val="solid"/>
-                      <a:round/>
-                      <a:headEnd type="none" w="med" len="med"/>
-                      <a:tailEnd type="none" w="med" len="med"/>
-                    </a:lnL>
-                    <a:lnR w="6350" cap="flat" cmpd="sng" algn="ctr">
-                      <a:solidFill>
-                        <a:srgbClr val="C9D5E6"/>
-                      </a:solidFill>
-                      <a:prstDash val="solid"/>
-                      <a:round/>
-                      <a:headEnd type="none" w="med" len="med"/>
-                      <a:tailEnd type="none" w="med" len="med"/>
-                    </a:lnR>
-                    <a:lnT w="6350" cap="flat" cmpd="sng" algn="ctr">
-                      <a:solidFill>
-                        <a:srgbClr val="C9D5E6"/>
-                      </a:solidFill>
-                      <a:prstDash val="solid"/>
-                      <a:round/>
-                      <a:headEnd type="none" w="med" len="med"/>
-                      <a:tailEnd type="none" w="med" len="med"/>
-                    </a:lnT>
-                    <a:lnB w="6350" cap="flat" cmpd="sng" algn="ctr">
-                      <a:solidFill>
-                        <a:srgbClr val="C9D5E6"/>
-                      </a:solidFill>
-                      <a:prstDash val="solid"/>
-                      <a:round/>
-                      <a:headEnd type="none" w="med" len="med"/>
-                      <a:tailEnd type="none" w="med" len="med"/>
-                    </a:lnB>
-                  </a:tcPr>
-                </a:tc>
-                <a:tc>
-                  <a:txBody>
-                    <a:bodyPr/>
-                    <a:lstStyle/>
-                    <a:p>
-                      <a:pPr indent="0" marL="0">
-                        <a:buNone/>
-                      </a:pPr>
-                      <a:r>
-                        <a:rPr lang="en-US" sz="760" dirty="0">
-                          <a:solidFill>
-                            <a:srgbClr val="6B7280"/>
-                          </a:solidFill>
-                          <a:latin typeface="Meiryo" pitchFamily="34" charset="0"/>
-                          <a:ea typeface="Meiryo" pitchFamily="34" charset="-122"/>
-                          <a:cs typeface="Meiryo" pitchFamily="34" charset="-120"/>
-                        </a:rPr>
-                        <a:t>別の仕組みで正面から対応し妥当</a:t>
-                      </a:r>
-                      <a:endParaRPr lang="en-US" sz="760" dirty="0">
-                        <a:latin typeface="Meiryo" charset="0"/>
-                        <a:ea typeface="Meiryo" charset="0"/>
-                        <a:cs typeface="Meiryo" charset="0"/>
-                      </a:endParaRPr>
-                    </a:p>
-                  </a:txBody>
-                  <a:tcPr marL="91440" marR="91440" marT="45720" marB="45720" anchor="ctr">
-                    <a:lnL w="6350" cap="flat" cmpd="sng" algn="ctr">
-                      <a:solidFill>
-                        <a:srgbClr val="C9D5E6"/>
-                      </a:solidFill>
-                      <a:prstDash val="solid"/>
-                      <a:round/>
-                      <a:headEnd type="none" w="med" len="med"/>
-                      <a:tailEnd type="none" w="med" len="med"/>
-                    </a:lnL>
-                    <a:lnR w="6350" cap="flat" cmpd="sng" algn="ctr">
-                      <a:solidFill>
-                        <a:srgbClr val="C9D5E6"/>
-                      </a:solidFill>
-                      <a:prstDash val="solid"/>
-                      <a:round/>
-                      <a:headEnd type="none" w="med" len="med"/>
-                      <a:tailEnd type="none" w="med" len="med"/>
-                    </a:lnR>
-                    <a:lnT w="6350" cap="flat" cmpd="sng" algn="ctr">
-                      <a:solidFill>
-                        <a:srgbClr val="C9D5E6"/>
-                      </a:solidFill>
-                      <a:prstDash val="solid"/>
-                      <a:round/>
-                      <a:headEnd type="none" w="med" len="med"/>
-                      <a:tailEnd type="none" w="med" len="med"/>
-                    </a:lnT>
-                    <a:lnB w="6350" cap="flat" cmpd="sng" algn="ctr">
-                      <a:solidFill>
-                        <a:srgbClr val="C9D5E6"/>
-                      </a:solidFill>
-                      <a:prstDash val="solid"/>
-                      <a:round/>
-                      <a:headEnd type="none" w="med" len="med"/>
-                      <a:tailEnd type="none" w="med" len="med"/>
-                    </a:lnB>
-                  </a:tcPr>
-                </a:tc>
-              </a:tr>
-              <a:tr h="395151">
-                <a:tc>
-                  <a:txBody>
-                    <a:bodyPr/>
-                    <a:lstStyle/>
-                    <a:p>
-                      <a:pPr algn="ctr" indent="0" marL="0">
-                        <a:buNone/>
-                      </a:pPr>
-                      <a:r>
-                        <a:rPr lang="en-US" sz="780" b="1" dirty="0">
-                          <a:solidFill>
-                            <a:srgbClr val="000000"/>
-                          </a:solidFill>
-                          <a:latin typeface="Meiryo" pitchFamily="34" charset="0"/>
-                          <a:ea typeface="Meiryo" pitchFamily="34" charset="-122"/>
-                          <a:cs typeface="Meiryo" pitchFamily="34" charset="-120"/>
-                        </a:rPr>
-                        <a:t>H5-07</a:t>
-                      </a:r>
-                      <a:endParaRPr lang="en-US" sz="780" dirty="0">
-                        <a:latin typeface="Meiryo" charset="0"/>
-                        <a:ea typeface="Meiryo" charset="0"/>
-                        <a:cs typeface="Meiryo" charset="0"/>
-                      </a:endParaRPr>
-                    </a:p>
-                  </a:txBody>
-                  <a:tcPr marL="91440" marR="91440" marT="45720" marB="45720" anchor="ctr">
-                    <a:lnL w="6350" cap="flat" cmpd="sng" algn="ctr">
-                      <a:solidFill>
-                        <a:srgbClr val="C9D5E6"/>
-                      </a:solidFill>
-                      <a:prstDash val="solid"/>
-                      <a:round/>
-                      <a:headEnd type="none" w="med" len="med"/>
-                      <a:tailEnd type="none" w="med" len="med"/>
-                    </a:lnL>
-                    <a:lnR w="6350" cap="flat" cmpd="sng" algn="ctr">
-                      <a:solidFill>
-                        <a:srgbClr val="C9D5E6"/>
-                      </a:solidFill>
-                      <a:prstDash val="solid"/>
-                      <a:round/>
-                      <a:headEnd type="none" w="med" len="med"/>
-                      <a:tailEnd type="none" w="med" len="med"/>
-                    </a:lnR>
-                    <a:lnT w="6350" cap="flat" cmpd="sng" algn="ctr">
-                      <a:solidFill>
-                        <a:srgbClr val="C9D5E6"/>
-                      </a:solidFill>
-                      <a:prstDash val="solid"/>
-                      <a:round/>
-                      <a:headEnd type="none" w="med" len="med"/>
-                      <a:tailEnd type="none" w="med" len="med"/>
-                    </a:lnT>
-                    <a:lnB w="6350" cap="flat" cmpd="sng" algn="ctr">
-                      <a:solidFill>
-                        <a:srgbClr val="C9D5E6"/>
-                      </a:solidFill>
-                      <a:prstDash val="solid"/>
-                      <a:round/>
-                      <a:headEnd type="none" w="med" len="med"/>
-                      <a:tailEnd type="none" w="med" len="med"/>
-                    </a:lnB>
-                  </a:tcPr>
-                </a:tc>
-                <a:tc>
-                  <a:txBody>
-                    <a:bodyPr/>
-                    <a:lstStyle/>
-                    <a:p>
-                      <a:pPr indent="0" marL="0">
-                        <a:buNone/>
-                      </a:pPr>
-                      <a:r>
-                        <a:rPr lang="en-US" sz="760" dirty="0">
-                          <a:solidFill>
-                            <a:srgbClr val="000000"/>
-                          </a:solidFill>
-                          <a:latin typeface="Meiryo" pitchFamily="34" charset="0"/>
-                          <a:ea typeface="Meiryo" pitchFamily="34" charset="-122"/>
-                          <a:cs typeface="Meiryo" pitchFamily="34" charset="-120"/>
-                        </a:rPr>
-                        <a:t>改ざん防止の仕組み</a:t>
-                      </a:r>
-                      <a:endParaRPr lang="en-US" sz="760" dirty="0">
-                        <a:latin typeface="Meiryo" charset="0"/>
-                        <a:ea typeface="Meiryo" charset="0"/>
-                        <a:cs typeface="Meiryo" charset="0"/>
-                      </a:endParaRPr>
-                    </a:p>
-                  </a:txBody>
-                  <a:tcPr marL="91440" marR="91440" marT="45720" marB="45720" anchor="ctr">
-                    <a:lnL w="6350" cap="flat" cmpd="sng" algn="ctr">
-                      <a:solidFill>
-                        <a:srgbClr val="C9D5E6"/>
-                      </a:solidFill>
-                      <a:prstDash val="solid"/>
-                      <a:round/>
-                      <a:headEnd type="none" w="med" len="med"/>
-                      <a:tailEnd type="none" w="med" len="med"/>
-                    </a:lnL>
-                    <a:lnR w="6350" cap="flat" cmpd="sng" algn="ctr">
-                      <a:solidFill>
-                        <a:srgbClr val="C9D5E6"/>
-                      </a:solidFill>
-                      <a:prstDash val="solid"/>
-                      <a:round/>
-                      <a:headEnd type="none" w="med" len="med"/>
-                      <a:tailEnd type="none" w="med" len="med"/>
-                    </a:lnR>
-                    <a:lnT w="6350" cap="flat" cmpd="sng" algn="ctr">
-                      <a:solidFill>
-                        <a:srgbClr val="C9D5E6"/>
-                      </a:solidFill>
-                      <a:prstDash val="solid"/>
-                      <a:round/>
-                      <a:headEnd type="none" w="med" len="med"/>
-                      <a:tailEnd type="none" w="med" len="med"/>
-                    </a:lnT>
-                    <a:lnB w="6350" cap="flat" cmpd="sng" algn="ctr">
-                      <a:solidFill>
-                        <a:srgbClr val="C9D5E6"/>
-                      </a:solidFill>
-                      <a:prstDash val="solid"/>
-                      <a:round/>
-                      <a:headEnd type="none" w="med" len="med"/>
-                      <a:tailEnd type="none" w="med" len="med"/>
-                    </a:lnB>
-                  </a:tcPr>
-                </a:tc>
-                <a:tc>
-                  <a:txBody>
-                    <a:bodyPr/>
-                    <a:lstStyle/>
-                    <a:p>
-                      <a:pPr indent="0" marL="0">
-                        <a:buNone/>
-                      </a:pPr>
-                      <a:r>
-                        <a:rPr lang="en-US" sz="760" dirty="0">
-                          <a:solidFill>
-                            <a:srgbClr val="000000"/>
-                          </a:solidFill>
-                          <a:latin typeface="Meiryo" pitchFamily="34" charset="0"/>
-                          <a:ea typeface="Meiryo" pitchFamily="34" charset="-122"/>
-                          <a:cs typeface="Meiryo" pitchFamily="34" charset="-120"/>
-                        </a:rPr>
-                        <a:t>権限分離・確定ロック・変更履歴としてシステム側で担保</a:t>
-                      </a:r>
-                      <a:endParaRPr lang="en-US" sz="760" dirty="0">
-                        <a:latin typeface="Meiryo" charset="0"/>
-                        <a:ea typeface="Meiryo" charset="0"/>
-                        <a:cs typeface="Meiryo" charset="0"/>
-                      </a:endParaRPr>
-                    </a:p>
-                  </a:txBody>
-                  <a:tcPr marL="91440" marR="91440" marT="45720" marB="45720" anchor="ctr">
-                    <a:lnL w="6350" cap="flat" cmpd="sng" algn="ctr">
-                      <a:solidFill>
-                        <a:srgbClr val="C9D5E6"/>
-                      </a:solidFill>
-                      <a:prstDash val="solid"/>
-                      <a:round/>
-                      <a:headEnd type="none" w="med" len="med"/>
-                      <a:tailEnd type="none" w="med" len="med"/>
-                    </a:lnL>
-                    <a:lnR w="6350" cap="flat" cmpd="sng" algn="ctr">
-                      <a:solidFill>
-                        <a:srgbClr val="C9D5E6"/>
-                      </a:solidFill>
-                      <a:prstDash val="solid"/>
-                      <a:round/>
-                      <a:headEnd type="none" w="med" len="med"/>
-                      <a:tailEnd type="none" w="med" len="med"/>
-                    </a:lnR>
-                    <a:lnT w="6350" cap="flat" cmpd="sng" algn="ctr">
-                      <a:solidFill>
-                        <a:srgbClr val="C9D5E6"/>
-                      </a:solidFill>
-                      <a:prstDash val="solid"/>
-                      <a:round/>
-                      <a:headEnd type="none" w="med" len="med"/>
-                      <a:tailEnd type="none" w="med" len="med"/>
-                    </a:lnT>
-                    <a:lnB w="6350" cap="flat" cmpd="sng" algn="ctr">
-                      <a:solidFill>
-                        <a:srgbClr val="C9D5E6"/>
-                      </a:solidFill>
-                      <a:prstDash val="solid"/>
-                      <a:round/>
-                      <a:headEnd type="none" w="med" len="med"/>
-                      <a:tailEnd type="none" w="med" len="med"/>
-                    </a:lnB>
-                  </a:tcPr>
-                </a:tc>
-                <a:tc>
-                  <a:txBody>
-                    <a:bodyPr/>
-                    <a:lstStyle/>
-                    <a:p>
-                      <a:pPr indent="0" marL="0">
-                        <a:buNone/>
-                      </a:pPr>
-                      <a:r>
-                        <a:rPr lang="en-US" sz="760" dirty="0">
-                          <a:solidFill>
-                            <a:srgbClr val="6B7280"/>
-                          </a:solidFill>
-                          <a:latin typeface="Meiryo" pitchFamily="34" charset="0"/>
-                          <a:ea typeface="Meiryo" pitchFamily="34" charset="-122"/>
-                          <a:cs typeface="Meiryo" pitchFamily="34" charset="-120"/>
-                        </a:rPr>
-                        <a:t>機能を厚めに実装する対応で妥当</a:t>
-                      </a:r>
-                      <a:endParaRPr lang="en-US" sz="760" dirty="0">
-                        <a:latin typeface="Meiryo" charset="0"/>
-                        <a:ea typeface="Meiryo" charset="0"/>
-                        <a:cs typeface="Meiryo" charset="0"/>
-                      </a:endParaRPr>
-                    </a:p>
-                  </a:txBody>
-                  <a:tcPr marL="91440" marR="91440" marT="45720" marB="45720" anchor="ctr">
-                    <a:lnL w="6350" cap="flat" cmpd="sng" algn="ctr">
-                      <a:solidFill>
-                        <a:srgbClr val="C9D5E6"/>
-                      </a:solidFill>
-                      <a:prstDash val="solid"/>
-                      <a:round/>
-                      <a:headEnd type="none" w="med" len="med"/>
-                      <a:tailEnd type="none" w="med" len="med"/>
-                    </a:lnL>
-                    <a:lnR w="6350" cap="flat" cmpd="sng" algn="ctr">
-                      <a:solidFill>
-                        <a:srgbClr val="C9D5E6"/>
-                      </a:solidFill>
-                      <a:prstDash val="solid"/>
-                      <a:round/>
-                      <a:headEnd type="none" w="med" len="med"/>
-                      <a:tailEnd type="none" w="med" len="med"/>
-                    </a:lnR>
-                    <a:lnT w="6350" cap="flat" cmpd="sng" algn="ctr">
-                      <a:solidFill>
-                        <a:srgbClr val="C9D5E6"/>
-                      </a:solidFill>
-                      <a:prstDash val="solid"/>
-                      <a:round/>
-                      <a:headEnd type="none" w="med" len="med"/>
-                      <a:tailEnd type="none" w="med" len="med"/>
-                    </a:lnT>
-                    <a:lnB w="6350" cap="flat" cmpd="sng" algn="ctr">
-                      <a:solidFill>
-                        <a:srgbClr val="C9D5E6"/>
-                      </a:solidFill>
-                      <a:prstDash val="solid"/>
-                      <a:round/>
-                      <a:headEnd type="none" w="med" len="med"/>
-                      <a:tailEnd type="none" w="med" len="med"/>
-                    </a:lnB>
-                  </a:tcPr>
-                </a:tc>
-              </a:tr>
-              <a:tr h="395151">
-                <a:tc>
-                  <a:txBody>
-                    <a:bodyPr/>
-                    <a:lstStyle/>
-                    <a:p>
-                      <a:pPr algn="ctr" indent="0" marL="0">
-                        <a:buNone/>
-                      </a:pPr>
-                      <a:r>
-                        <a:rPr lang="en-US" sz="780" b="1" dirty="0">
-                          <a:solidFill>
-                            <a:srgbClr val="000000"/>
-                          </a:solidFill>
-                          <a:latin typeface="Meiryo" pitchFamily="34" charset="0"/>
-                          <a:ea typeface="Meiryo" pitchFamily="34" charset="-122"/>
-                          <a:cs typeface="Meiryo" pitchFamily="34" charset="-120"/>
-                        </a:rPr>
-                        <a:t>H6-08</a:t>
-                      </a:r>
-                      <a:endParaRPr lang="en-US" sz="780" dirty="0">
-                        <a:latin typeface="Meiryo" charset="0"/>
-                        <a:ea typeface="Meiryo" charset="0"/>
-                        <a:cs typeface="Meiryo" charset="0"/>
-                      </a:endParaRPr>
-                    </a:p>
-                  </a:txBody>
-                  <a:tcPr marL="91440" marR="91440" marT="45720" marB="45720" anchor="ctr">
-                    <a:lnL w="6350" cap="flat" cmpd="sng" algn="ctr">
-                      <a:solidFill>
-                        <a:srgbClr val="C9D5E6"/>
-                      </a:solidFill>
-                      <a:prstDash val="solid"/>
-                      <a:round/>
-                      <a:headEnd type="none" w="med" len="med"/>
-                      <a:tailEnd type="none" w="med" len="med"/>
-                    </a:lnL>
-                    <a:lnR w="6350" cap="flat" cmpd="sng" algn="ctr">
-                      <a:solidFill>
-                        <a:srgbClr val="C9D5E6"/>
-                      </a:solidFill>
-                      <a:prstDash val="solid"/>
-                      <a:round/>
-                      <a:headEnd type="none" w="med" len="med"/>
-                      <a:tailEnd type="none" w="med" len="med"/>
-                    </a:lnR>
-                    <a:lnT w="6350" cap="flat" cmpd="sng" algn="ctr">
-                      <a:solidFill>
-                        <a:srgbClr val="C9D5E6"/>
-                      </a:solidFill>
-                      <a:prstDash val="solid"/>
-                      <a:round/>
-                      <a:headEnd type="none" w="med" len="med"/>
-                      <a:tailEnd type="none" w="med" len="med"/>
-                    </a:lnT>
-                    <a:lnB w="6350" cap="flat" cmpd="sng" algn="ctr">
-                      <a:solidFill>
-                        <a:srgbClr val="C9D5E6"/>
-                      </a:solidFill>
-                      <a:prstDash val="solid"/>
-                      <a:round/>
-                      <a:headEnd type="none" w="med" len="med"/>
-                      <a:tailEnd type="none" w="med" len="med"/>
-                    </a:lnB>
-                  </a:tcPr>
-                </a:tc>
-                <a:tc>
-                  <a:txBody>
-                    <a:bodyPr/>
-                    <a:lstStyle/>
-                    <a:p>
-                      <a:pPr indent="0" marL="0">
-                        <a:buNone/>
-                      </a:pPr>
-                      <a:r>
-                        <a:rPr lang="en-US" sz="760" dirty="0">
-                          <a:solidFill>
-                            <a:srgbClr val="000000"/>
-                          </a:solidFill>
-                          <a:latin typeface="Meiryo" pitchFamily="34" charset="0"/>
-                          <a:ea typeface="Meiryo" pitchFamily="34" charset="-122"/>
-                          <a:cs typeface="Meiryo" pitchFamily="34" charset="-120"/>
-                        </a:rPr>
-                        <a:t>データ信頼性のヒヤリ経験</a:t>
-                      </a:r>
-                      <a:endParaRPr lang="en-US" sz="760" dirty="0">
-                        <a:latin typeface="Meiryo" charset="0"/>
-                        <a:ea typeface="Meiryo" charset="0"/>
-                        <a:cs typeface="Meiryo" charset="0"/>
-                      </a:endParaRPr>
-                    </a:p>
-                  </a:txBody>
-                  <a:tcPr marL="91440" marR="91440" marT="45720" marB="45720" anchor="ctr">
-                    <a:lnL w="6350" cap="flat" cmpd="sng" algn="ctr">
-                      <a:solidFill>
-                        <a:srgbClr val="C9D5E6"/>
-                      </a:solidFill>
-                      <a:prstDash val="solid"/>
-                      <a:round/>
-                      <a:headEnd type="none" w="med" len="med"/>
-                      <a:tailEnd type="none" w="med" len="med"/>
-                    </a:lnL>
-                    <a:lnR w="6350" cap="flat" cmpd="sng" algn="ctr">
-                      <a:solidFill>
-                        <a:srgbClr val="C9D5E6"/>
-                      </a:solidFill>
-                      <a:prstDash val="solid"/>
-                      <a:round/>
-                      <a:headEnd type="none" w="med" len="med"/>
-                      <a:tailEnd type="none" w="med" len="med"/>
-                    </a:lnR>
-                    <a:lnT w="6350" cap="flat" cmpd="sng" algn="ctr">
-                      <a:solidFill>
-                        <a:srgbClr val="C9D5E6"/>
-                      </a:solidFill>
-                      <a:prstDash val="solid"/>
-                      <a:round/>
-                      <a:headEnd type="none" w="med" len="med"/>
-                      <a:tailEnd type="none" w="med" len="med"/>
-                    </a:lnT>
-                    <a:lnB w="6350" cap="flat" cmpd="sng" algn="ctr">
-                      <a:solidFill>
-                        <a:srgbClr val="C9D5E6"/>
-                      </a:solidFill>
-                      <a:prstDash val="solid"/>
-                      <a:round/>
-                      <a:headEnd type="none" w="med" len="med"/>
-                      <a:tailEnd type="none" w="med" len="med"/>
-                    </a:lnB>
-                  </a:tcPr>
-                </a:tc>
-                <a:tc>
-                  <a:txBody>
-                    <a:bodyPr/>
-                    <a:lstStyle/>
-                    <a:p>
-                      <a:pPr indent="0" marL="0">
-                        <a:buNone/>
-                      </a:pPr>
-                      <a:r>
-                        <a:rPr lang="en-US" sz="760" dirty="0">
-                          <a:solidFill>
-                            <a:srgbClr val="000000"/>
-                          </a:solidFill>
-                          <a:latin typeface="Meiryo" pitchFamily="34" charset="0"/>
-                          <a:ea typeface="Meiryo" pitchFamily="34" charset="-122"/>
-                          <a:cs typeface="Meiryo" pitchFamily="34" charset="-120"/>
-                        </a:rPr>
-                        <a:t>自己申告でなく本社側の指摘・修正記録から傾向を把握</a:t>
-                      </a:r>
-                      <a:endParaRPr lang="en-US" sz="760" dirty="0">
-                        <a:latin typeface="Meiryo" charset="0"/>
-                        <a:ea typeface="Meiryo" charset="0"/>
-                        <a:cs typeface="Meiryo" charset="0"/>
-                      </a:endParaRPr>
-                    </a:p>
-                  </a:txBody>
-                  <a:tcPr marL="91440" marR="91440" marT="45720" marB="45720" anchor="ctr">
-                    <a:lnL w="6350" cap="flat" cmpd="sng" algn="ctr">
-                      <a:solidFill>
-                        <a:srgbClr val="C9D5E6"/>
-                      </a:solidFill>
-                      <a:prstDash val="solid"/>
-                      <a:round/>
-                      <a:headEnd type="none" w="med" len="med"/>
-                      <a:tailEnd type="none" w="med" len="med"/>
-                    </a:lnL>
-                    <a:lnR w="6350" cap="flat" cmpd="sng" algn="ctr">
-                      <a:solidFill>
-                        <a:srgbClr val="C9D5E6"/>
-                      </a:solidFill>
-                      <a:prstDash val="solid"/>
-                      <a:round/>
-                      <a:headEnd type="none" w="med" len="med"/>
-                      <a:tailEnd type="none" w="med" len="med"/>
-                    </a:lnR>
-                    <a:lnT w="6350" cap="flat" cmpd="sng" algn="ctr">
-                      <a:solidFill>
-                        <a:srgbClr val="C9D5E6"/>
-                      </a:solidFill>
-                      <a:prstDash val="solid"/>
-                      <a:round/>
-                      <a:headEnd type="none" w="med" len="med"/>
-                      <a:tailEnd type="none" w="med" len="med"/>
-                    </a:lnT>
-                    <a:lnB w="6350" cap="flat" cmpd="sng" algn="ctr">
-                      <a:solidFill>
-                        <a:srgbClr val="C9D5E6"/>
-                      </a:solidFill>
-                      <a:prstDash val="solid"/>
-                      <a:round/>
-                      <a:headEnd type="none" w="med" len="med"/>
-                      <a:tailEnd type="none" w="med" len="med"/>
-                    </a:lnB>
-                  </a:tcPr>
-                </a:tc>
-                <a:tc>
-                  <a:txBody>
-                    <a:bodyPr/>
-                    <a:lstStyle/>
-                    <a:p>
-                      <a:pPr indent="0" marL="0">
-                        <a:buNone/>
-                      </a:pPr>
-                      <a:r>
-                        <a:rPr lang="en-US" sz="760" dirty="0">
-                          <a:solidFill>
-                            <a:srgbClr val="6B7280"/>
-                          </a:solidFill>
-                          <a:latin typeface="Meiryo" pitchFamily="34" charset="0"/>
-                          <a:ea typeface="Meiryo" pitchFamily="34" charset="-122"/>
-                          <a:cs typeface="Meiryo" pitchFamily="34" charset="-120"/>
-                        </a:rPr>
-                        <a:t>客観的データへの切替で妥当</a:t>
-                      </a:r>
-                      <a:endParaRPr lang="en-US" sz="760" dirty="0">
-                        <a:latin typeface="Meiryo" charset="0"/>
-                        <a:ea typeface="Meiryo" charset="0"/>
-                        <a:cs typeface="Meiryo" charset="0"/>
-                      </a:endParaRPr>
-                    </a:p>
-                  </a:txBody>
-                  <a:tcPr marL="91440" marR="91440" marT="45720" marB="45720" anchor="ctr">
-                    <a:lnL w="6350" cap="flat" cmpd="sng" algn="ctr">
-                      <a:solidFill>
-                        <a:srgbClr val="C9D5E6"/>
-                      </a:solidFill>
-                      <a:prstDash val="solid"/>
-                      <a:round/>
-                      <a:headEnd type="none" w="med" len="med"/>
-                      <a:tailEnd type="none" w="med" len="med"/>
-                    </a:lnL>
-                    <a:lnR w="6350" cap="flat" cmpd="sng" algn="ctr">
-                      <a:solidFill>
-                        <a:srgbClr val="C9D5E6"/>
-                      </a:solidFill>
-                      <a:prstDash val="solid"/>
-                      <a:round/>
-                      <a:headEnd type="none" w="med" len="med"/>
-                      <a:tailEnd type="none" w="med" len="med"/>
-                    </a:lnR>
-                    <a:lnT w="6350" cap="flat" cmpd="sng" algn="ctr">
-                      <a:solidFill>
-                        <a:srgbClr val="C9D5E6"/>
-                      </a:solidFill>
-                      <a:prstDash val="solid"/>
-                      <a:round/>
-                      <a:headEnd type="none" w="med" len="med"/>
-                      <a:tailEnd type="none" w="med" len="med"/>
-                    </a:lnT>
-                    <a:lnB w="6350" cap="flat" cmpd="sng" algn="ctr">
-                      <a:solidFill>
-                        <a:srgbClr val="C9D5E6"/>
-                      </a:solidFill>
-                      <a:prstDash val="solid"/>
-                      <a:round/>
-                      <a:headEnd type="none" w="med" len="med"/>
-                      <a:tailEnd type="none" w="med" len="med"/>
-                    </a:lnB>
-                  </a:tcPr>
-                </a:tc>
-              </a:tr>
-              <a:tr h="395151">
-                <a:tc>
-                  <a:txBody>
-                    <a:bodyPr/>
-                    <a:lstStyle/>
-                    <a:p>
-                      <a:pPr algn="ctr" indent="0" marL="0">
-                        <a:buNone/>
-                      </a:pPr>
-                      <a:r>
-                        <a:rPr lang="en-US" sz="780" b="1" dirty="0">
-                          <a:solidFill>
-                            <a:srgbClr val="000000"/>
-                          </a:solidFill>
-                          <a:latin typeface="Meiryo" pitchFamily="34" charset="0"/>
-                          <a:ea typeface="Meiryo" pitchFamily="34" charset="-122"/>
-                          <a:cs typeface="Meiryo" pitchFamily="34" charset="-120"/>
-                        </a:rPr>
-                        <a:t>H8-03</a:t>
-                      </a:r>
-                      <a:endParaRPr lang="en-US" sz="780" dirty="0">
-                        <a:latin typeface="Meiryo" charset="0"/>
-                        <a:ea typeface="Meiryo" charset="0"/>
-                        <a:cs typeface="Meiryo" charset="0"/>
-                      </a:endParaRPr>
-                    </a:p>
-                  </a:txBody>
-                  <a:tcPr marL="91440" marR="91440" marT="45720" marB="45720" anchor="ctr">
-                    <a:lnL w="6350" cap="flat" cmpd="sng" algn="ctr">
-                      <a:solidFill>
-                        <a:srgbClr val="C9D5E6"/>
-                      </a:solidFill>
-                      <a:prstDash val="solid"/>
-                      <a:round/>
-                      <a:headEnd type="none" w="med" len="med"/>
-                      <a:tailEnd type="none" w="med" len="med"/>
-                    </a:lnL>
-                    <a:lnR w="6350" cap="flat" cmpd="sng" algn="ctr">
-                      <a:solidFill>
-                        <a:srgbClr val="C9D5E6"/>
-                      </a:solidFill>
-                      <a:prstDash val="solid"/>
-                      <a:round/>
-                      <a:headEnd type="none" w="med" len="med"/>
-                      <a:tailEnd type="none" w="med" len="med"/>
-                    </a:lnR>
-                    <a:lnT w="6350" cap="flat" cmpd="sng" algn="ctr">
-                      <a:solidFill>
-                        <a:srgbClr val="C9D5E6"/>
-                      </a:solidFill>
-                      <a:prstDash val="solid"/>
-                      <a:round/>
-                      <a:headEnd type="none" w="med" len="med"/>
-                      <a:tailEnd type="none" w="med" len="med"/>
-                    </a:lnT>
-                    <a:lnB w="6350" cap="flat" cmpd="sng" algn="ctr">
-                      <a:solidFill>
-                        <a:srgbClr val="C9D5E6"/>
-                      </a:solidFill>
-                      <a:prstDash val="solid"/>
-                      <a:round/>
-                      <a:headEnd type="none" w="med" len="med"/>
-                      <a:tailEnd type="none" w="med" len="med"/>
-                    </a:lnB>
-                  </a:tcPr>
-                </a:tc>
-                <a:tc>
-                  <a:txBody>
-                    <a:bodyPr/>
-                    <a:lstStyle/>
-                    <a:p>
-                      <a:pPr indent="0" marL="0">
-                        <a:buNone/>
-                      </a:pPr>
-                      <a:r>
-                        <a:rPr lang="en-US" sz="760" dirty="0">
-                          <a:solidFill>
-                            <a:srgbClr val="000000"/>
-                          </a:solidFill>
-                          <a:latin typeface="Meiryo" pitchFamily="34" charset="0"/>
-                          <a:ea typeface="Meiryo" pitchFamily="34" charset="-122"/>
-                          <a:cs typeface="Meiryo" pitchFamily="34" charset="-120"/>
-                        </a:rPr>
-                        <a:t>担当者のスキル自己評価</a:t>
-                      </a:r>
-                      <a:endParaRPr lang="en-US" sz="760" dirty="0">
-                        <a:latin typeface="Meiryo" charset="0"/>
-                        <a:ea typeface="Meiryo" charset="0"/>
-                        <a:cs typeface="Meiryo" charset="0"/>
-                      </a:endParaRPr>
-                    </a:p>
-                  </a:txBody>
-                  <a:tcPr marL="91440" marR="91440" marT="45720" marB="45720" anchor="ctr">
-                    <a:lnL w="6350" cap="flat" cmpd="sng" algn="ctr">
-                      <a:solidFill>
-                        <a:srgbClr val="C9D5E6"/>
-                      </a:solidFill>
-                      <a:prstDash val="solid"/>
-                      <a:round/>
-                      <a:headEnd type="none" w="med" len="med"/>
-                      <a:tailEnd type="none" w="med" len="med"/>
-                    </a:lnL>
-                    <a:lnR w="6350" cap="flat" cmpd="sng" algn="ctr">
-                      <a:solidFill>
-                        <a:srgbClr val="C9D5E6"/>
-                      </a:solidFill>
-                      <a:prstDash val="solid"/>
-                      <a:round/>
-                      <a:headEnd type="none" w="med" len="med"/>
-                      <a:tailEnd type="none" w="med" len="med"/>
-                    </a:lnR>
-                    <a:lnT w="6350" cap="flat" cmpd="sng" algn="ctr">
-                      <a:solidFill>
-                        <a:srgbClr val="C9D5E6"/>
-                      </a:solidFill>
-                      <a:prstDash val="solid"/>
-                      <a:round/>
-                      <a:headEnd type="none" w="med" len="med"/>
-                      <a:tailEnd type="none" w="med" len="med"/>
-                    </a:lnT>
-                    <a:lnB w="6350" cap="flat" cmpd="sng" algn="ctr">
-                      <a:solidFill>
-                        <a:srgbClr val="C9D5E6"/>
-                      </a:solidFill>
-                      <a:prstDash val="solid"/>
-                      <a:round/>
-                      <a:headEnd type="none" w="med" len="med"/>
-                      <a:tailEnd type="none" w="med" len="med"/>
-                    </a:lnB>
-                  </a:tcPr>
-                </a:tc>
-                <a:tc>
-                  <a:txBody>
-                    <a:bodyPr/>
-                    <a:lstStyle/>
-                    <a:p>
-                      <a:pPr indent="0" marL="0">
-                        <a:buNone/>
-                      </a:pPr>
-                      <a:r>
-                        <a:rPr lang="en-US" sz="760" dirty="0">
-                          <a:solidFill>
-                            <a:srgbClr val="000000"/>
-                          </a:solidFill>
-                          <a:latin typeface="Meiryo" pitchFamily="34" charset="0"/>
-                          <a:ea typeface="Meiryo" pitchFamily="34" charset="-122"/>
-                          <a:cs typeface="Meiryo" pitchFamily="34" charset="-120"/>
-                        </a:rPr>
-                        <a:t>スキルを前提にせず入力作業をマニュアル化する方針</a:t>
-                      </a:r>
-                      <a:endParaRPr lang="en-US" sz="760" dirty="0">
-                        <a:latin typeface="Meiryo" charset="0"/>
-                        <a:ea typeface="Meiryo" charset="0"/>
-                        <a:cs typeface="Meiryo" charset="0"/>
-                      </a:endParaRPr>
-                    </a:p>
-                  </a:txBody>
-                  <a:tcPr marL="91440" marR="91440" marT="45720" marB="45720" anchor="ctr">
-                    <a:lnL w="6350" cap="flat" cmpd="sng" algn="ctr">
-                      <a:solidFill>
-                        <a:srgbClr val="C9D5E6"/>
-                      </a:solidFill>
-                      <a:prstDash val="solid"/>
-                      <a:round/>
-                      <a:headEnd type="none" w="med" len="med"/>
-                      <a:tailEnd type="none" w="med" len="med"/>
-                    </a:lnL>
-                    <a:lnR w="6350" cap="flat" cmpd="sng" algn="ctr">
-                      <a:solidFill>
-                        <a:srgbClr val="C9D5E6"/>
-                      </a:solidFill>
-                      <a:prstDash val="solid"/>
-                      <a:round/>
-                      <a:headEnd type="none" w="med" len="med"/>
-                      <a:tailEnd type="none" w="med" len="med"/>
-                    </a:lnR>
-                    <a:lnT w="6350" cap="flat" cmpd="sng" algn="ctr">
-                      <a:solidFill>
-                        <a:srgbClr val="C9D5E6"/>
-                      </a:solidFill>
-                      <a:prstDash val="solid"/>
-                      <a:round/>
-                      <a:headEnd type="none" w="med" len="med"/>
-                      <a:tailEnd type="none" w="med" len="med"/>
-                    </a:lnT>
-                    <a:lnB w="6350" cap="flat" cmpd="sng" algn="ctr">
-                      <a:solidFill>
-                        <a:srgbClr val="C9D5E6"/>
-                      </a:solidFill>
-                      <a:prstDash val="solid"/>
-                      <a:round/>
-                      <a:headEnd type="none" w="med" len="med"/>
-                      <a:tailEnd type="none" w="med" len="med"/>
-                    </a:lnB>
-                  </a:tcPr>
-                </a:tc>
-                <a:tc>
-                  <a:txBody>
-                    <a:bodyPr/>
-                    <a:lstStyle/>
-                    <a:p>
-                      <a:pPr indent="0" marL="0">
-                        <a:buNone/>
-                      </a:pPr>
-                      <a:r>
-                        <a:rPr lang="en-US" sz="760" dirty="0">
-                          <a:solidFill>
-                            <a:srgbClr val="6B7280"/>
-                          </a:solidFill>
-                          <a:latin typeface="Meiryo" pitchFamily="34" charset="0"/>
-                          <a:ea typeface="Meiryo" pitchFamily="34" charset="-122"/>
-                          <a:cs typeface="Meiryo" pitchFamily="34" charset="-120"/>
-                        </a:rPr>
                         <a:t>設計思想の転換として妥当</a:t>
-                      </a:r>
-                      <a:endParaRPr lang="en-US" sz="760" dirty="0">
-                        <a:latin typeface="Meiryo" charset="0"/>
-                        <a:ea typeface="Meiryo" charset="0"/>
-                        <a:cs typeface="Meiryo" charset="0"/>
-                      </a:endParaRPr>
-                    </a:p>
-                  </a:txBody>
-                  <a:tcPr marL="91440" marR="91440" marT="45720" marB="45720" anchor="ctr">
-                    <a:lnL w="6350" cap="flat" cmpd="sng" algn="ctr">
-                      <a:solidFill>
-                        <a:srgbClr val="C9D5E6"/>
-                      </a:solidFill>
-                      <a:prstDash val="solid"/>
-                      <a:round/>
-                      <a:headEnd type="none" w="med" len="med"/>
-                      <a:tailEnd type="none" w="med" len="med"/>
-                    </a:lnL>
-                    <a:lnR w="6350" cap="flat" cmpd="sng" algn="ctr">
-                      <a:solidFill>
-                        <a:srgbClr val="C9D5E6"/>
-                      </a:solidFill>
-                      <a:prstDash val="solid"/>
-                      <a:round/>
-                      <a:headEnd type="none" w="med" len="med"/>
-                      <a:tailEnd type="none" w="med" len="med"/>
-                    </a:lnR>
-                    <a:lnT w="6350" cap="flat" cmpd="sng" algn="ctr">
-                      <a:solidFill>
-                        <a:srgbClr val="C9D5E6"/>
-                      </a:solidFill>
-                      <a:prstDash val="solid"/>
-                      <a:round/>
-                      <a:headEnd type="none" w="med" len="med"/>
-                      <a:tailEnd type="none" w="med" len="med"/>
-                    </a:lnT>
-                    <a:lnB w="6350" cap="flat" cmpd="sng" algn="ctr">
-                      <a:solidFill>
-                        <a:srgbClr val="C9D5E6"/>
-                      </a:solidFill>
-                      <a:prstDash val="solid"/>
-                      <a:round/>
-                      <a:headEnd type="none" w="med" len="med"/>
-                      <a:tailEnd type="none" w="med" len="med"/>
-                    </a:lnB>
-                  </a:tcPr>
-                </a:tc>
-              </a:tr>
-              <a:tr h="395151">
-                <a:tc>
-                  <a:txBody>
-                    <a:bodyPr/>
-                    <a:lstStyle/>
-                    <a:p>
-                      <a:pPr algn="ctr" indent="0" marL="0">
-                        <a:buNone/>
-                      </a:pPr>
-                      <a:r>
-                        <a:rPr lang="en-US" sz="780" b="1" dirty="0">
-                          <a:solidFill>
-                            <a:srgbClr val="000000"/>
-                          </a:solidFill>
-                          <a:latin typeface="Meiryo" pitchFamily="34" charset="0"/>
-                          <a:ea typeface="Meiryo" pitchFamily="34" charset="-122"/>
-                          <a:cs typeface="Meiryo" pitchFamily="34" charset="-120"/>
-                        </a:rPr>
-                        <a:t>H8-04</a:t>
-                      </a:r>
-                      <a:endParaRPr lang="en-US" sz="780" dirty="0">
-                        <a:latin typeface="Meiryo" charset="0"/>
-                        <a:ea typeface="Meiryo" charset="0"/>
-                        <a:cs typeface="Meiryo" charset="0"/>
-                      </a:endParaRPr>
-                    </a:p>
-                  </a:txBody>
-                  <a:tcPr marL="91440" marR="91440" marT="45720" marB="45720" anchor="ctr">
-                    <a:lnL w="6350" cap="flat" cmpd="sng" algn="ctr">
-                      <a:solidFill>
-                        <a:srgbClr val="C9D5E6"/>
-                      </a:solidFill>
-                      <a:prstDash val="solid"/>
-                      <a:round/>
-                      <a:headEnd type="none" w="med" len="med"/>
-                      <a:tailEnd type="none" w="med" len="med"/>
-                    </a:lnL>
-                    <a:lnR w="6350" cap="flat" cmpd="sng" algn="ctr">
-                      <a:solidFill>
-                        <a:srgbClr val="C9D5E6"/>
-                      </a:solidFill>
-                      <a:prstDash val="solid"/>
-                      <a:round/>
-                      <a:headEnd type="none" w="med" len="med"/>
-                      <a:tailEnd type="none" w="med" len="med"/>
-                    </a:lnR>
-                    <a:lnT w="6350" cap="flat" cmpd="sng" algn="ctr">
-                      <a:solidFill>
-                        <a:srgbClr val="C9D5E6"/>
-                      </a:solidFill>
-                      <a:prstDash val="solid"/>
-                      <a:round/>
-                      <a:headEnd type="none" w="med" len="med"/>
-                      <a:tailEnd type="none" w="med" len="med"/>
-                    </a:lnT>
-                    <a:lnB w="6350" cap="flat" cmpd="sng" algn="ctr">
-                      <a:solidFill>
-                        <a:srgbClr val="C9D5E6"/>
-                      </a:solidFill>
-                      <a:prstDash val="solid"/>
-                      <a:round/>
-                      <a:headEnd type="none" w="med" len="med"/>
-                      <a:tailEnd type="none" w="med" len="med"/>
-                    </a:lnB>
-                  </a:tcPr>
-                </a:tc>
-                <a:tc>
-                  <a:txBody>
-                    <a:bodyPr/>
-                    <a:lstStyle/>
-                    <a:p>
-                      <a:pPr indent="0" marL="0">
-                        <a:buNone/>
-                      </a:pPr>
-                      <a:r>
-                        <a:rPr lang="en-US" sz="760" dirty="0">
-                          <a:solidFill>
-                            <a:srgbClr val="000000"/>
-                          </a:solidFill>
-                          <a:latin typeface="Meiryo" pitchFamily="34" charset="0"/>
-                          <a:ea typeface="Meiryo" pitchFamily="34" charset="-122"/>
-                          <a:cs typeface="Meiryo" pitchFamily="34" charset="-120"/>
-                        </a:rPr>
-                        <a:t>業務の拠点内での位置づけ</a:t>
-                      </a:r>
-                      <a:endParaRPr lang="en-US" sz="760" dirty="0">
-                        <a:latin typeface="Meiryo" charset="0"/>
-                        <a:ea typeface="Meiryo" charset="0"/>
-                        <a:cs typeface="Meiryo" charset="0"/>
-                      </a:endParaRPr>
-                    </a:p>
-                  </a:txBody>
-                  <a:tcPr marL="91440" marR="91440" marT="45720" marB="45720" anchor="ctr">
-                    <a:lnL w="6350" cap="flat" cmpd="sng" algn="ctr">
-                      <a:solidFill>
-                        <a:srgbClr val="C9D5E6"/>
-                      </a:solidFill>
-                      <a:prstDash val="solid"/>
-                      <a:round/>
-                      <a:headEnd type="none" w="med" len="med"/>
-                      <a:tailEnd type="none" w="med" len="med"/>
-                    </a:lnL>
-                    <a:lnR w="6350" cap="flat" cmpd="sng" algn="ctr">
-                      <a:solidFill>
-                        <a:srgbClr val="C9D5E6"/>
-                      </a:solidFill>
-                      <a:prstDash val="solid"/>
-                      <a:round/>
-                      <a:headEnd type="none" w="med" len="med"/>
-                      <a:tailEnd type="none" w="med" len="med"/>
-                    </a:lnR>
-                    <a:lnT w="6350" cap="flat" cmpd="sng" algn="ctr">
-                      <a:solidFill>
-                        <a:srgbClr val="C9D5E6"/>
-                      </a:solidFill>
-                      <a:prstDash val="solid"/>
-                      <a:round/>
-                      <a:headEnd type="none" w="med" len="med"/>
-                      <a:tailEnd type="none" w="med" len="med"/>
-                    </a:lnT>
-                    <a:lnB w="6350" cap="flat" cmpd="sng" algn="ctr">
-                      <a:solidFill>
-                        <a:srgbClr val="C9D5E6"/>
-                      </a:solidFill>
-                      <a:prstDash val="solid"/>
-                      <a:round/>
-                      <a:headEnd type="none" w="med" len="med"/>
-                      <a:tailEnd type="none" w="med" len="med"/>
-                    </a:lnB>
-                  </a:tcPr>
-                </a:tc>
-                <a:tc>
-                  <a:txBody>
-                    <a:bodyPr/>
-                    <a:lstStyle/>
-                    <a:p>
-                      <a:pPr indent="0" marL="0">
-                        <a:buNone/>
-                      </a:pPr>
-                      <a:r>
-                        <a:rPr lang="en-US" sz="760" dirty="0">
-                          <a:solidFill>
-                            <a:srgbClr val="000000"/>
-                          </a:solidFill>
-                          <a:latin typeface="Meiryo" pitchFamily="34" charset="0"/>
-                          <a:ea typeface="Meiryo" pitchFamily="34" charset="-122"/>
-                          <a:cs typeface="Meiryo" pitchFamily="34" charset="-120"/>
-                        </a:rPr>
-                        <a:t>自己申告でなく実際の対応状況で督促強度を判断</a:t>
-                      </a:r>
-                      <a:endParaRPr lang="en-US" sz="760" dirty="0">
-                        <a:latin typeface="Meiryo" charset="0"/>
-                        <a:ea typeface="Meiryo" charset="0"/>
-                        <a:cs typeface="Meiryo" charset="0"/>
-                      </a:endParaRPr>
-                    </a:p>
-                  </a:txBody>
-                  <a:tcPr marL="91440" marR="91440" marT="45720" marB="45720" anchor="ctr">
-                    <a:lnL w="6350" cap="flat" cmpd="sng" algn="ctr">
-                      <a:solidFill>
-                        <a:srgbClr val="C9D5E6"/>
-                      </a:solidFill>
-                      <a:prstDash val="solid"/>
-                      <a:round/>
-                      <a:headEnd type="none" w="med" len="med"/>
-                      <a:tailEnd type="none" w="med" len="med"/>
-                    </a:lnL>
-                    <a:lnR w="6350" cap="flat" cmpd="sng" algn="ctr">
-                      <a:solidFill>
-                        <a:srgbClr val="C9D5E6"/>
-                      </a:solidFill>
-                      <a:prstDash val="solid"/>
-                      <a:round/>
-                      <a:headEnd type="none" w="med" len="med"/>
-                      <a:tailEnd type="none" w="med" len="med"/>
-                    </a:lnR>
-                    <a:lnT w="6350" cap="flat" cmpd="sng" algn="ctr">
-                      <a:solidFill>
-                        <a:srgbClr val="C9D5E6"/>
-                      </a:solidFill>
-                      <a:prstDash val="solid"/>
-                      <a:round/>
-                      <a:headEnd type="none" w="med" len="med"/>
-                      <a:tailEnd type="none" w="med" len="med"/>
-                    </a:lnT>
-                    <a:lnB w="6350" cap="flat" cmpd="sng" algn="ctr">
-                      <a:solidFill>
-                        <a:srgbClr val="C9D5E6"/>
-                      </a:solidFill>
-                      <a:prstDash val="solid"/>
-                      <a:round/>
-                      <a:headEnd type="none" w="med" len="med"/>
-                      <a:tailEnd type="none" w="med" len="med"/>
-                    </a:lnB>
-                  </a:tcPr>
-                </a:tc>
-                <a:tc>
-                  <a:txBody>
-                    <a:bodyPr/>
-                    <a:lstStyle/>
-                    <a:p>
-                      <a:pPr indent="0" marL="0">
-                        <a:buNone/>
-                      </a:pPr>
-                      <a:r>
-                        <a:rPr lang="en-US" sz="760" dirty="0">
-                          <a:solidFill>
-                            <a:srgbClr val="6B7280"/>
-                          </a:solidFill>
-                          <a:latin typeface="Meiryo" pitchFamily="34" charset="0"/>
-                          <a:ea typeface="Meiryo" pitchFamily="34" charset="-122"/>
-                          <a:cs typeface="Meiryo" pitchFamily="34" charset="-120"/>
-                        </a:rPr>
-                        <a:t>客観的データへの切替で妥当</a:t>
                       </a:r>
                       <a:endParaRPr lang="en-US" sz="760" dirty="0">
                         <a:latin typeface="Meiryo" charset="0"/>
@@ -32311,7 +32743,7 @@
                           <a:ea typeface="Meiryo" pitchFamily="34" charset="-122"/>
                           <a:cs typeface="Meiryo" pitchFamily="34" charset="-120"/>
                         </a:rPr>
-                        <a:t>H9-01</a:t>
+                        <a:t>H8-04</a:t>
                       </a:r>
                       <a:endParaRPr lang="en-US" sz="780" dirty="0">
                         <a:latin typeface="Meiryo" charset="0"/>
@@ -32376,7 +32808,7 @@
                           <a:ea typeface="Meiryo" pitchFamily="34" charset="-122"/>
                           <a:cs typeface="Meiryo" pitchFamily="34" charset="-120"/>
                         </a:rPr>
-                        <a:t>言語・翻訳体制</a:t>
+                        <a:t>業務の拠点内での位置づけ</a:t>
                       </a:r>
                       <a:endParaRPr lang="en-US" sz="760" dirty="0">
                         <a:latin typeface="Meiryo" charset="0"/>
@@ -32441,7 +32873,7 @@
                           <a:ea typeface="Meiryo" pitchFamily="34" charset="-122"/>
                           <a:cs typeface="Meiryo" pitchFamily="34" charset="-120"/>
                         </a:rPr>
-                        <a:t>多言語対応をRFPに含める前提で設計</a:t>
+                        <a:t>自己申告でなく実際の対応状況で督促強度を判断</a:t>
                       </a:r>
                       <a:endParaRPr lang="en-US" sz="760" dirty="0">
                         <a:latin typeface="Meiryo" charset="0"/>
@@ -32506,7 +32938,7 @@
                           <a:ea typeface="Meiryo" pitchFamily="34" charset="-122"/>
                           <a:cs typeface="Meiryo" pitchFamily="34" charset="-120"/>
                         </a:rPr>
-                        <a:t>機能を厚めに実装する対応で妥当</a:t>
+                        <a:t>客観的データへの切替で妥当</a:t>
                       </a:r>
                       <a:endParaRPr lang="en-US" sz="760" dirty="0">
                         <a:latin typeface="Meiryo" charset="0"/>
